--- a/health_expenditure_analysis.pptx
+++ b/health_expenditure_analysis.pptx
@@ -13,8 +13,6 @@
     <p:sldId id="261" r:id="rId12"/>
     <p:sldId id="262" r:id="rId13"/>
     <p:sldId id="263" r:id="rId14"/>
-    <p:sldId id="264" r:id="rId15"/>
-    <p:sldId id="265" r:id="rId16"/>
   </p:sldIdLst>
   <p:sldSz cx="12191695" cy="6858000" type="screen4x3"/>
   <p:notesSz cx="6858000" cy="9144000"/>
@@ -3093,7 +3091,7 @@
     <p:bg>
       <p:bgPr>
         <a:solidFill>
-          <a:srgbClr val="004578"/>
+          <a:srgbClr val="1B2A45"/>
         </a:solidFill>
         <a:effectLst/>
       </p:bgPr>
@@ -3107,20 +3105,211 @@
       <p:grpSpPr/>
       <p:sp>
         <p:nvSpPr>
-          <p:cNvPr id="2" name="Rectangle 1"/>
+          <p:cNvPr id="2" name="TextBox 1"/>
+          <p:cNvSpPr txBox="1"/>
+          <p:nvPr/>
+        </p:nvSpPr>
+        <p:spPr>
+          <a:xfrm>
+            <a:off x="411480" y="347472"/>
+            <a:ext cx="10972800" cy="292608"/>
+          </a:xfrm>
+          <a:prstGeom prst="rect">
+            <a:avLst/>
+          </a:prstGeom>
+          <a:noFill/>
+        </p:spPr>
+        <p:txBody>
+          <a:bodyPr wrap="square">
+            <a:spAutoFit/>
+          </a:bodyPr>
+          <a:lstStyle/>
+          <a:p>
+            <a:pPr algn="l"/>
+            <a:r>
+              <a:rPr sz="900" b="1" i="0">
+                <a:solidFill>
+                  <a:srgbClr val="94A3B8"/>
+                </a:solidFill>
+              </a:rPr>
+              <a:t>A DATA STORY  ·  HEALTH SPENDING vs. LONGEVITY</a:t>
+            </a:r>
+          </a:p>
+        </p:txBody>
+      </p:sp>
+      <p:sp>
+        <p:nvSpPr>
+          <p:cNvPr id="3" name="TextBox 2"/>
+          <p:cNvSpPr txBox="1"/>
+          <p:nvPr/>
+        </p:nvSpPr>
+        <p:spPr>
+          <a:xfrm>
+            <a:off x="411480" y="1097280"/>
+            <a:ext cx="11247120" cy="2834640"/>
+          </a:xfrm>
+          <a:prstGeom prst="rect">
+            <a:avLst/>
+          </a:prstGeom>
+          <a:noFill/>
+        </p:spPr>
+        <p:txBody>
+          <a:bodyPr wrap="square">
+            <a:spAutoFit/>
+          </a:bodyPr>
+          <a:lstStyle/>
+          <a:p>
+            <a:pPr algn="l">
+              <a:spcBef>
+                <a:spcPts val="0"/>
+              </a:spcBef>
+              <a:spcAft>
+                <a:spcPts val="0"/>
+              </a:spcAft>
+            </a:pPr>
+            <a:r>
+              <a:rPr sz="5000" b="1">
+                <a:solidFill>
+                  <a:srgbClr val="FFFFFF"/>
+                </a:solidFill>
+              </a:rPr>
+              <a:t>America’s longevity problem </a:t>
+            </a:r>
+            <a:r>
+              <a:rPr sz="5000" b="1">
+                <a:solidFill>
+                  <a:srgbClr val="C0392B"/>
+                </a:solidFill>
+              </a:rPr>
+              <a:t>isn’t a</a:t>
+            </a:r>
+          </a:p>
+          <a:p>
+            <a:pPr algn="l">
+              <a:spcBef>
+                <a:spcPts val="0"/>
+              </a:spcBef>
+              <a:spcAft>
+                <a:spcPts val="0"/>
+              </a:spcAft>
+            </a:pPr>
+            <a:r>
+              <a:rPr sz="5000" b="1">
+                <a:solidFill>
+                  <a:srgbClr val="C0392B"/>
+                </a:solidFill>
+              </a:rPr>
+              <a:t>budget problem.</a:t>
+            </a:r>
+          </a:p>
+          <a:p>
+            <a:pPr algn="l">
+              <a:spcBef>
+                <a:spcPts val="0"/>
+              </a:spcBef>
+              <a:spcAft>
+                <a:spcPts val="0"/>
+              </a:spcAft>
+            </a:pPr>
+            <a:r>
+              <a:rPr sz="5000" b="1">
+                <a:solidFill>
+                  <a:srgbClr val="FFFFFF"/>
+                </a:solidFill>
+              </a:rPr>
+              <a:t>It’s </a:t>
+            </a:r>
+            <a:r>
+              <a:rPr sz="5000" b="1">
+                <a:solidFill>
+                  <a:srgbClr val="2BA88A"/>
+                </a:solidFill>
+              </a:rPr>
+              <a:t>upstream</a:t>
+            </a:r>
+            <a:r>
+              <a:rPr sz="5000" b="1">
+                <a:solidFill>
+                  <a:srgbClr val="FFFFFF"/>
+                </a:solidFill>
+              </a:rPr>
+              <a:t> of the budget.</a:t>
+            </a:r>
+          </a:p>
+        </p:txBody>
+      </p:sp>
+      <p:sp>
+        <p:nvSpPr>
+          <p:cNvPr id="4" name="TextBox 3"/>
+          <p:cNvSpPr txBox="1"/>
+          <p:nvPr/>
+        </p:nvSpPr>
+        <p:spPr>
+          <a:xfrm>
+            <a:off x="411480" y="4480560"/>
+            <a:ext cx="8961120" cy="1188720"/>
+          </a:xfrm>
+          <a:prstGeom prst="rect">
+            <a:avLst/>
+          </a:prstGeom>
+          <a:noFill/>
+        </p:spPr>
+        <p:txBody>
+          <a:bodyPr wrap="square">
+            <a:spAutoFit/>
+          </a:bodyPr>
+          <a:lstStyle/>
+          <a:p>
+            <a:pPr algn="l"/>
+            <a:r>
+              <a:rPr sz="1350" b="0" i="0">
+                <a:solidFill>
+                  <a:srgbClr val="B8C8D8"/>
+                </a:solidFill>
+              </a:rPr>
+              <a:t>Longer lives track education, lifestyle, demographics and how care is priced —</a:t>
+            </a:r>
+          </a:p>
+          <a:p>
+            <a:pPr algn="l"/>
+            <a:r>
+              <a:rPr sz="1350" b="0" i="0">
+                <a:solidFill>
+                  <a:srgbClr val="B8C8D8"/>
+                </a:solidFill>
+              </a:rPr>
+              <a:t>and on every one of these, the country that spends the most falls behind.</a:t>
+            </a:r>
+          </a:p>
+          <a:p>
+            <a:pPr algn="l"/>
+            <a:r>
+              <a:rPr sz="1350" b="0" i="0">
+                <a:solidFill>
+                  <a:srgbClr val="B8C8D8"/>
+                </a:solidFill>
+              </a:rPr>
+              <a:t>Here is what the highest spenders are doing differently.</a:t>
+            </a:r>
+          </a:p>
+        </p:txBody>
+      </p:sp>
+      <p:sp>
+        <p:nvSpPr>
+          <p:cNvPr id="5" name="Rectangle 4"/>
           <p:cNvSpPr/>
           <p:nvPr/>
         </p:nvSpPr>
         <p:spPr>
           <a:xfrm>
-            <a:off x="0" y="0"/>
-            <a:ext cx="320040" cy="6858000"/>
+            <a:off x="411480" y="5870448"/>
+            <a:ext cx="5029200" cy="22860"/>
           </a:xfrm>
           <a:prstGeom prst="rect">
             <a:avLst/>
           </a:prstGeom>
           <a:solidFill>
-            <a:srgbClr val="0078D4"/>
+            <a:srgbClr val="2B4B75"/>
           </a:solidFill>
           <a:ln>
             <a:noFill/>
@@ -3150,99 +3339,20 @@
       </p:sp>
       <p:sp>
         <p:nvSpPr>
-          <p:cNvPr id="3" name="TextBox 2"/>
-          <p:cNvSpPr txBox="1"/>
-          <p:nvPr/>
-        </p:nvSpPr>
-        <p:spPr>
-          <a:xfrm>
-            <a:off x="640080" y="1280160"/>
-            <a:ext cx="10515600" cy="2194560"/>
-          </a:xfrm>
-          <a:prstGeom prst="rect">
-            <a:avLst/>
-          </a:prstGeom>
-          <a:noFill/>
-        </p:spPr>
-        <p:txBody>
-          <a:bodyPr wrap="square">
-            <a:spAutoFit/>
-          </a:bodyPr>
-          <a:lstStyle/>
-          <a:p>
-            <a:pPr algn="l"/>
-            <a:r>
-              <a:rPr sz="4000" b="1" i="0">
-                <a:solidFill>
-                  <a:srgbClr val="FFFFFF"/>
-                </a:solidFill>
-              </a:rPr>
-              <a:t>America's Longevity Problem</a:t>
-            </a:r>
-          </a:p>
-          <a:p>
-            <a:pPr algn="l"/>
-            <a:r>
-              <a:rPr sz="4000" b="1" i="0">
-                <a:solidFill>
-                  <a:srgbClr val="FFFFFF"/>
-                </a:solidFill>
-              </a:rPr>
-              <a:t>Is Not a Budget Problem</a:t>
-            </a:r>
-          </a:p>
-        </p:txBody>
-      </p:sp>
-      <p:sp>
-        <p:nvSpPr>
-          <p:cNvPr id="4" name="TextBox 3"/>
-          <p:cNvSpPr txBox="1"/>
-          <p:nvPr/>
-        </p:nvSpPr>
-        <p:spPr>
-          <a:xfrm>
-            <a:off x="640080" y="3566160"/>
-            <a:ext cx="10058400" cy="594360"/>
-          </a:xfrm>
-          <a:prstGeom prst="rect">
-            <a:avLst/>
-          </a:prstGeom>
-          <a:noFill/>
-        </p:spPr>
-        <p:txBody>
-          <a:bodyPr wrap="square">
-            <a:spAutoFit/>
-          </a:bodyPr>
-          <a:lstStyle/>
-          <a:p>
-            <a:pPr algn="l"/>
-            <a:r>
-              <a:rPr sz="2200" b="0" i="0">
-                <a:solidFill>
-                  <a:srgbClr val="90CAF9"/>
-                </a:solidFill>
-              </a:rPr>
-              <a:t>It is upstream of the budget.</a:t>
-            </a:r>
-          </a:p>
-        </p:txBody>
-      </p:sp>
-      <p:sp>
-        <p:nvSpPr>
-          <p:cNvPr id="5" name="Rectangle 4"/>
+          <p:cNvPr id="6" name="Oval 5"/>
           <p:cNvSpPr/>
           <p:nvPr/>
         </p:nvSpPr>
         <p:spPr>
           <a:xfrm>
-            <a:off x="640080" y="4251960"/>
-            <a:ext cx="5486400" cy="36576"/>
-          </a:xfrm>
-          <a:prstGeom prst="rect">
+            <a:off x="411480" y="6053328"/>
+            <a:ext cx="201168" cy="201168"/>
+          </a:xfrm>
+          <a:prstGeom prst="ellipse">
             <a:avLst/>
           </a:prstGeom>
           <a:solidFill>
-            <a:srgbClr val="0078D4"/>
+            <a:srgbClr val="C0392B"/>
           </a:solidFill>
           <a:ln>
             <a:noFill/>
@@ -3272,14 +3382,14 @@
       </p:sp>
       <p:sp>
         <p:nvSpPr>
-          <p:cNvPr id="6" name="TextBox 5"/>
+          <p:cNvPr id="7" name="TextBox 6"/>
           <p:cNvSpPr txBox="1"/>
           <p:nvPr/>
         </p:nvSpPr>
         <p:spPr>
           <a:xfrm>
-            <a:off x="640080" y="4434840"/>
-            <a:ext cx="10515600" cy="1828800"/>
+            <a:off x="694944" y="6025896"/>
+            <a:ext cx="1828800" cy="292608"/>
           </a:xfrm>
           <a:prstGeom prst="rect">
             <a:avLst/>
@@ -3294,128 +3404,26 @@
           <a:p>
             <a:pPr algn="l"/>
             <a:r>
-              <a:rPr sz="1300" b="0" i="0">
-                <a:solidFill>
-                  <a:srgbClr val="B0BEC5"/>
-                </a:solidFill>
-              </a:rPr>
-              <a:t>A data-driven investigation into health expenditure, life expectancy, and</a:t>
-            </a:r>
-          </a:p>
-          <a:p>
-            <a:pPr algn="l"/>
-            <a:r>
-              <a:rPr sz="1300" b="0" i="0">
-                <a:solidFill>
-                  <a:srgbClr val="B0BEC5"/>
-                </a:solidFill>
-              </a:rPr>
-              <a:t>the upstream factors that explain America's $8,431-per-person paradox.</a:t>
-            </a:r>
-          </a:p>
-          <a:p>
-            <a:pPr algn="l"/>
-            <a:r>
-              <a:rPr sz="1300" b="0" i="0">
-                <a:solidFill>
-                  <a:srgbClr val="B0BEC5"/>
-                </a:solidFill>
-              </a:rPr>
-              <a:t/>
-            </a:r>
-          </a:p>
-          <a:p>
-            <a:pPr algn="l"/>
-            <a:r>
-              <a:rPr sz="1300" b="0" i="0">
-                <a:solidFill>
-                  <a:srgbClr val="B0BEC5"/>
-                </a:solidFill>
-              </a:rPr>
-              <a:t>Source: World Bank World Development Indicators  |  2000 – 2023</a:t>
-            </a:r>
-          </a:p>
-        </p:txBody>
-      </p:sp>
-    </p:spTree>
-  </p:cSld>
-  <p:clrMapOvr>
-    <a:masterClrMapping/>
-  </p:clrMapOvr>
-</p:sld>
-</file>
-
-<file path=ppt/slides/slide10.xml><?xml version="1.0" encoding="utf-8"?>
-<p:sld xmlns:a="http://schemas.openxmlformats.org/drawingml/2006/main" xmlns:p="http://schemas.openxmlformats.org/presentationml/2006/main" xmlns:r="http://schemas.openxmlformats.org/officeDocument/2006/relationships">
-  <p:cSld>
-    <p:bg>
-      <p:bgPr>
-        <a:solidFill>
-          <a:srgbClr val="004578"/>
-        </a:solidFill>
-        <a:effectLst/>
-      </p:bgPr>
-    </p:bg>
-    <p:spTree>
-      <p:nvGrpSpPr>
-        <p:cNvPr id="1" name=""/>
-        <p:cNvGrpSpPr/>
-        <p:nvPr/>
-      </p:nvGrpSpPr>
-      <p:grpSpPr/>
-      <p:sp>
-        <p:nvSpPr>
-          <p:cNvPr id="2" name="Rectangle 1"/>
-          <p:cNvSpPr/>
-          <p:nvPr/>
-        </p:nvSpPr>
-        <p:spPr>
-          <a:xfrm>
-            <a:off x="0" y="0"/>
-            <a:ext cx="320040" cy="6858000"/>
-          </a:xfrm>
-          <a:prstGeom prst="rect">
-            <a:avLst/>
-          </a:prstGeom>
-          <a:solidFill>
-            <a:srgbClr val="0078D4"/>
-          </a:solidFill>
-          <a:ln>
-            <a:noFill/>
-          </a:ln>
-        </p:spPr>
-        <p:style>
-          <a:lnRef idx="1">
-            <a:schemeClr val="accent1"/>
-          </a:lnRef>
-          <a:fillRef idx="3">
-            <a:schemeClr val="accent1"/>
-          </a:fillRef>
-          <a:effectRef idx="2">
-            <a:schemeClr val="accent1"/>
-          </a:effectRef>
-          <a:fontRef idx="minor">
-            <a:schemeClr val="lt1"/>
-          </a:fontRef>
-        </p:style>
-        <p:txBody>
-          <a:bodyPr rtlCol="0" anchor="ctr"/>
-          <a:lstStyle/>
-          <a:p>
-            <a:pPr algn="ctr"/>
-          </a:p>
-        </p:txBody>
-      </p:sp>
-      <p:sp>
-        <p:nvSpPr>
-          <p:cNvPr id="3" name="TextBox 2"/>
+              <a:rPr sz="1100" b="1" i="0">
+                <a:solidFill>
+                  <a:srgbClr val="C0392B"/>
+                </a:solidFill>
+              </a:rPr>
+              <a:t>United States</a:t>
+            </a:r>
+          </a:p>
+        </p:txBody>
+      </p:sp>
+      <p:sp>
+        <p:nvSpPr>
+          <p:cNvPr id="8" name="TextBox 7"/>
           <p:cNvSpPr txBox="1"/>
           <p:nvPr/>
         </p:nvSpPr>
         <p:spPr>
           <a:xfrm>
-            <a:off x="640080" y="411480"/>
-            <a:ext cx="10972800" cy="566928"/>
+            <a:off x="2606040" y="6025896"/>
+            <a:ext cx="7772400" cy="292608"/>
           </a:xfrm>
           <a:prstGeom prst="rect">
             <a:avLst/>
@@ -3430,26 +3438,26 @@
           <a:p>
             <a:pPr algn="l"/>
             <a:r>
-              <a:rPr sz="2800" b="1" i="0">
-                <a:solidFill>
-                  <a:srgbClr val="FFFFFF"/>
-                </a:solidFill>
-              </a:rPr>
-              <a:t>The question is no longer how much to spend.</a:t>
-            </a:r>
-          </a:p>
-        </p:txBody>
-      </p:sp>
-      <p:sp>
-        <p:nvSpPr>
-          <p:cNvPr id="4" name="TextBox 3"/>
+              <a:rPr sz="1100" b="0" i="0">
+                <a:solidFill>
+                  <a:srgbClr val="94A3B8"/>
+                </a:solidFill>
+              </a:rPr>
+              <a:t>vs. the world’s 14 highest-income health spenders</a:t>
+            </a:r>
+          </a:p>
+        </p:txBody>
+      </p:sp>
+      <p:sp>
+        <p:nvSpPr>
+          <p:cNvPr id="9" name="TextBox 8"/>
           <p:cNvSpPr txBox="1"/>
           <p:nvPr/>
         </p:nvSpPr>
         <p:spPr>
           <a:xfrm>
-            <a:off x="640080" y="1005840"/>
-            <a:ext cx="10515600" cy="502920"/>
+            <a:off x="411480" y="6556248"/>
+            <a:ext cx="11338560" cy="256032"/>
           </a:xfrm>
           <a:prstGeom prst="rect">
             <a:avLst/>
@@ -3464,524 +3472,12 @@
           <a:p>
             <a:pPr algn="l"/>
             <a:r>
-              <a:rPr sz="1500" b="0" i="0">
-                <a:solidFill>
-                  <a:srgbClr val="90CAF9"/>
-                </a:solidFill>
-              </a:rPr>
-              <a:t>It's what the highest-spending countries are doing differently — and what they should stop doing.</a:t>
-            </a:r>
-          </a:p>
-        </p:txBody>
-      </p:sp>
-      <p:sp>
-        <p:nvSpPr>
-          <p:cNvPr id="5" name="Rectangle 4"/>
-          <p:cNvSpPr/>
-          <p:nvPr/>
-        </p:nvSpPr>
-        <p:spPr>
-          <a:xfrm>
-            <a:off x="640080" y="1737360"/>
-            <a:ext cx="457200" cy="457200"/>
-          </a:xfrm>
-          <a:prstGeom prst="rect">
-            <a:avLst/>
-          </a:prstGeom>
-          <a:solidFill>
-            <a:srgbClr val="0078D4"/>
-          </a:solidFill>
-          <a:ln>
-            <a:noFill/>
-          </a:ln>
-        </p:spPr>
-        <p:style>
-          <a:lnRef idx="1">
-            <a:schemeClr val="accent1"/>
-          </a:lnRef>
-          <a:fillRef idx="3">
-            <a:schemeClr val="accent1"/>
-          </a:fillRef>
-          <a:effectRef idx="2">
-            <a:schemeClr val="accent1"/>
-          </a:effectRef>
-          <a:fontRef idx="minor">
-            <a:schemeClr val="lt1"/>
-          </a:fontRef>
-        </p:style>
-        <p:txBody>
-          <a:bodyPr rtlCol="0" anchor="ctr"/>
-          <a:lstStyle/>
-          <a:p>
-            <a:pPr algn="ctr"/>
-          </a:p>
-        </p:txBody>
-      </p:sp>
-      <p:sp>
-        <p:nvSpPr>
-          <p:cNvPr id="6" name="TextBox 5"/>
-          <p:cNvSpPr txBox="1"/>
-          <p:nvPr/>
-        </p:nvSpPr>
-        <p:spPr>
-          <a:xfrm>
-            <a:off x="640080" y="1737360"/>
-            <a:ext cx="457200" cy="457200"/>
-          </a:xfrm>
-          <a:prstGeom prst="rect">
-            <a:avLst/>
-          </a:prstGeom>
-          <a:noFill/>
-        </p:spPr>
-        <p:txBody>
-          <a:bodyPr wrap="square">
-            <a:spAutoFit/>
-          </a:bodyPr>
-          <a:lstStyle/>
-          <a:p>
-            <a:pPr algn="ctr"/>
-            <a:r>
-              <a:rPr sz="1700" b="1" i="0">
-                <a:solidFill>
-                  <a:srgbClr val="FFFFFF"/>
-                </a:solidFill>
-              </a:rPr>
-              <a:t>1</a:t>
-            </a:r>
-          </a:p>
-        </p:txBody>
-      </p:sp>
-      <p:sp>
-        <p:nvSpPr>
-          <p:cNvPr id="7" name="TextBox 6"/>
-          <p:cNvSpPr txBox="1"/>
-          <p:nvPr/>
-        </p:nvSpPr>
-        <p:spPr>
-          <a:xfrm>
-            <a:off x="1234440" y="1737360"/>
-            <a:ext cx="10607040" cy="457200"/>
-          </a:xfrm>
-          <a:prstGeom prst="rect">
-            <a:avLst/>
-          </a:prstGeom>
-          <a:noFill/>
-        </p:spPr>
-        <p:txBody>
-          <a:bodyPr wrap="square">
-            <a:spAutoFit/>
-          </a:bodyPr>
-          <a:lstStyle/>
-          <a:p>
-            <a:pPr algn="l"/>
-            <a:r>
-              <a:rPr sz="1500" b="1" i="0">
-                <a:solidFill>
-                  <a:srgbClr val="FFFFFF"/>
-                </a:solidFill>
-              </a:rPr>
-              <a:t>Redirect spend upstream</a:t>
-            </a:r>
-          </a:p>
-        </p:txBody>
-      </p:sp>
-      <p:sp>
-        <p:nvSpPr>
-          <p:cNvPr id="8" name="TextBox 7"/>
-          <p:cNvSpPr txBox="1"/>
-          <p:nvPr/>
-        </p:nvSpPr>
-        <p:spPr>
-          <a:xfrm>
-            <a:off x="1234440" y="2212848"/>
-            <a:ext cx="10607040" cy="868680"/>
-          </a:xfrm>
-          <a:prstGeom prst="rect">
-            <a:avLst/>
-          </a:prstGeom>
-          <a:noFill/>
-        </p:spPr>
-        <p:txBody>
-          <a:bodyPr wrap="square">
-            <a:spAutoFit/>
-          </a:bodyPr>
-          <a:lstStyle/>
-          <a:p>
-            <a:pPr algn="l"/>
-            <a:r>
-              <a:rPr sz="1100" b="0" i="0">
-                <a:solidFill>
-                  <a:srgbClr val="B0BEC5"/>
-                </a:solidFill>
-              </a:rPr>
-              <a:t>Raise prevention and primary care from 2.9% to 6%+ of health spend. Every $1 in prevention saves $5–14 in downstream treatment costs.</a:t>
-            </a:r>
-          </a:p>
-        </p:txBody>
-      </p:sp>
-      <p:sp>
-        <p:nvSpPr>
-          <p:cNvPr id="9" name="Rectangle 8"/>
-          <p:cNvSpPr/>
-          <p:nvPr/>
-        </p:nvSpPr>
-        <p:spPr>
-          <a:xfrm>
-            <a:off x="640080" y="3200400"/>
-            <a:ext cx="457200" cy="457200"/>
-          </a:xfrm>
-          <a:prstGeom prst="rect">
-            <a:avLst/>
-          </a:prstGeom>
-          <a:solidFill>
-            <a:srgbClr val="0078D4"/>
-          </a:solidFill>
-          <a:ln>
-            <a:noFill/>
-          </a:ln>
-        </p:spPr>
-        <p:style>
-          <a:lnRef idx="1">
-            <a:schemeClr val="accent1"/>
-          </a:lnRef>
-          <a:fillRef idx="3">
-            <a:schemeClr val="accent1"/>
-          </a:fillRef>
-          <a:effectRef idx="2">
-            <a:schemeClr val="accent1"/>
-          </a:effectRef>
-          <a:fontRef idx="minor">
-            <a:schemeClr val="lt1"/>
-          </a:fontRef>
-        </p:style>
-        <p:txBody>
-          <a:bodyPr rtlCol="0" anchor="ctr"/>
-          <a:lstStyle/>
-          <a:p>
-            <a:pPr algn="ctr"/>
-          </a:p>
-        </p:txBody>
-      </p:sp>
-      <p:sp>
-        <p:nvSpPr>
-          <p:cNvPr id="10" name="TextBox 9"/>
-          <p:cNvSpPr txBox="1"/>
-          <p:nvPr/>
-        </p:nvSpPr>
-        <p:spPr>
-          <a:xfrm>
-            <a:off x="640080" y="3200400"/>
-            <a:ext cx="457200" cy="457200"/>
-          </a:xfrm>
-          <a:prstGeom prst="rect">
-            <a:avLst/>
-          </a:prstGeom>
-          <a:noFill/>
-        </p:spPr>
-        <p:txBody>
-          <a:bodyPr wrap="square">
-            <a:spAutoFit/>
-          </a:bodyPr>
-          <a:lstStyle/>
-          <a:p>
-            <a:pPr algn="ctr"/>
-            <a:r>
-              <a:rPr sz="1700" b="1" i="0">
-                <a:solidFill>
-                  <a:srgbClr val="FFFFFF"/>
-                </a:solidFill>
-              </a:rPr>
-              <a:t>2</a:t>
-            </a:r>
-          </a:p>
-        </p:txBody>
-      </p:sp>
-      <p:sp>
-        <p:nvSpPr>
-          <p:cNvPr id="11" name="TextBox 10"/>
-          <p:cNvSpPr txBox="1"/>
-          <p:nvPr/>
-        </p:nvSpPr>
-        <p:spPr>
-          <a:xfrm>
-            <a:off x="1234440" y="3200400"/>
-            <a:ext cx="10607040" cy="457200"/>
-          </a:xfrm>
-          <a:prstGeom prst="rect">
-            <a:avLst/>
-          </a:prstGeom>
-          <a:noFill/>
-        </p:spPr>
-        <p:txBody>
-          <a:bodyPr wrap="square">
-            <a:spAutoFit/>
-          </a:bodyPr>
-          <a:lstStyle/>
-          <a:p>
-            <a:pPr algn="l"/>
-            <a:r>
-              <a:rPr sz="1500" b="1" i="0">
-                <a:solidFill>
-                  <a:srgbClr val="FFFFFF"/>
-                </a:solidFill>
-              </a:rPr>
-              <a:t>Address obesity structurally</a:t>
-            </a:r>
-          </a:p>
-        </p:txBody>
-      </p:sp>
-      <p:sp>
-        <p:nvSpPr>
-          <p:cNvPr id="12" name="TextBox 11"/>
-          <p:cNvSpPr txBox="1"/>
-          <p:nvPr/>
-        </p:nvSpPr>
-        <p:spPr>
-          <a:xfrm>
-            <a:off x="1234440" y="3675888"/>
-            <a:ext cx="10607040" cy="868680"/>
-          </a:xfrm>
-          <a:prstGeom prst="rect">
-            <a:avLst/>
-          </a:prstGeom>
-          <a:noFill/>
-        </p:spPr>
-        <p:txBody>
-          <a:bodyPr wrap="square">
-            <a:spAutoFit/>
-          </a:bodyPr>
-          <a:lstStyle/>
-          <a:p>
-            <a:pPr algn="l"/>
-            <a:r>
-              <a:rPr sz="1100" b="0" i="0">
-                <a:solidFill>
-                  <a:srgbClr val="B0BEC5"/>
-                </a:solidFill>
-              </a:rPr>
-              <a:t>Implement population-level interventions: sugar taxes, food labelling reform, school nutrition programmes. These are public health investments, not individual choices.</a:t>
-            </a:r>
-          </a:p>
-        </p:txBody>
-      </p:sp>
-      <p:sp>
-        <p:nvSpPr>
-          <p:cNvPr id="13" name="Rectangle 12"/>
-          <p:cNvSpPr/>
-          <p:nvPr/>
-        </p:nvSpPr>
-        <p:spPr>
-          <a:xfrm>
-            <a:off x="640080" y="4663440"/>
-            <a:ext cx="457200" cy="457200"/>
-          </a:xfrm>
-          <a:prstGeom prst="rect">
-            <a:avLst/>
-          </a:prstGeom>
-          <a:solidFill>
-            <a:srgbClr val="0078D4"/>
-          </a:solidFill>
-          <a:ln>
-            <a:noFill/>
-          </a:ln>
-        </p:spPr>
-        <p:style>
-          <a:lnRef idx="1">
-            <a:schemeClr val="accent1"/>
-          </a:lnRef>
-          <a:fillRef idx="3">
-            <a:schemeClr val="accent1"/>
-          </a:fillRef>
-          <a:effectRef idx="2">
-            <a:schemeClr val="accent1"/>
-          </a:effectRef>
-          <a:fontRef idx="minor">
-            <a:schemeClr val="lt1"/>
-          </a:fontRef>
-        </p:style>
-        <p:txBody>
-          <a:bodyPr rtlCol="0" anchor="ctr"/>
-          <a:lstStyle/>
-          <a:p>
-            <a:pPr algn="ctr"/>
-          </a:p>
-        </p:txBody>
-      </p:sp>
-      <p:sp>
-        <p:nvSpPr>
-          <p:cNvPr id="14" name="TextBox 13"/>
-          <p:cNvSpPr txBox="1"/>
-          <p:nvPr/>
-        </p:nvSpPr>
-        <p:spPr>
-          <a:xfrm>
-            <a:off x="640080" y="4663440"/>
-            <a:ext cx="457200" cy="457200"/>
-          </a:xfrm>
-          <a:prstGeom prst="rect">
-            <a:avLst/>
-          </a:prstGeom>
-          <a:noFill/>
-        </p:spPr>
-        <p:txBody>
-          <a:bodyPr wrap="square">
-            <a:spAutoFit/>
-          </a:bodyPr>
-          <a:lstStyle/>
-          <a:p>
-            <a:pPr algn="ctr"/>
-            <a:r>
-              <a:rPr sz="1700" b="1" i="0">
-                <a:solidFill>
-                  <a:srgbClr val="FFFFFF"/>
-                </a:solidFill>
-              </a:rPr>
-              <a:t>3</a:t>
-            </a:r>
-          </a:p>
-        </p:txBody>
-      </p:sp>
-      <p:sp>
-        <p:nvSpPr>
-          <p:cNvPr id="15" name="TextBox 14"/>
-          <p:cNvSpPr txBox="1"/>
-          <p:nvPr/>
-        </p:nvSpPr>
-        <p:spPr>
-          <a:xfrm>
-            <a:off x="1234440" y="4663440"/>
-            <a:ext cx="10607040" cy="457200"/>
-          </a:xfrm>
-          <a:prstGeom prst="rect">
-            <a:avLst/>
-          </a:prstGeom>
-          <a:noFill/>
-        </p:spPr>
-        <p:txBody>
-          <a:bodyPr wrap="square">
-            <a:spAutoFit/>
-          </a:bodyPr>
-          <a:lstStyle/>
-          <a:p>
-            <a:pPr algn="l"/>
-            <a:r>
-              <a:rPr sz="1500" b="1" i="0">
-                <a:solidFill>
-                  <a:srgbClr val="FFFFFF"/>
-                </a:solidFill>
-              </a:rPr>
-              <a:t>Redesign system incentives</a:t>
-            </a:r>
-          </a:p>
-        </p:txBody>
-      </p:sp>
-      <p:sp>
-        <p:nvSpPr>
-          <p:cNvPr id="16" name="TextBox 15"/>
-          <p:cNvSpPr txBox="1"/>
-          <p:nvPr/>
-        </p:nvSpPr>
-        <p:spPr>
-          <a:xfrm>
-            <a:off x="1234440" y="5138928"/>
-            <a:ext cx="10607040" cy="868680"/>
-          </a:xfrm>
-          <a:prstGeom prst="rect">
-            <a:avLst/>
-          </a:prstGeom>
-          <a:noFill/>
-        </p:spPr>
-        <p:txBody>
-          <a:bodyPr wrap="square">
-            <a:spAutoFit/>
-          </a:bodyPr>
-          <a:lstStyle/>
-          <a:p>
-            <a:pPr algn="l"/>
-            <a:r>
-              <a:rPr sz="1100" b="0" i="0">
-                <a:solidFill>
-                  <a:srgbClr val="B0BEC5"/>
-                </a:solidFill>
-              </a:rPr>
-              <a:t>Shift from fee-for-service to outcomes-based payment models. Reward providers for keeping populations healthy, not for volume of procedures.</a:t>
-            </a:r>
-          </a:p>
-        </p:txBody>
-      </p:sp>
-      <p:sp>
-        <p:nvSpPr>
-          <p:cNvPr id="17" name="Rectangle 16"/>
-          <p:cNvSpPr/>
-          <p:nvPr/>
-        </p:nvSpPr>
-        <p:spPr>
-          <a:xfrm>
-            <a:off x="640080" y="6236208"/>
-            <a:ext cx="10789920" cy="36576"/>
-          </a:xfrm>
-          <a:prstGeom prst="rect">
-            <a:avLst/>
-          </a:prstGeom>
-          <a:solidFill>
-            <a:srgbClr val="0078D4"/>
-          </a:solidFill>
-          <a:ln>
-            <a:noFill/>
-          </a:ln>
-        </p:spPr>
-        <p:style>
-          <a:lnRef idx="1">
-            <a:schemeClr val="accent1"/>
-          </a:lnRef>
-          <a:fillRef idx="3">
-            <a:schemeClr val="accent1"/>
-          </a:fillRef>
-          <a:effectRef idx="2">
-            <a:schemeClr val="accent1"/>
-          </a:effectRef>
-          <a:fontRef idx="minor">
-            <a:schemeClr val="lt1"/>
-          </a:fontRef>
-        </p:style>
-        <p:txBody>
-          <a:bodyPr rtlCol="0" anchor="ctr"/>
-          <a:lstStyle/>
-          <a:p>
-            <a:pPr algn="ctr"/>
-          </a:p>
-        </p:txBody>
-      </p:sp>
-      <p:sp>
-        <p:nvSpPr>
-          <p:cNvPr id="18" name="TextBox 17"/>
-          <p:cNvSpPr txBox="1"/>
-          <p:nvPr/>
-        </p:nvSpPr>
-        <p:spPr>
-          <a:xfrm>
-            <a:off x="640080" y="6355080"/>
-            <a:ext cx="10789920" cy="384048"/>
-          </a:xfrm>
-          <a:prstGeom prst="rect">
-            <a:avLst/>
-          </a:prstGeom>
-          <a:noFill/>
-        </p:spPr>
-        <p:txBody>
-          <a:bodyPr wrap="square">
-            <a:spAutoFit/>
-          </a:bodyPr>
-          <a:lstStyle/>
-          <a:p>
-            <a:pPr algn="ctr"/>
-            <a:r>
-              <a:rPr sz="1200" b="1" i="0">
-                <a:solidFill>
-                  <a:srgbClr val="90CAF9"/>
-                </a:solidFill>
-              </a:rPr>
-              <a:t>America's longevity problem is not a budget problem — it is upstream of the budget.</a:t>
+              <a:rPr sz="750" b="0" i="1">
+                <a:solidFill>
+                  <a:srgbClr val="9CA3AF"/>
+                </a:solidFill>
+              </a:rPr>
+              <a:t>Built on the attached Power BI analysis (World Bank WDI). New factors: OECD · WHO · World Bank.</a:t>
             </a:r>
           </a:p>
         </p:txBody>
@@ -4020,8 +3516,8 @@
         </p:nvSpPr>
         <p:spPr>
           <a:xfrm>
-            <a:off x="365760" y="109728"/>
-            <a:ext cx="11430000" cy="502920"/>
+            <a:off x="411480" y="246888"/>
+            <a:ext cx="8229600" cy="292608"/>
           </a:xfrm>
           <a:prstGeom prst="rect">
             <a:avLst/>
@@ -4036,12 +3532,12 @@
           <a:p>
             <a:pPr algn="l"/>
             <a:r>
-              <a:rPr sz="2100" b="1" i="0">
-                <a:solidFill>
-                  <a:srgbClr val="252525"/>
-                </a:solidFill>
-              </a:rPr>
-              <a:t>Across 140+ countries, spending more on health buys longer lives…</a:t>
+              <a:rPr sz="900" b="1" i="0">
+                <a:solidFill>
+                  <a:srgbClr val="2BA88A"/>
+                </a:solidFill>
+              </a:rPr>
+              <a:t>THE SETUP</a:t>
             </a:r>
           </a:p>
         </p:txBody>
@@ -4054,8 +3550,8 @@
         </p:nvSpPr>
         <p:spPr>
           <a:xfrm>
-            <a:off x="365760" y="621792"/>
-            <a:ext cx="11430000" cy="292608"/>
+            <a:off x="411480" y="530352"/>
+            <a:ext cx="11247120" cy="960120"/>
           </a:xfrm>
           <a:prstGeom prst="rect">
             <a:avLst/>
@@ -4068,14 +3564,37 @@
           </a:bodyPr>
           <a:lstStyle/>
           <a:p>
-            <a:pPr algn="l"/>
-            <a:r>
-              <a:rPr sz="1100" b="0" i="0">
-                <a:solidFill>
-                  <a:srgbClr val="737373"/>
-                </a:solidFill>
-              </a:rPr>
-              <a:t>Pearson r = 0.70 on log scale — a strong global signal that investment matters</a:t>
+            <a:pPr algn="l">
+              <a:spcBef>
+                <a:spcPts val="0"/>
+              </a:spcBef>
+              <a:spcAft>
+                <a:spcPts val="0"/>
+              </a:spcAft>
+            </a:pPr>
+            <a:r>
+              <a:rPr sz="2700" b="1">
+                <a:solidFill>
+                  <a:srgbClr val="0F1F35"/>
+                </a:solidFill>
+              </a:rPr>
+              <a:t>The biggest spender on Earth buys </a:t>
+            </a:r>
+            <a:r>
+              <a:rPr sz="2700" b="1">
+                <a:solidFill>
+                  <a:srgbClr val="C0392B"/>
+                </a:solidFill>
+              </a:rPr>
+              <a:t>one of the shortest lives</a:t>
+            </a:r>
+            <a:r>
+              <a:rPr sz="2700" b="1">
+                <a:solidFill>
+                  <a:srgbClr val="0F1F35"/>
+                </a:solidFill>
+              </a:rPr>
+              <a:t> among rich nations</a:t>
             </a:r>
           </a:p>
         </p:txBody>
@@ -4096,8 +3615,8 @@
         </p:blipFill>
         <p:spPr>
           <a:xfrm>
-            <a:off x="274320" y="960120"/>
-            <a:ext cx="11612880" cy="5577840"/>
+            <a:off x="274320" y="1508760"/>
+            <a:ext cx="8001000" cy="5120640"/>
           </a:xfrm>
           <a:prstGeom prst="rect">
             <a:avLst/>
@@ -4112,8 +3631,8 @@
         </p:nvSpPr>
         <p:spPr>
           <a:xfrm>
-            <a:off x="365760" y="6583680"/>
-            <a:ext cx="11430000" cy="237744"/>
+            <a:off x="8412480" y="1737360"/>
+            <a:ext cx="3611880" cy="685800"/>
           </a:xfrm>
           <a:prstGeom prst="rect">
             <a:avLst/>
@@ -4126,14 +3645,156 @@
           </a:bodyPr>
           <a:lstStyle/>
           <a:p>
+            <a:pPr algn="l">
+              <a:spcBef>
+                <a:spcPts val="0"/>
+              </a:spcBef>
+              <a:spcAft>
+                <a:spcPts val="0"/>
+              </a:spcAft>
+            </a:pPr>
+            <a:r>
+              <a:rPr sz="1400" b="1">
+                <a:solidFill>
+                  <a:srgbClr val="0F1F35"/>
+                </a:solidFill>
+              </a:rPr>
+              <a:t>Spending buys longevity — until it doesn’t.</a:t>
+            </a:r>
+          </a:p>
+        </p:txBody>
+      </p:sp>
+      <p:sp>
+        <p:nvSpPr>
+          <p:cNvPr id="6" name="TextBox 5"/>
+          <p:cNvSpPr txBox="1"/>
+          <p:nvPr/>
+        </p:nvSpPr>
+        <p:spPr>
+          <a:xfrm>
+            <a:off x="8412480" y="2514600"/>
+            <a:ext cx="3611880" cy="2377440"/>
+          </a:xfrm>
+          <a:prstGeom prst="rect">
+            <a:avLst/>
+          </a:prstGeom>
+          <a:noFill/>
+        </p:spPr>
+        <p:txBody>
+          <a:bodyPr wrap="square">
+            <a:spAutoFit/>
+          </a:bodyPr>
+          <a:lstStyle/>
+          <a:p>
+            <a:pPr algn="l">
+              <a:spcBef>
+                <a:spcPts val="0"/>
+              </a:spcBef>
+              <a:spcAft>
+                <a:spcPts val="0"/>
+              </a:spcAft>
+            </a:pPr>
+            <a:r>
+              <a:rPr sz="1200" b="0">
+                <a:solidFill>
+                  <a:srgbClr val="4B5563"/>
+                </a:solidFill>
+              </a:rPr>
+              <a:t>Above roughly $4,000 per person the curve flattens. Yet the </a:t>
+            </a:r>
+            <a:r>
+              <a:rPr sz="1200" b="0">
+                <a:solidFill>
+                  <a:srgbClr val="C0392B"/>
+                </a:solidFill>
+              </a:rPr>
+              <a:t>U.S. spends ~$8,400</a:t>
+            </a:r>
+            <a:r>
+              <a:rPr sz="1200" b="0">
+                <a:solidFill>
+                  <a:srgbClr val="4B5563"/>
+                </a:solidFill>
+              </a:rPr>
+              <a:t> and still lands </a:t>
+            </a:r>
+            <a:r>
+              <a:rPr sz="1200" b="0">
+                <a:solidFill>
+                  <a:srgbClr val="2BA88A"/>
+                </a:solidFill>
+              </a:rPr>
+              <a:t>5 years below Japan</a:t>
+            </a:r>
+            <a:r>
+              <a:rPr sz="1200" b="0">
+                <a:solidFill>
+                  <a:srgbClr val="4B5563"/>
+                </a:solidFill>
+              </a:rPr>
+              <a:t>, which spends less than half as much.</a:t>
+            </a:r>
+          </a:p>
+          <a:p>
+            <a:pPr algn="l">
+              <a:spcBef>
+                <a:spcPts val="0"/>
+              </a:spcBef>
+              <a:spcAft>
+                <a:spcPts val="0"/>
+              </a:spcAft>
+            </a:pPr>
+          </a:p>
+          <a:p>
+            <a:pPr algn="l">
+              <a:spcBef>
+                <a:spcPts val="0"/>
+              </a:spcBef>
+              <a:spcAft>
+                <a:spcPts val="0"/>
+              </a:spcAft>
+            </a:pPr>
+            <a:r>
+              <a:rPr sz="1200" b="1">
+                <a:solidFill>
+                  <a:srgbClr val="0F1F35"/>
+                </a:solidFill>
+              </a:rPr>
+              <a:t>So the question isn’t how much to spend. It’s what those dollars sit on top of.</a:t>
+            </a:r>
+          </a:p>
+        </p:txBody>
+      </p:sp>
+      <p:sp>
+        <p:nvSpPr>
+          <p:cNvPr id="7" name="TextBox 6"/>
+          <p:cNvSpPr txBox="1"/>
+          <p:nvPr/>
+        </p:nvSpPr>
+        <p:spPr>
+          <a:xfrm>
+            <a:off x="411480" y="6556248"/>
+            <a:ext cx="11338560" cy="256032"/>
+          </a:xfrm>
+          <a:prstGeom prst="rect">
+            <a:avLst/>
+          </a:prstGeom>
+          <a:noFill/>
+        </p:spPr>
+        <p:txBody>
+          <a:bodyPr wrap="square">
+            <a:spAutoFit/>
+          </a:bodyPr>
+          <a:lstStyle/>
+          <a:p>
             <a:pPr algn="l"/>
             <a:r>
-              <a:rPr sz="800" b="0" i="1">
-                <a:solidFill>
-                  <a:srgbClr val="737373"/>
-                </a:solidFill>
-              </a:rPr>
-              <a:t>Data: World Bank World Development Indicators. Health expenditure on log scale. PPP = Purchasing Power Parity.</a:t>
+              <a:rPr sz="750" b="0" i="1">
+                <a:solidFill>
+                  <a:srgbClr val="9CA3AF"/>
+                </a:solidFill>
+              </a:rPr>
+              <a:t>Source: World Bank, World Development Indicators (health expenditure &amp; life expectancy, 2000–2023 averages). Focus: among the world’s highest spenders.</a:t>
             </a:r>
           </a:p>
         </p:txBody>
@@ -4172,8 +3833,8 @@
         </p:nvSpPr>
         <p:spPr>
           <a:xfrm>
-            <a:off x="365760" y="109728"/>
-            <a:ext cx="11430000" cy="502920"/>
+            <a:off x="411480" y="246888"/>
+            <a:ext cx="8229600" cy="292608"/>
           </a:xfrm>
           <a:prstGeom prst="rect">
             <a:avLst/>
@@ -4188,12 +3849,12 @@
           <a:p>
             <a:pPr algn="l"/>
             <a:r>
-              <a:rPr sz="2100" b="1" i="0">
-                <a:solidFill>
-                  <a:srgbClr val="252525"/>
-                </a:solidFill>
-              </a:rPr>
-              <a:t>…but the world's biggest spenders tell a very different story</a:t>
+              <a:rPr sz="900" b="1" i="0">
+                <a:solidFill>
+                  <a:srgbClr val="2BA88A"/>
+                </a:solidFill>
+              </a:rPr>
+              <a:t>FACTOR 1 — EDUCATION QUALITY</a:t>
             </a:r>
           </a:p>
         </p:txBody>
@@ -4206,8 +3867,8 @@
         </p:nvSpPr>
         <p:spPr>
           <a:xfrm>
-            <a:off x="365760" y="621792"/>
-            <a:ext cx="11430000" cy="292608"/>
+            <a:off x="411480" y="530352"/>
+            <a:ext cx="11247120" cy="960120"/>
           </a:xfrm>
           <a:prstGeom prst="rect">
             <a:avLst/>
@@ -4220,14 +3881,53 @@
           </a:bodyPr>
           <a:lstStyle/>
           <a:p>
-            <a:pPr algn="l"/>
-            <a:r>
-              <a:rPr sz="1100" b="0" i="0">
-                <a:solidFill>
-                  <a:srgbClr val="737373"/>
-                </a:solidFill>
-              </a:rPr>
-              <a:t>Japan reaches 84 years on $3,640 per person. The US spends $8,431 and reaches only 78.</a:t>
+            <a:pPr algn="l">
+              <a:spcBef>
+                <a:spcPts val="0"/>
+              </a:spcBef>
+              <a:spcAft>
+                <a:spcPts val="0"/>
+              </a:spcAft>
+            </a:pPr>
+            <a:r>
+              <a:rPr sz="2700" b="1">
+                <a:solidFill>
+                  <a:srgbClr val="0F1F35"/>
+                </a:solidFill>
+              </a:rPr>
+              <a:t>Countries that </a:t>
+            </a:r>
+            <a:r>
+              <a:rPr sz="2700" b="1">
+                <a:solidFill>
+                  <a:srgbClr val="2BA88A"/>
+                </a:solidFill>
+              </a:rPr>
+              <a:t>out-educate</a:t>
+            </a:r>
+            <a:r>
+              <a:rPr sz="2700" b="1">
+                <a:solidFill>
+                  <a:srgbClr val="0F1F35"/>
+                </a:solidFill>
+              </a:rPr>
+              <a:t> the U.S. tend to </a:t>
+            </a:r>
+            <a:r>
+              <a:rPr sz="2700" b="1">
+                <a:solidFill>
+                  <a:srgbClr val="2BA88A"/>
+                </a:solidFill>
+              </a:rPr>
+              <a:t>out-live</a:t>
+            </a:r>
+            <a:r>
+              <a:rPr sz="2700" b="1">
+                <a:solidFill>
+                  <a:srgbClr val="0F1F35"/>
+                </a:solidFill>
+              </a:rPr>
+              <a:t> it</a:t>
             </a:r>
           </a:p>
         </p:txBody>
@@ -4248,8 +3948,8 @@
         </p:blipFill>
         <p:spPr>
           <a:xfrm>
-            <a:off x="274320" y="960120"/>
-            <a:ext cx="11612880" cy="5577840"/>
+            <a:off x="274320" y="1508760"/>
+            <a:ext cx="8001000" cy="5120640"/>
           </a:xfrm>
           <a:prstGeom prst="rect">
             <a:avLst/>
@@ -4258,14 +3958,57 @@
       </p:pic>
       <p:sp>
         <p:nvSpPr>
-          <p:cNvPr id="5" name="TextBox 4"/>
+          <p:cNvPr id="5" name="Rectangle 4"/>
+          <p:cNvSpPr/>
+          <p:nvPr/>
+        </p:nvSpPr>
+        <p:spPr>
+          <a:xfrm>
+            <a:off x="8412480" y="1664208"/>
+            <a:ext cx="182880" cy="182880"/>
+          </a:xfrm>
+          <a:prstGeom prst="rect">
+            <a:avLst/>
+          </a:prstGeom>
+          <a:solidFill>
+            <a:srgbClr val="C0392B"/>
+          </a:solidFill>
+          <a:ln>
+            <a:noFill/>
+          </a:ln>
+        </p:spPr>
+        <p:style>
+          <a:lnRef idx="1">
+            <a:schemeClr val="accent1"/>
+          </a:lnRef>
+          <a:fillRef idx="3">
+            <a:schemeClr val="accent1"/>
+          </a:fillRef>
+          <a:effectRef idx="2">
+            <a:schemeClr val="accent1"/>
+          </a:effectRef>
+          <a:fontRef idx="minor">
+            <a:schemeClr val="lt1"/>
+          </a:fontRef>
+        </p:style>
+        <p:txBody>
+          <a:bodyPr rtlCol="0" anchor="ctr"/>
+          <a:lstStyle/>
+          <a:p>
+            <a:pPr algn="ctr"/>
+          </a:p>
+        </p:txBody>
+      </p:sp>
+      <p:sp>
+        <p:nvSpPr>
+          <p:cNvPr id="6" name="TextBox 5"/>
           <p:cNvSpPr txBox="1"/>
           <p:nvPr/>
         </p:nvSpPr>
         <p:spPr>
           <a:xfrm>
-            <a:off x="365760" y="6583680"/>
-            <a:ext cx="11430000" cy="237744"/>
+            <a:off x="8668512" y="1636776"/>
+            <a:ext cx="1645920" cy="274320"/>
           </a:xfrm>
           <a:prstGeom prst="rect">
             <a:avLst/>
@@ -4280,12 +4023,243 @@
           <a:p>
             <a:pPr algn="l"/>
             <a:r>
-              <a:rPr sz="800" b="0" i="1">
-                <a:solidFill>
-                  <a:srgbClr val="737373"/>
-                </a:solidFill>
-              </a:rPr>
-              <a:t>Data: World Bank World Development Indicators. LE = Life Expectancy.</a:t>
+              <a:rPr sz="950" b="1" i="0">
+                <a:solidFill>
+                  <a:srgbClr val="C0392B"/>
+                </a:solidFill>
+              </a:rPr>
+              <a:t>United States</a:t>
+            </a:r>
+          </a:p>
+        </p:txBody>
+      </p:sp>
+      <p:sp>
+        <p:nvSpPr>
+          <p:cNvPr id="7" name="Rectangle 6"/>
+          <p:cNvSpPr/>
+          <p:nvPr/>
+        </p:nvSpPr>
+        <p:spPr>
+          <a:xfrm>
+            <a:off x="10195560" y="1664208"/>
+            <a:ext cx="182880" cy="182880"/>
+          </a:xfrm>
+          <a:prstGeom prst="rect">
+            <a:avLst/>
+          </a:prstGeom>
+          <a:solidFill>
+            <a:srgbClr val="2BA88A"/>
+          </a:solidFill>
+          <a:ln>
+            <a:noFill/>
+          </a:ln>
+        </p:spPr>
+        <p:style>
+          <a:lnRef idx="1">
+            <a:schemeClr val="accent1"/>
+          </a:lnRef>
+          <a:fillRef idx="3">
+            <a:schemeClr val="accent1"/>
+          </a:fillRef>
+          <a:effectRef idx="2">
+            <a:schemeClr val="accent1"/>
+          </a:effectRef>
+          <a:fontRef idx="minor">
+            <a:schemeClr val="lt1"/>
+          </a:fontRef>
+        </p:style>
+        <p:txBody>
+          <a:bodyPr rtlCol="0" anchor="ctr"/>
+          <a:lstStyle/>
+          <a:p>
+            <a:pPr algn="ctr"/>
+          </a:p>
+        </p:txBody>
+      </p:sp>
+      <p:sp>
+        <p:nvSpPr>
+          <p:cNvPr id="8" name="TextBox 7"/>
+          <p:cNvSpPr txBox="1"/>
+          <p:nvPr/>
+        </p:nvSpPr>
+        <p:spPr>
+          <a:xfrm>
+            <a:off x="10451592" y="1636776"/>
+            <a:ext cx="1645920" cy="274320"/>
+          </a:xfrm>
+          <a:prstGeom prst="rect">
+            <a:avLst/>
+          </a:prstGeom>
+          <a:noFill/>
+        </p:spPr>
+        <p:txBody>
+          <a:bodyPr wrap="square">
+            <a:spAutoFit/>
+          </a:bodyPr>
+          <a:lstStyle/>
+          <a:p>
+            <a:pPr algn="l"/>
+            <a:r>
+              <a:rPr sz="950" b="1" i="0">
+                <a:solidFill>
+                  <a:srgbClr val="2BA88A"/>
+                </a:solidFill>
+              </a:rPr>
+              <a:t>Japan</a:t>
+            </a:r>
+          </a:p>
+        </p:txBody>
+      </p:sp>
+      <p:sp>
+        <p:nvSpPr>
+          <p:cNvPr id="9" name="TextBox 8"/>
+          <p:cNvSpPr txBox="1"/>
+          <p:nvPr/>
+        </p:nvSpPr>
+        <p:spPr>
+          <a:xfrm>
+            <a:off x="8412480" y="2103120"/>
+            <a:ext cx="3611880" cy="777240"/>
+          </a:xfrm>
+          <a:prstGeom prst="rect">
+            <a:avLst/>
+          </a:prstGeom>
+          <a:noFill/>
+        </p:spPr>
+        <p:txBody>
+          <a:bodyPr wrap="square">
+            <a:spAutoFit/>
+          </a:bodyPr>
+          <a:lstStyle/>
+          <a:p>
+            <a:pPr algn="l">
+              <a:spcBef>
+                <a:spcPts val="0"/>
+              </a:spcBef>
+              <a:spcAft>
+                <a:spcPts val="0"/>
+              </a:spcAft>
+            </a:pPr>
+            <a:r>
+              <a:rPr sz="1350" b="1">
+                <a:solidFill>
+                  <a:srgbClr val="2BA88A"/>
+                </a:solidFill>
+              </a:rPr>
+              <a:t>Japan tops the peer group at 533;
+the U.S. sits mid-pack at 489.</a:t>
+            </a:r>
+          </a:p>
+        </p:txBody>
+      </p:sp>
+      <p:sp>
+        <p:nvSpPr>
+          <p:cNvPr id="10" name="TextBox 9"/>
+          <p:cNvSpPr txBox="1"/>
+          <p:nvPr/>
+        </p:nvSpPr>
+        <p:spPr>
+          <a:xfrm>
+            <a:off x="8412480" y="3017520"/>
+            <a:ext cx="3611880" cy="2286000"/>
+          </a:xfrm>
+          <a:prstGeom prst="rect">
+            <a:avLst/>
+          </a:prstGeom>
+          <a:noFill/>
+        </p:spPr>
+        <p:txBody>
+          <a:bodyPr wrap="square">
+            <a:spAutoFit/>
+          </a:bodyPr>
+          <a:lstStyle/>
+          <a:p>
+            <a:pPr algn="l"/>
+            <a:r>
+              <a:rPr sz="1200" b="0" i="0">
+                <a:solidFill>
+                  <a:srgbClr val="4B5563"/>
+                </a:solidFill>
+              </a:rPr>
+              <a:t>Skills predict the behaviours — diet,</a:t>
+            </a:r>
+          </a:p>
+          <a:p>
+            <a:pPr algn="l"/>
+            <a:r>
+              <a:rPr sz="1200" b="0" i="0">
+                <a:solidFill>
+                  <a:srgbClr val="4B5563"/>
+                </a:solidFill>
+              </a:rPr>
+              <a:t>screening, adherence — that compound</a:t>
+            </a:r>
+          </a:p>
+          <a:p>
+            <a:pPr algn="l"/>
+            <a:r>
+              <a:rPr sz="1200" b="0" i="0">
+                <a:solidFill>
+                  <a:srgbClr val="4B5563"/>
+                </a:solidFill>
+              </a:rPr>
+              <a:t>into longer lives. The high-education,</a:t>
+            </a:r>
+          </a:p>
+          <a:p>
+            <a:pPr algn="l"/>
+            <a:r>
+              <a:rPr sz="1200" b="0" i="0">
+                <a:solidFill>
+                  <a:srgbClr val="4B5563"/>
+                </a:solidFill>
+              </a:rPr>
+              <a:t>high-longevity countries cluster toward</a:t>
+            </a:r>
+          </a:p>
+          <a:p>
+            <a:pPr algn="l"/>
+            <a:r>
+              <a:rPr sz="1200" b="0" i="0">
+                <a:solidFill>
+                  <a:srgbClr val="4B5563"/>
+                </a:solidFill>
+              </a:rPr>
+              <a:t>the upper right; the U.S. does not.</a:t>
+            </a:r>
+          </a:p>
+        </p:txBody>
+      </p:sp>
+      <p:sp>
+        <p:nvSpPr>
+          <p:cNvPr id="11" name="TextBox 10"/>
+          <p:cNvSpPr txBox="1"/>
+          <p:nvPr/>
+        </p:nvSpPr>
+        <p:spPr>
+          <a:xfrm>
+            <a:off x="411480" y="6556248"/>
+            <a:ext cx="11338560" cy="256032"/>
+          </a:xfrm>
+          <a:prstGeom prst="rect">
+            <a:avLst/>
+          </a:prstGeom>
+          <a:noFill/>
+        </p:spPr>
+        <p:txBody>
+          <a:bodyPr wrap="square">
+            <a:spAutoFit/>
+          </a:bodyPr>
+          <a:lstStyle/>
+          <a:p>
+            <a:pPr algn="l"/>
+            <a:r>
+              <a:rPr sz="750" b="0" i="1">
+                <a:solidFill>
+                  <a:srgbClr val="9CA3AF"/>
+                </a:solidFill>
+              </a:rPr>
+              <a:t>Source: OECD PISA 2022 (mean of mathematics, reading &amp; science). Life expectancy: World Bank WDI, 2000–2023 avg.</a:t>
             </a:r>
           </a:p>
         </p:txBody>
@@ -4324,8 +4298,8 @@
         </p:nvSpPr>
         <p:spPr>
           <a:xfrm>
-            <a:off x="365760" y="109728"/>
-            <a:ext cx="11430000" cy="502920"/>
+            <a:off x="411480" y="246888"/>
+            <a:ext cx="8229600" cy="292608"/>
           </a:xfrm>
           <a:prstGeom prst="rect">
             <a:avLst/>
@@ -4340,12 +4314,12 @@
           <a:p>
             <a:pPr algn="l"/>
             <a:r>
-              <a:rPr sz="2100" b="1" i="0">
-                <a:solidFill>
-                  <a:srgbClr val="252525"/>
-                </a:solidFill>
-              </a:rPr>
-              <a:t>Among high-income peers, the United States is a clear outlier</a:t>
+              <a:rPr sz="900" b="1" i="0">
+                <a:solidFill>
+                  <a:srgbClr val="2BA88A"/>
+                </a:solidFill>
+              </a:rPr>
+              <a:t>FACTOR 2 — LIFESTYLE</a:t>
             </a:r>
           </a:p>
         </p:txBody>
@@ -4358,8 +4332,8 @@
         </p:nvSpPr>
         <p:spPr>
           <a:xfrm>
-            <a:off x="365760" y="621792"/>
-            <a:ext cx="11430000" cy="292608"/>
+            <a:off x="411480" y="530352"/>
+            <a:ext cx="11247120" cy="960120"/>
           </a:xfrm>
           <a:prstGeom prst="rect">
             <a:avLst/>
@@ -4372,14 +4346,29 @@
           </a:bodyPr>
           <a:lstStyle/>
           <a:p>
-            <a:pPr algn="l"/>
-            <a:r>
-              <a:rPr sz="1100" b="0" i="0">
-                <a:solidFill>
-                  <a:srgbClr val="737373"/>
-                </a:solidFill>
-              </a:rPr>
-              <a:t>Every comparable country achieves the same or better life expectancy at substantially lower cost</a:t>
+            <a:pPr algn="l">
+              <a:spcBef>
+                <a:spcPts val="0"/>
+              </a:spcBef>
+              <a:spcAft>
+                <a:spcPts val="0"/>
+              </a:spcAft>
+            </a:pPr>
+            <a:r>
+              <a:rPr sz="2700" b="1">
+                <a:solidFill>
+                  <a:srgbClr val="0F1F35"/>
+                </a:solidFill>
+              </a:rPr>
+              <a:t>The gap is written in waistlines: </a:t>
+            </a:r>
+            <a:r>
+              <a:rPr sz="2700" b="1">
+                <a:solidFill>
+                  <a:srgbClr val="C0392B"/>
+                </a:solidFill>
+              </a:rPr>
+              <a:t>43% obese vs. 5%</a:t>
             </a:r>
           </a:p>
         </p:txBody>
@@ -4400,8 +4389,8 @@
         </p:blipFill>
         <p:spPr>
           <a:xfrm>
-            <a:off x="274320" y="960120"/>
-            <a:ext cx="8229600" cy="5623560"/>
+            <a:off x="274320" y="1463040"/>
+            <a:ext cx="8001000" cy="5166360"/>
           </a:xfrm>
           <a:prstGeom prst="rect">
             <a:avLst/>
@@ -4410,57 +4399,14 @@
       </p:pic>
       <p:sp>
         <p:nvSpPr>
-          <p:cNvPr id="5" name="Rectangle 4"/>
-          <p:cNvSpPr/>
-          <p:nvPr/>
-        </p:nvSpPr>
-        <p:spPr>
-          <a:xfrm>
-            <a:off x="8641080" y="960120"/>
-            <a:ext cx="3337560" cy="1417320"/>
-          </a:xfrm>
-          <a:prstGeom prst="rect">
-            <a:avLst/>
-          </a:prstGeom>
-          <a:solidFill>
-            <a:srgbClr val="D87000"/>
-          </a:solidFill>
-          <a:ln>
-            <a:noFill/>
-          </a:ln>
-        </p:spPr>
-        <p:style>
-          <a:lnRef idx="1">
-            <a:schemeClr val="accent1"/>
-          </a:lnRef>
-          <a:fillRef idx="3">
-            <a:schemeClr val="accent1"/>
-          </a:fillRef>
-          <a:effectRef idx="2">
-            <a:schemeClr val="accent1"/>
-          </a:effectRef>
-          <a:fontRef idx="minor">
-            <a:schemeClr val="lt1"/>
-          </a:fontRef>
-        </p:style>
-        <p:txBody>
-          <a:bodyPr rtlCol="0" anchor="ctr"/>
-          <a:lstStyle/>
-          <a:p>
-            <a:pPr algn="ctr"/>
-          </a:p>
-        </p:txBody>
-      </p:sp>
-      <p:sp>
-        <p:nvSpPr>
-          <p:cNvPr id="6" name="TextBox 5"/>
+          <p:cNvPr id="5" name="TextBox 4"/>
           <p:cNvSpPr txBox="1"/>
           <p:nvPr/>
         </p:nvSpPr>
         <p:spPr>
           <a:xfrm>
-            <a:off x="8732520" y="1005840"/>
-            <a:ext cx="3154680" cy="1280160"/>
+            <a:off x="8412480" y="1828800"/>
+            <a:ext cx="3611880" cy="868680"/>
           </a:xfrm>
           <a:prstGeom prst="rect">
             <a:avLst/>
@@ -4473,93 +4419,52 @@
           </a:bodyPr>
           <a:lstStyle/>
           <a:p>
-            <a:pPr algn="ctr"/>
-            <a:r>
-              <a:rPr sz="1300" b="1" i="0">
-                <a:solidFill>
-                  <a:srgbClr val="FFFFFF"/>
-                </a:solidFill>
-              </a:rPr>
-              <a:t>The US–Japan gap:</a:t>
-            </a:r>
-          </a:p>
-          <a:p>
-            <a:pPr algn="ctr"/>
-            <a:r>
-              <a:rPr sz="1300" b="1" i="0">
-                <a:solidFill>
-                  <a:srgbClr val="FFFFFF"/>
-                </a:solidFill>
-              </a:rPr>
-              <a:t>5 fewer years of life</a:t>
-            </a:r>
-          </a:p>
-          <a:p>
-            <a:pPr algn="ctr"/>
-            <a:r>
-              <a:rPr sz="1300" b="1" i="0">
-                <a:solidFill>
-                  <a:srgbClr val="FFFFFF"/>
-                </a:solidFill>
-              </a:rPr>
-              <a:t>at 2.3× the cost</a:t>
-            </a:r>
-          </a:p>
-        </p:txBody>
-      </p:sp>
-      <p:sp>
-        <p:nvSpPr>
-          <p:cNvPr id="7" name="Rectangle 6"/>
-          <p:cNvSpPr/>
-          <p:nvPr/>
-        </p:nvSpPr>
-        <p:spPr>
-          <a:xfrm>
-            <a:off x="8641080" y="2514600"/>
-            <a:ext cx="3337560" cy="4069080"/>
-          </a:xfrm>
-          <a:prstGeom prst="rect">
-            <a:avLst/>
-          </a:prstGeom>
-          <a:solidFill>
-            <a:srgbClr val="F2F2F2"/>
-          </a:solidFill>
-          <a:ln>
-            <a:noFill/>
-          </a:ln>
-        </p:spPr>
-        <p:style>
-          <a:lnRef idx="1">
-            <a:schemeClr val="accent1"/>
-          </a:lnRef>
-          <a:fillRef idx="3">
-            <a:schemeClr val="accent1"/>
-          </a:fillRef>
-          <a:effectRef idx="2">
-            <a:schemeClr val="accent1"/>
-          </a:effectRef>
-          <a:fontRef idx="minor">
-            <a:schemeClr val="lt1"/>
-          </a:fontRef>
-        </p:style>
-        <p:txBody>
-          <a:bodyPr rtlCol="0" anchor="ctr"/>
-          <a:lstStyle/>
-          <a:p>
-            <a:pPr algn="ctr"/>
-          </a:p>
-        </p:txBody>
-      </p:sp>
-      <p:sp>
-        <p:nvSpPr>
-          <p:cNvPr id="8" name="TextBox 7"/>
+            <a:pPr algn="l">
+              <a:spcBef>
+                <a:spcPts val="0"/>
+              </a:spcBef>
+              <a:spcAft>
+                <a:spcPts val="0"/>
+              </a:spcAft>
+            </a:pPr>
+            <a:r>
+              <a:rPr sz="1350" b="1">
+                <a:solidFill>
+                  <a:srgbClr val="C0392B"/>
+                </a:solidFill>
+              </a:rPr>
+              <a:t>Nearly 1 in 2 American adults</a:t>
+            </a:r>
+            <a:r>
+              <a:rPr sz="1350" b="1">
+                <a:solidFill>
+                  <a:srgbClr val="0F1F35"/>
+                </a:solidFill>
+              </a:rPr>
+              <a:t> has obesity —
+</a:t>
+            </a:r>
+            <a:r>
+              <a:rPr sz="1350" b="1">
+                <a:solidFill>
+                  <a:srgbClr val="2BA88A"/>
+                </a:solidFill>
+              </a:rPr>
+              <a:t>almost 9× Japan’s rate.</a:t>
+            </a:r>
+          </a:p>
+        </p:txBody>
+      </p:sp>
+      <p:sp>
+        <p:nvSpPr>
+          <p:cNvPr id="6" name="TextBox 5"/>
           <p:cNvSpPr txBox="1"/>
           <p:nvPr/>
         </p:nvSpPr>
         <p:spPr>
           <a:xfrm>
-            <a:off x="8778240" y="2651760"/>
-            <a:ext cx="3063240" cy="3749039"/>
+            <a:off x="8412480" y="2926080"/>
+            <a:ext cx="3611880" cy="2011680"/>
           </a:xfrm>
           <a:prstGeom prst="rect">
             <a:avLst/>
@@ -4574,125 +4479,70 @@
           <a:p>
             <a:pPr algn="l"/>
             <a:r>
-              <a:rPr sz="1050" b="0" i="0">
-                <a:solidFill>
-                  <a:srgbClr val="252525"/>
-                </a:solidFill>
-              </a:rPr>
-              <a:t>The US outspends Japan by</a:t>
+              <a:rPr sz="1200" b="0" i="0">
+                <a:solidFill>
+                  <a:srgbClr val="4B5563"/>
+                </a:solidFill>
+              </a:rPr>
+              <a:t>Obesity drives diabetes, heart disease</a:t>
             </a:r>
           </a:p>
           <a:p>
             <a:pPr algn="l"/>
             <a:r>
-              <a:rPr sz="1050" b="0" i="0">
-                <a:solidFill>
-                  <a:srgbClr val="252525"/>
-                </a:solidFill>
-              </a:rPr>
-              <a:t>$4,791 per person per year.</a:t>
+              <a:rPr sz="1200" b="0" i="0">
+                <a:solidFill>
+                  <a:srgbClr val="4B5563"/>
+                </a:solidFill>
+              </a:rPr>
+              <a:t>and several cancers — the conditions</a:t>
             </a:r>
           </a:p>
           <a:p>
             <a:pPr algn="l"/>
             <a:r>
-              <a:rPr sz="1050" b="0" i="0">
-                <a:solidFill>
-                  <a:srgbClr val="252525"/>
-                </a:solidFill>
-              </a:rPr>
-              <a:t/>
+              <a:rPr sz="1200" b="0" i="0">
+                <a:solidFill>
+                  <a:srgbClr val="4B5563"/>
+                </a:solidFill>
+              </a:rPr>
+              <a:t>that pull life expectancy down. No amount</a:t>
             </a:r>
           </a:p>
           <a:p>
             <a:pPr algn="l"/>
             <a:r>
-              <a:rPr sz="1050" b="0" i="0">
-                <a:solidFill>
-                  <a:srgbClr val="252525"/>
-                </a:solidFill>
-              </a:rPr>
-              <a:t>Multiplied across 330 million</a:t>
+              <a:rPr sz="1200" b="0" i="0">
+                <a:solidFill>
+                  <a:srgbClr val="4B5563"/>
+                </a:solidFill>
+              </a:rPr>
+              <a:t>of treatment spending offsets a</a:t>
             </a:r>
           </a:p>
           <a:p>
             <a:pPr algn="l"/>
             <a:r>
-              <a:rPr sz="1050" b="0" i="0">
-                <a:solidFill>
-                  <a:srgbClr val="252525"/>
-                </a:solidFill>
-              </a:rPr>
-              <a:t>Americans, that is ~$1.6 trillion</a:t>
-            </a:r>
-          </a:p>
-          <a:p>
-            <a:pPr algn="l"/>
-            <a:r>
-              <a:rPr sz="1050" b="0" i="0">
-                <a:solidFill>
-                  <a:srgbClr val="252525"/>
-                </a:solidFill>
-              </a:rPr>
-              <a:t>in annual excess health spend</a:t>
-            </a:r>
-          </a:p>
-          <a:p>
-            <a:pPr algn="l"/>
-            <a:r>
-              <a:rPr sz="1050" b="0" i="0">
-                <a:solidFill>
-                  <a:srgbClr val="252525"/>
-                </a:solidFill>
-              </a:rPr>
-              <a:t>with worse outcomes to show for it.</a:t>
-            </a:r>
-          </a:p>
-          <a:p>
-            <a:pPr algn="l"/>
-            <a:r>
-              <a:rPr sz="1050" b="0" i="0">
-                <a:solidFill>
-                  <a:srgbClr val="252525"/>
-                </a:solidFill>
-              </a:rPr>
-              <a:t/>
-            </a:r>
-          </a:p>
-          <a:p>
-            <a:pPr algn="l"/>
-            <a:r>
-              <a:rPr sz="1050" b="0" i="0">
-                <a:solidFill>
-                  <a:srgbClr val="252525"/>
-                </a:solidFill>
-              </a:rPr>
-              <a:t>The problem is systemic,</a:t>
-            </a:r>
-          </a:p>
-          <a:p>
-            <a:pPr algn="l"/>
-            <a:r>
-              <a:rPr sz="1050" b="0" i="0">
-                <a:solidFill>
-                  <a:srgbClr val="252525"/>
-                </a:solidFill>
-              </a:rPr>
-              <a:t>not financial.</a:t>
-            </a:r>
-          </a:p>
-        </p:txBody>
-      </p:sp>
-      <p:sp>
-        <p:nvSpPr>
-          <p:cNvPr id="9" name="TextBox 8"/>
+              <a:rPr sz="1200" b="0" i="0">
+                <a:solidFill>
+                  <a:srgbClr val="4B5563"/>
+                </a:solidFill>
+              </a:rPr>
+              <a:t>population-wide risk this large.</a:t>
+            </a:r>
+          </a:p>
+        </p:txBody>
+      </p:sp>
+      <p:sp>
+        <p:nvSpPr>
+          <p:cNvPr id="7" name="TextBox 6"/>
           <p:cNvSpPr txBox="1"/>
           <p:nvPr/>
         </p:nvSpPr>
         <p:spPr>
           <a:xfrm>
-            <a:off x="365760" y="6583680"/>
-            <a:ext cx="11430000" cy="237744"/>
+            <a:off x="8412480" y="5029200"/>
+            <a:ext cx="3611880" cy="822960"/>
           </a:xfrm>
           <a:prstGeom prst="rect">
             <a:avLst/>
@@ -4707,12 +4557,57 @@
           <a:p>
             <a:pPr algn="l"/>
             <a:r>
-              <a:rPr sz="800" b="0" i="1">
-                <a:solidFill>
-                  <a:srgbClr val="737373"/>
-                </a:solidFill>
-              </a:rPr>
-              <a:t>Data: World Bank World Development Indicators.</a:t>
+              <a:rPr sz="1200" b="1" i="0">
+                <a:solidFill>
+                  <a:srgbClr val="0F1F35"/>
+                </a:solidFill>
+              </a:rPr>
+              <a:t>This single factor does more to explain</a:t>
+            </a:r>
+          </a:p>
+          <a:p>
+            <a:pPr algn="l"/>
+            <a:r>
+              <a:rPr sz="1200" b="1" i="0">
+                <a:solidFill>
+                  <a:srgbClr val="0F1F35"/>
+                </a:solidFill>
+              </a:rPr>
+              <a:t>the U.S. shortfall than the health budget does.</a:t>
+            </a:r>
+          </a:p>
+        </p:txBody>
+      </p:sp>
+      <p:sp>
+        <p:nvSpPr>
+          <p:cNvPr id="8" name="TextBox 7"/>
+          <p:cNvSpPr txBox="1"/>
+          <p:nvPr/>
+        </p:nvSpPr>
+        <p:spPr>
+          <a:xfrm>
+            <a:off x="411480" y="6556248"/>
+            <a:ext cx="11338560" cy="256032"/>
+          </a:xfrm>
+          <a:prstGeom prst="rect">
+            <a:avLst/>
+          </a:prstGeom>
+          <a:noFill/>
+        </p:spPr>
+        <p:txBody>
+          <a:bodyPr wrap="square">
+            <a:spAutoFit/>
+          </a:bodyPr>
+          <a:lstStyle/>
+          <a:p>
+            <a:pPr algn="l"/>
+            <a:r>
+              <a:rPr sz="750" b="0" i="1">
+                <a:solidFill>
+                  <a:srgbClr val="9CA3AF"/>
+                </a:solidFill>
+              </a:rPr>
+              <a:t>Source: WHO Global Health Observatory — prevalence of obesity among adults, BMI ≥ 30 (%), 2022.</a:t>
             </a:r>
           </a:p>
         </p:txBody>
@@ -4751,8 +4646,8 @@
         </p:nvSpPr>
         <p:spPr>
           <a:xfrm>
-            <a:off x="365760" y="109728"/>
-            <a:ext cx="11430000" cy="502920"/>
+            <a:off x="411480" y="246888"/>
+            <a:ext cx="8229600" cy="292608"/>
           </a:xfrm>
           <a:prstGeom prst="rect">
             <a:avLst/>
@@ -4767,12 +4662,12 @@
           <a:p>
             <a:pPr algn="l"/>
             <a:r>
-              <a:rPr sz="2200" b="1" i="0">
-                <a:solidFill>
-                  <a:srgbClr val="252525"/>
-                </a:solidFill>
-              </a:rPr>
-              <a:t>If it's not money, then what drives the gap?</a:t>
+              <a:rPr sz="900" b="1" i="0">
+                <a:solidFill>
+                  <a:srgbClr val="2BA88A"/>
+                </a:solidFill>
+              </a:rPr>
+              <a:t>FACTOR 3 — POPULATION &amp; DEMOGRAPHICS</a:t>
             </a:r>
           </a:p>
         </p:txBody>
@@ -4785,8 +4680,8 @@
         </p:nvSpPr>
         <p:spPr>
           <a:xfrm>
-            <a:off x="365760" y="640080"/>
-            <a:ext cx="11430000" cy="347472"/>
+            <a:off x="411480" y="530352"/>
+            <a:ext cx="11247120" cy="960120"/>
           </a:xfrm>
           <a:prstGeom prst="rect">
             <a:avLst/>
@@ -4799,34 +4694,73 @@
           </a:bodyPr>
           <a:lstStyle/>
           <a:p>
-            <a:pPr algn="l"/>
-            <a:r>
-              <a:rPr sz="1100" b="0" i="0">
-                <a:solidFill>
-                  <a:srgbClr val="737373"/>
-                </a:solidFill>
-              </a:rPr>
-              <a:t>Three upstream factors explain most of the difference in health outcomes among wealthy nations</a:t>
-            </a:r>
-          </a:p>
-        </p:txBody>
-      </p:sp>
-      <p:sp>
-        <p:nvSpPr>
-          <p:cNvPr id="4" name="Rectangle 3"/>
+            <a:pPr algn="l">
+              <a:spcBef>
+                <a:spcPts val="0"/>
+              </a:spcBef>
+              <a:spcAft>
+                <a:spcPts val="0"/>
+              </a:spcAft>
+            </a:pPr>
+            <a:r>
+              <a:rPr sz="2700" b="1">
+                <a:solidFill>
+                  <a:srgbClr val="0F1F35"/>
+                </a:solidFill>
+              </a:rPr>
+              <a:t>Ageing isn’t the excuse — </a:t>
+            </a:r>
+            <a:r>
+              <a:rPr sz="2700" b="1">
+                <a:solidFill>
+                  <a:srgbClr val="2BA88A"/>
+                </a:solidFill>
+              </a:rPr>
+              <a:t>Japan is the oldest, and lives the longest</a:t>
+            </a:r>
+          </a:p>
+        </p:txBody>
+      </p:sp>
+      <p:pic>
+        <p:nvPicPr>
+          <p:cNvPr id="4" name="Picture 3" descr="image.png"/>
+          <p:cNvPicPr>
+            <a:picLocks noChangeAspect="1"/>
+          </p:cNvPicPr>
+          <p:nvPr/>
+        </p:nvPicPr>
+        <p:blipFill>
+          <a:blip r:embed="rId2"/>
+          <a:stretch>
+            <a:fillRect/>
+          </a:stretch>
+        </p:blipFill>
+        <p:spPr>
+          <a:xfrm>
+            <a:off x="274320" y="1508760"/>
+            <a:ext cx="8001000" cy="5120640"/>
+          </a:xfrm>
+          <a:prstGeom prst="rect">
+            <a:avLst/>
+          </a:prstGeom>
+        </p:spPr>
+      </p:pic>
+      <p:sp>
+        <p:nvSpPr>
+          <p:cNvPr id="5" name="Rectangle 4"/>
           <p:cNvSpPr/>
           <p:nvPr/>
         </p:nvSpPr>
         <p:spPr>
           <a:xfrm>
-            <a:off x="320040" y="1188720"/>
-            <a:ext cx="3611880" cy="4663440"/>
+            <a:off x="8412480" y="1664208"/>
+            <a:ext cx="182880" cy="182880"/>
           </a:xfrm>
           <a:prstGeom prst="rect">
             <a:avLst/>
           </a:prstGeom>
           <a:solidFill>
-            <a:srgbClr val="D87000"/>
+            <a:srgbClr val="C0392B"/>
           </a:solidFill>
           <a:ln>
             <a:noFill/>
@@ -4856,14 +4790,14 @@
       </p:sp>
       <p:sp>
         <p:nvSpPr>
-          <p:cNvPr id="5" name="TextBox 4"/>
+          <p:cNvPr id="6" name="TextBox 5"/>
           <p:cNvSpPr txBox="1"/>
           <p:nvPr/>
         </p:nvSpPr>
         <p:spPr>
           <a:xfrm>
-            <a:off x="484632" y="1325880"/>
-            <a:ext cx="3337560" cy="594360"/>
+            <a:off x="8668512" y="1636776"/>
+            <a:ext cx="1645920" cy="274320"/>
           </a:xfrm>
           <a:prstGeom prst="rect">
             <a:avLst/>
@@ -4878,144 +4812,32 @@
           <a:p>
             <a:pPr algn="l"/>
             <a:r>
-              <a:rPr sz="3000" b="1" i="0">
-                <a:solidFill>
-                  <a:srgbClr val="FFFFFF"/>
-                </a:solidFill>
-              </a:rPr>
-              <a:t>01</a:t>
-            </a:r>
-          </a:p>
-        </p:txBody>
-      </p:sp>
-      <p:sp>
-        <p:nvSpPr>
-          <p:cNvPr id="6" name="TextBox 5"/>
-          <p:cNvSpPr txBox="1"/>
-          <p:nvPr/>
-        </p:nvSpPr>
-        <p:spPr>
-          <a:xfrm>
-            <a:off x="484632" y="1920240"/>
-            <a:ext cx="3337560" cy="777240"/>
-          </a:xfrm>
-          <a:prstGeom prst="rect">
-            <a:avLst/>
-          </a:prstGeom>
-          <a:noFill/>
-        </p:spPr>
-        <p:txBody>
-          <a:bodyPr wrap="square">
-            <a:spAutoFit/>
-          </a:bodyPr>
-          <a:lstStyle/>
-          <a:p>
-            <a:pPr algn="l"/>
-            <a:r>
-              <a:rPr sz="1700" b="1" i="0">
-                <a:solidFill>
-                  <a:srgbClr val="FFFFFF"/>
-                </a:solidFill>
-              </a:rPr>
-              <a:t>Lifestyle &amp;</a:t>
-            </a:r>
-          </a:p>
-          <a:p>
-            <a:pPr algn="l"/>
-            <a:r>
-              <a:rPr sz="1700" b="1" i="0">
-                <a:solidFill>
-                  <a:srgbClr val="FFFFFF"/>
-                </a:solidFill>
-              </a:rPr>
-              <a:t>Obesity</a:t>
-            </a:r>
-          </a:p>
-        </p:txBody>
-      </p:sp>
-      <p:sp>
-        <p:nvSpPr>
-          <p:cNvPr id="7" name="TextBox 6"/>
-          <p:cNvSpPr txBox="1"/>
-          <p:nvPr/>
-        </p:nvSpPr>
-        <p:spPr>
-          <a:xfrm>
-            <a:off x="484632" y="2743200"/>
-            <a:ext cx="3337560" cy="2926080"/>
-          </a:xfrm>
-          <a:prstGeom prst="rect">
-            <a:avLst/>
-          </a:prstGeom>
-          <a:noFill/>
-        </p:spPr>
-        <p:txBody>
-          <a:bodyPr wrap="square">
-            <a:spAutoFit/>
-          </a:bodyPr>
-          <a:lstStyle/>
-          <a:p>
-            <a:pPr algn="l"/>
-            <a:r>
-              <a:rPr sz="1150" b="0" i="0">
-                <a:solidFill>
-                  <a:srgbClr val="FFFFFF"/>
-                </a:solidFill>
-              </a:rPr>
-              <a:t>The US adult obesity rate (36%) is</a:t>
-            </a:r>
-          </a:p>
-          <a:p>
-            <a:pPr algn="l"/>
-            <a:r>
-              <a:rPr sz="1150" b="0" i="0">
-                <a:solidFill>
-                  <a:srgbClr val="FFFFFF"/>
-                </a:solidFill>
-              </a:rPr>
-              <a:t>nearly 3× Japan's (4%) and France's</a:t>
-            </a:r>
-          </a:p>
-          <a:p>
-            <a:pPr algn="l"/>
-            <a:r>
-              <a:rPr sz="1150" b="0" i="0">
-                <a:solidFill>
-                  <a:srgbClr val="FFFFFF"/>
-                </a:solidFill>
-              </a:rPr>
-              <a:t>(22%). Obesity is the single largest</a:t>
-            </a:r>
-          </a:p>
-          <a:p>
-            <a:pPr algn="l"/>
-            <a:r>
-              <a:rPr sz="1150" b="0" i="0">
-                <a:solidFill>
-                  <a:srgbClr val="FFFFFF"/>
-                </a:solidFill>
-              </a:rPr>
-              <a:t>driver of preventable chronic disease.</a:t>
-            </a:r>
-          </a:p>
-        </p:txBody>
-      </p:sp>
-      <p:sp>
-        <p:nvSpPr>
-          <p:cNvPr id="8" name="Rectangle 7"/>
+              <a:rPr sz="950" b="1" i="0">
+                <a:solidFill>
+                  <a:srgbClr val="C0392B"/>
+                </a:solidFill>
+              </a:rPr>
+              <a:t>United States</a:t>
+            </a:r>
+          </a:p>
+        </p:txBody>
+      </p:sp>
+      <p:sp>
+        <p:nvSpPr>
+          <p:cNvPr id="7" name="Rectangle 6"/>
           <p:cNvSpPr/>
           <p:nvPr/>
         </p:nvSpPr>
         <p:spPr>
           <a:xfrm>
-            <a:off x="4297679" y="1188720"/>
-            <a:ext cx="3611880" cy="4663440"/>
+            <a:off x="10195560" y="1664208"/>
+            <a:ext cx="182880" cy="182880"/>
           </a:xfrm>
           <a:prstGeom prst="rect">
             <a:avLst/>
           </a:prstGeom>
           <a:solidFill>
-            <a:srgbClr val="0078D4"/>
+            <a:srgbClr val="2BA88A"/>
           </a:solidFill>
           <a:ln>
             <a:noFill/>
@@ -5045,14 +4867,14 @@
       </p:sp>
       <p:sp>
         <p:nvSpPr>
-          <p:cNvPr id="9" name="TextBox 8"/>
+          <p:cNvPr id="8" name="TextBox 7"/>
           <p:cNvSpPr txBox="1"/>
           <p:nvPr/>
         </p:nvSpPr>
         <p:spPr>
           <a:xfrm>
-            <a:off x="4462271" y="1325880"/>
-            <a:ext cx="3337560" cy="594360"/>
+            <a:off x="10451592" y="1636776"/>
+            <a:ext cx="1645920" cy="274320"/>
           </a:xfrm>
           <a:prstGeom prst="rect">
             <a:avLst/>
@@ -5067,26 +4889,26 @@
           <a:p>
             <a:pPr algn="l"/>
             <a:r>
-              <a:rPr sz="3000" b="1" i="0">
-                <a:solidFill>
-                  <a:srgbClr val="FFFFFF"/>
-                </a:solidFill>
-              </a:rPr>
-              <a:t>02</a:t>
-            </a:r>
-          </a:p>
-        </p:txBody>
-      </p:sp>
-      <p:sp>
-        <p:nvSpPr>
-          <p:cNvPr id="10" name="TextBox 9"/>
+              <a:rPr sz="950" b="1" i="0">
+                <a:solidFill>
+                  <a:srgbClr val="2BA88A"/>
+                </a:solidFill>
+              </a:rPr>
+              <a:t>Japan</a:t>
+            </a:r>
+          </a:p>
+        </p:txBody>
+      </p:sp>
+      <p:sp>
+        <p:nvSpPr>
+          <p:cNvPr id="9" name="TextBox 8"/>
           <p:cNvSpPr txBox="1"/>
           <p:nvPr/>
         </p:nvSpPr>
         <p:spPr>
           <a:xfrm>
-            <a:off x="4462271" y="1920240"/>
-            <a:ext cx="3337560" cy="777240"/>
+            <a:off x="8412480" y="2148840"/>
+            <a:ext cx="3611880" cy="1005840"/>
           </a:xfrm>
           <a:prstGeom prst="rect">
             <a:avLst/>
@@ -5101,37 +4923,48 @@
           <a:p>
             <a:pPr algn="l"/>
             <a:r>
-              <a:rPr sz="1700" b="1" i="0">
-                <a:solidFill>
-                  <a:srgbClr val="FFFFFF"/>
-                </a:solidFill>
-              </a:rPr>
-              <a:t>Education &amp;</a:t>
+              <a:rPr sz="1200" b="0" i="0">
+                <a:solidFill>
+                  <a:srgbClr val="4B5563"/>
+                </a:solidFill>
+              </a:rPr>
+              <a:t>A common defence: “Americans die younger</a:t>
             </a:r>
           </a:p>
           <a:p>
             <a:pPr algn="l"/>
             <a:r>
-              <a:rPr sz="1700" b="1" i="0">
-                <a:solidFill>
-                  <a:srgbClr val="FFFFFF"/>
-                </a:solidFill>
-              </a:rPr>
-              <a:t>Health Literacy</a:t>
-            </a:r>
-          </a:p>
-        </p:txBody>
-      </p:sp>
-      <p:sp>
-        <p:nvSpPr>
-          <p:cNvPr id="11" name="TextBox 10"/>
+              <a:rPr sz="1200" b="0" i="0">
+                <a:solidFill>
+                  <a:srgbClr val="4B5563"/>
+                </a:solidFill>
+              </a:rPr>
+              <a:t>because the U.S. is different.”</a:t>
+            </a:r>
+          </a:p>
+          <a:p>
+            <a:pPr algn="l"/>
+            <a:r>
+              <a:rPr sz="1200" b="0" i="0">
+                <a:solidFill>
+                  <a:srgbClr val="4B5563"/>
+                </a:solidFill>
+              </a:rPr>
+              <a:t>The age structure says otherwise.</a:t>
+            </a:r>
+          </a:p>
+        </p:txBody>
+      </p:sp>
+      <p:sp>
+        <p:nvSpPr>
+          <p:cNvPr id="10" name="TextBox 9"/>
           <p:cNvSpPr txBox="1"/>
           <p:nvPr/>
         </p:nvSpPr>
         <p:spPr>
           <a:xfrm>
-            <a:off x="4462271" y="2743200"/>
-            <a:ext cx="3337560" cy="2926080"/>
+            <a:off x="8412480" y="3246120"/>
+            <a:ext cx="3611880" cy="1737360"/>
           </a:xfrm>
           <a:prstGeom prst="rect">
             <a:avLst/>
@@ -5144,104 +4977,101 @@
           </a:bodyPr>
           <a:lstStyle/>
           <a:p>
-            <a:pPr algn="l"/>
-            <a:r>
-              <a:rPr sz="1150" b="0" i="0">
-                <a:solidFill>
-                  <a:srgbClr val="FFFFFF"/>
-                </a:solidFill>
-              </a:rPr>
-              <a:t>Countries with strong public health</a:t>
-            </a:r>
-          </a:p>
-          <a:p>
-            <a:pPr algn="l"/>
-            <a:r>
-              <a:rPr sz="1150" b="0" i="0">
-                <a:solidFill>
-                  <a:srgbClr val="FFFFFF"/>
-                </a:solidFill>
-              </a:rPr>
-              <a:t>education programs see 15–25%</a:t>
-            </a:r>
-          </a:p>
-          <a:p>
-            <a:pPr algn="l"/>
-            <a:r>
-              <a:rPr sz="1150" b="0" i="0">
-                <a:solidFill>
-                  <a:srgbClr val="FFFFFF"/>
-                </a:solidFill>
-              </a:rPr>
-              <a:t>lower preventable mortality and</a:t>
-            </a:r>
-          </a:p>
-          <a:p>
-            <a:pPr algn="l"/>
-            <a:r>
-              <a:rPr sz="1150" b="0" i="0">
-                <a:solidFill>
-                  <a:srgbClr val="FFFFFF"/>
-                </a:solidFill>
-              </a:rPr>
-              <a:t>higher system efficiency per dollar.</a:t>
-            </a:r>
-          </a:p>
-        </p:txBody>
-      </p:sp>
-      <p:sp>
-        <p:nvSpPr>
-          <p:cNvPr id="12" name="Rectangle 11"/>
-          <p:cNvSpPr/>
-          <p:nvPr/>
-        </p:nvSpPr>
-        <p:spPr>
-          <a:xfrm>
-            <a:off x="8275319" y="1188720"/>
-            <a:ext cx="3611880" cy="4663440"/>
-          </a:xfrm>
-          <a:prstGeom prst="rect">
-            <a:avLst/>
-          </a:prstGeom>
-          <a:solidFill>
-            <a:srgbClr val="107C10"/>
-          </a:solidFill>
-          <a:ln>
-            <a:noFill/>
-          </a:ln>
-        </p:spPr>
-        <p:style>
-          <a:lnRef idx="1">
-            <a:schemeClr val="accent1"/>
-          </a:lnRef>
-          <a:fillRef idx="3">
-            <a:schemeClr val="accent1"/>
-          </a:fillRef>
-          <a:effectRef idx="2">
-            <a:schemeClr val="accent1"/>
-          </a:effectRef>
-          <a:fontRef idx="minor">
-            <a:schemeClr val="lt1"/>
-          </a:fontRef>
-        </p:style>
-        <p:txBody>
-          <a:bodyPr rtlCol="0" anchor="ctr"/>
-          <a:lstStyle/>
-          <a:p>
-            <a:pPr algn="ctr"/>
-          </a:p>
-        </p:txBody>
-      </p:sp>
-      <p:sp>
-        <p:nvSpPr>
-          <p:cNvPr id="13" name="TextBox 12"/>
+            <a:pPr algn="l">
+              <a:spcBef>
+                <a:spcPts val="0"/>
+              </a:spcBef>
+              <a:spcAft>
+                <a:spcPts val="0"/>
+              </a:spcAft>
+            </a:pPr>
+            <a:r>
+              <a:rPr sz="1200" b="0">
+                <a:solidFill>
+                  <a:srgbClr val="4B5563"/>
+                </a:solidFill>
+              </a:rPr>
+              <a:t>The U.S. is the </a:t>
+            </a:r>
+            <a:r>
+              <a:rPr sz="1200" b="0">
+                <a:solidFill>
+                  <a:srgbClr val="C0392B"/>
+                </a:solidFill>
+              </a:rPr>
+              <a:t>youngest</a:t>
+            </a:r>
+            <a:r>
+              <a:rPr sz="1200" b="0">
+                <a:solidFill>
+                  <a:srgbClr val="4B5563"/>
+                </a:solidFill>
+              </a:rPr>
+              <a:t> of these peers
+(18% over 65) yet sits </a:t>
+            </a:r>
+            <a:r>
+              <a:rPr sz="1200" b="0">
+                <a:solidFill>
+                  <a:srgbClr val="C0392B"/>
+                </a:solidFill>
+              </a:rPr>
+              <a:t>lowest</a:t>
+            </a:r>
+            <a:r>
+              <a:rPr sz="1200" b="0">
+                <a:solidFill>
+                  <a:srgbClr val="4B5563"/>
+                </a:solidFill>
+              </a:rPr>
+              <a:t>. Japan is the
+</a:t>
+            </a:r>
+            <a:r>
+              <a:rPr sz="1200" b="0">
+                <a:solidFill>
+                  <a:srgbClr val="2BA88A"/>
+                </a:solidFill>
+              </a:rPr>
+              <a:t>oldest</a:t>
+            </a:r>
+            <a:r>
+              <a:rPr sz="1200" b="0">
+                <a:solidFill>
+                  <a:srgbClr val="4B5563"/>
+                </a:solidFill>
+              </a:rPr>
+              <a:t> (30%) and </a:t>
+            </a:r>
+            <a:r>
+              <a:rPr sz="1200" b="0">
+                <a:solidFill>
+                  <a:srgbClr val="2BA88A"/>
+                </a:solidFill>
+              </a:rPr>
+              <a:t>highest</a:t>
+            </a:r>
+            <a:r>
+              <a:rPr sz="1200" b="0">
+                <a:solidFill>
+                  <a:srgbClr val="4B5563"/>
+                </a:solidFill>
+              </a:rPr>
+              <a:t>.</a:t>
+            </a:r>
+          </a:p>
+        </p:txBody>
+      </p:sp>
+      <p:sp>
+        <p:nvSpPr>
+          <p:cNvPr id="11" name="TextBox 10"/>
           <p:cNvSpPr txBox="1"/>
           <p:nvPr/>
         </p:nvSpPr>
         <p:spPr>
           <a:xfrm>
-            <a:off x="8439911" y="1325880"/>
-            <a:ext cx="3337560" cy="594360"/>
+            <a:off x="8412480" y="5074920"/>
+            <a:ext cx="3611880" cy="731520"/>
           </a:xfrm>
           <a:prstGeom prst="rect">
             <a:avLst/>
@@ -5256,26 +5086,37 @@
           <a:p>
             <a:pPr algn="l"/>
             <a:r>
-              <a:rPr sz="3000" b="1" i="0">
-                <a:solidFill>
-                  <a:srgbClr val="FFFFFF"/>
-                </a:solidFill>
-              </a:rPr>
-              <a:t>03</a:t>
-            </a:r>
-          </a:p>
-        </p:txBody>
-      </p:sp>
-      <p:sp>
-        <p:nvSpPr>
-          <p:cNvPr id="14" name="TextBox 13"/>
+              <a:rPr sz="1200" b="1" i="0">
+                <a:solidFill>
+                  <a:srgbClr val="0F1F35"/>
+                </a:solidFill>
+              </a:rPr>
+              <a:t>A younger population should make</a:t>
+            </a:r>
+          </a:p>
+          <a:p>
+            <a:pPr algn="l"/>
+            <a:r>
+              <a:rPr sz="1200" b="1" i="0">
+                <a:solidFill>
+                  <a:srgbClr val="0F1F35"/>
+                </a:solidFill>
+              </a:rPr>
+              <a:t>longevity easier, not harder.</a:t>
+            </a:r>
+          </a:p>
+        </p:txBody>
+      </p:sp>
+      <p:sp>
+        <p:nvSpPr>
+          <p:cNvPr id="12" name="TextBox 11"/>
           <p:cNvSpPr txBox="1"/>
           <p:nvPr/>
         </p:nvSpPr>
         <p:spPr>
           <a:xfrm>
-            <a:off x="8439911" y="1920240"/>
-            <a:ext cx="3337560" cy="777240"/>
+            <a:off x="411480" y="6556248"/>
+            <a:ext cx="11338560" cy="256032"/>
           </a:xfrm>
           <a:prstGeom prst="rect">
             <a:avLst/>
@@ -5290,124 +5131,12 @@
           <a:p>
             <a:pPr algn="l"/>
             <a:r>
-              <a:rPr sz="1700" b="1" i="0">
-                <a:solidFill>
-                  <a:srgbClr val="FFFFFF"/>
-                </a:solidFill>
-              </a:rPr>
-              <a:t>System Design &amp;</a:t>
-            </a:r>
-          </a:p>
-          <a:p>
-            <a:pPr algn="l"/>
-            <a:r>
-              <a:rPr sz="1700" b="1" i="0">
-                <a:solidFill>
-                  <a:srgbClr val="FFFFFF"/>
-                </a:solidFill>
-              </a:rPr>
-              <a:t>Primary Care</a:t>
-            </a:r>
-          </a:p>
-        </p:txBody>
-      </p:sp>
-      <p:sp>
-        <p:nvSpPr>
-          <p:cNvPr id="15" name="TextBox 14"/>
-          <p:cNvSpPr txBox="1"/>
-          <p:nvPr/>
-        </p:nvSpPr>
-        <p:spPr>
-          <a:xfrm>
-            <a:off x="8439911" y="2743200"/>
-            <a:ext cx="3337560" cy="2926080"/>
-          </a:xfrm>
-          <a:prstGeom prst="rect">
-            <a:avLst/>
-          </a:prstGeom>
-          <a:noFill/>
-        </p:spPr>
-        <p:txBody>
-          <a:bodyPr wrap="square">
-            <a:spAutoFit/>
-          </a:bodyPr>
-          <a:lstStyle/>
-          <a:p>
-            <a:pPr algn="l"/>
-            <a:r>
-              <a:rPr sz="1150" b="0" i="0">
-                <a:solidFill>
-                  <a:srgbClr val="FFFFFF"/>
-                </a:solidFill>
-              </a:rPr>
-              <a:t>Universal primary care access</a:t>
-            </a:r>
-          </a:p>
-          <a:p>
-            <a:pPr algn="l"/>
-            <a:r>
-              <a:rPr sz="1150" b="0" i="0">
-                <a:solidFill>
-                  <a:srgbClr val="FFFFFF"/>
-                </a:solidFill>
-              </a:rPr>
-              <a:t>reduces costly hospital admissions</a:t>
-            </a:r>
-          </a:p>
-          <a:p>
-            <a:pPr algn="l"/>
-            <a:r>
-              <a:rPr sz="1150" b="0" i="0">
-                <a:solidFill>
-                  <a:srgbClr val="FFFFFF"/>
-                </a:solidFill>
-              </a:rPr>
-              <a:t>and concentrates spend where it</a:t>
-            </a:r>
-          </a:p>
-          <a:p>
-            <a:pPr algn="l"/>
-            <a:r>
-              <a:rPr sz="1150" b="0" i="0">
-                <a:solidFill>
-                  <a:srgbClr val="FFFFFF"/>
-                </a:solidFill>
-              </a:rPr>
-              <a:t>has the highest marginal return.</a:t>
-            </a:r>
-          </a:p>
-        </p:txBody>
-      </p:sp>
-      <p:sp>
-        <p:nvSpPr>
-          <p:cNvPr id="16" name="TextBox 15"/>
-          <p:cNvSpPr txBox="1"/>
-          <p:nvPr/>
-        </p:nvSpPr>
-        <p:spPr>
-          <a:xfrm>
-            <a:off x="365760" y="6583680"/>
-            <a:ext cx="11430000" cy="237744"/>
-          </a:xfrm>
-          <a:prstGeom prst="rect">
-            <a:avLst/>
-          </a:prstGeom>
-          <a:noFill/>
-        </p:spPr>
-        <p:txBody>
-          <a:bodyPr wrap="square">
-            <a:spAutoFit/>
-          </a:bodyPr>
-          <a:lstStyle/>
-          <a:p>
-            <a:pPr algn="l"/>
-            <a:r>
-              <a:rPr sz="800" b="0" i="1">
-                <a:solidFill>
-                  <a:srgbClr val="737373"/>
-                </a:solidFill>
-              </a:rPr>
-              <a:t>Source: WHO Global Health Observatory, OECD Health at a Glance 2023, World Bank WDI</a:t>
+              <a:rPr sz="750" b="0" i="1">
+                <a:solidFill>
+                  <a:srgbClr val="9CA3AF"/>
+                </a:solidFill>
+              </a:rPr>
+              <a:t>Source: UN World Population Prospects / World Bank — population aged 65+ (% of total), 2024; population, 2023. Life expectancy: World Bank WDI.</a:t>
             </a:r>
           </a:p>
         </p:txBody>
@@ -5446,8 +5175,8 @@
         </p:nvSpPr>
         <p:spPr>
           <a:xfrm>
-            <a:off x="365760" y="109728"/>
-            <a:ext cx="11430000" cy="502920"/>
+            <a:off x="411480" y="246888"/>
+            <a:ext cx="8229600" cy="292608"/>
           </a:xfrm>
           <a:prstGeom prst="rect">
             <a:avLst/>
@@ -5462,12 +5191,12 @@
           <a:p>
             <a:pPr algn="l"/>
             <a:r>
-              <a:rPr sz="2100" b="1" i="0">
-                <a:solidFill>
-                  <a:srgbClr val="252525"/>
-                </a:solidFill>
-              </a:rPr>
-              <a:t>Factor 1: America is the most obese wealthy nation — and it shows</a:t>
+              <a:rPr sz="900" b="1" i="0">
+                <a:solidFill>
+                  <a:srgbClr val="2BA88A"/>
+                </a:solidFill>
+              </a:rPr>
+              <a:t>FACTOR 4 — HEALTHCARE COSTS</a:t>
             </a:r>
           </a:p>
         </p:txBody>
@@ -5480,8 +5209,8 @@
         </p:nvSpPr>
         <p:spPr>
           <a:xfrm>
-            <a:off x="365760" y="621792"/>
-            <a:ext cx="11430000" cy="292608"/>
+            <a:off x="411480" y="502920"/>
+            <a:ext cx="11247120" cy="1005840"/>
           </a:xfrm>
           <a:prstGeom prst="rect">
             <a:avLst/>
@@ -5494,14 +5223,37 @@
           </a:bodyPr>
           <a:lstStyle/>
           <a:p>
-            <a:pPr algn="l"/>
-            <a:r>
-              <a:rPr sz="1100" b="0" i="0">
-                <a:solidFill>
-                  <a:srgbClr val="737373"/>
-                </a:solidFill>
-              </a:rPr>
-              <a:t>Higher obesity rates correlate strongly with lower life expectancy, even among the world's richest countries</a:t>
+            <a:pPr algn="l">
+              <a:spcBef>
+                <a:spcPts val="0"/>
+              </a:spcBef>
+              <a:spcAft>
+                <a:spcPts val="0"/>
+              </a:spcAft>
+            </a:pPr>
+            <a:r>
+              <a:rPr sz="2700" b="1">
+                <a:solidFill>
+                  <a:srgbClr val="0F1F35"/>
+                </a:solidFill>
+              </a:rPr>
+              <a:t>America’s bill is high because its </a:t>
+            </a:r>
+            <a:r>
+              <a:rPr sz="2700" b="1">
+                <a:solidFill>
+                  <a:srgbClr val="C0392B"/>
+                </a:solidFill>
+              </a:rPr>
+              <a:t>prices</a:t>
+            </a:r>
+            <a:r>
+              <a:rPr sz="2700" b="1">
+                <a:solidFill>
+                  <a:srgbClr val="0F1F35"/>
+                </a:solidFill>
+              </a:rPr>
+              <a:t> are — not because it uses more care</a:t>
             </a:r>
           </a:p>
         </p:txBody>
@@ -5522,8 +5274,8 @@
         </p:blipFill>
         <p:spPr>
           <a:xfrm>
-            <a:off x="274320" y="960120"/>
-            <a:ext cx="8046720" cy="5394960"/>
+            <a:off x="274320" y="1463040"/>
+            <a:ext cx="8001000" cy="5166360"/>
           </a:xfrm>
           <a:prstGeom prst="rect">
             <a:avLst/>
@@ -5532,57 +5284,14 @@
       </p:pic>
       <p:sp>
         <p:nvSpPr>
-          <p:cNvPr id="5" name="Rectangle 4"/>
-          <p:cNvSpPr/>
-          <p:nvPr/>
-        </p:nvSpPr>
-        <p:spPr>
-          <a:xfrm>
-            <a:off x="8458200" y="960120"/>
-            <a:ext cx="3520440" cy="5394960"/>
-          </a:xfrm>
-          <a:prstGeom prst="rect">
-            <a:avLst/>
-          </a:prstGeom>
-          <a:solidFill>
-            <a:srgbClr val="F2F2F2"/>
-          </a:solidFill>
-          <a:ln>
-            <a:noFill/>
-          </a:ln>
-        </p:spPr>
-        <p:style>
-          <a:lnRef idx="1">
-            <a:schemeClr val="accent1"/>
-          </a:lnRef>
-          <a:fillRef idx="3">
-            <a:schemeClr val="accent1"/>
-          </a:fillRef>
-          <a:effectRef idx="2">
-            <a:schemeClr val="accent1"/>
-          </a:effectRef>
-          <a:fontRef idx="minor">
-            <a:schemeClr val="lt1"/>
-          </a:fontRef>
-        </p:style>
-        <p:txBody>
-          <a:bodyPr rtlCol="0" anchor="ctr"/>
-          <a:lstStyle/>
-          <a:p>
-            <a:pPr algn="ctr"/>
-          </a:p>
-        </p:txBody>
-      </p:sp>
-      <p:sp>
-        <p:nvSpPr>
-          <p:cNvPr id="6" name="TextBox 5"/>
+          <p:cNvPr id="5" name="TextBox 4"/>
           <p:cNvSpPr txBox="1"/>
           <p:nvPr/>
         </p:nvSpPr>
         <p:spPr>
           <a:xfrm>
-            <a:off x="8595360" y="1143000"/>
-            <a:ext cx="3200400" cy="502920"/>
+            <a:off x="8412480" y="1828800"/>
+            <a:ext cx="3611880" cy="731520"/>
           </a:xfrm>
           <a:prstGeom prst="rect">
             <a:avLst/>
@@ -5595,28 +5304,51 @@
           </a:bodyPr>
           <a:lstStyle/>
           <a:p>
-            <a:pPr algn="l"/>
-            <a:r>
-              <a:rPr sz="2600" b="1" i="0">
-                <a:solidFill>
-                  <a:srgbClr val="D87000"/>
-                </a:solidFill>
-              </a:rPr>
-              <a:t>36.2%</a:t>
-            </a:r>
-          </a:p>
-        </p:txBody>
-      </p:sp>
-      <p:sp>
-        <p:nvSpPr>
-          <p:cNvPr id="7" name="TextBox 6"/>
+            <a:pPr algn="l">
+              <a:spcBef>
+                <a:spcPts val="0"/>
+              </a:spcBef>
+              <a:spcAft>
+                <a:spcPts val="0"/>
+              </a:spcAft>
+            </a:pPr>
+            <a:r>
+              <a:rPr sz="1350" b="1">
+                <a:solidFill>
+                  <a:srgbClr val="C0392B"/>
+                </a:solidFill>
+              </a:rPr>
+              <a:t>The U.S. spends ~$12,600 per person</a:t>
+            </a:r>
+            <a:r>
+              <a:rPr sz="1350" b="1">
+                <a:solidFill>
+                  <a:srgbClr val="4B5563"/>
+                </a:solidFill>
+              </a:rPr>
+              <a:t> — about </a:t>
+            </a:r>
+            <a:r>
+              <a:rPr sz="1350" b="1">
+                <a:solidFill>
+                  <a:srgbClr val="2BA88A"/>
+                </a:solidFill>
+              </a:rPr>
+              <a:t>2.2× Japan.</a:t>
+            </a:r>
+          </a:p>
+        </p:txBody>
+      </p:sp>
+      <p:sp>
+        <p:nvSpPr>
+          <p:cNvPr id="6" name="TextBox 5"/>
           <p:cNvSpPr txBox="1"/>
           <p:nvPr/>
         </p:nvSpPr>
         <p:spPr>
           <a:xfrm>
-            <a:off x="8595360" y="1664208"/>
-            <a:ext cx="3200400" cy="457200"/>
+            <a:off x="8412480" y="2743200"/>
+            <a:ext cx="3611880" cy="2194560"/>
           </a:xfrm>
           <a:prstGeom prst="rect">
             <a:avLst/>
@@ -5629,28 +5361,79 @@
           </a:bodyPr>
           <a:lstStyle/>
           <a:p>
-            <a:pPr algn="l"/>
-            <a:r>
-              <a:rPr sz="1000" b="0" i="0">
-                <a:solidFill>
-                  <a:srgbClr val="737373"/>
-                </a:solidFill>
-              </a:rPr>
-              <a:t>US adult obesity rate</a:t>
-            </a:r>
-          </a:p>
-        </p:txBody>
-      </p:sp>
-      <p:sp>
-        <p:nvSpPr>
-          <p:cNvPr id="8" name="TextBox 7"/>
+            <a:pPr algn="l">
+              <a:spcBef>
+                <a:spcPts val="0"/>
+              </a:spcBef>
+              <a:spcAft>
+                <a:spcPts val="0"/>
+              </a:spcAft>
+            </a:pPr>
+            <a:r>
+              <a:rPr sz="1200" b="0">
+                <a:solidFill>
+                  <a:srgbClr val="4B5563"/>
+                </a:solidFill>
+              </a:rPr>
+              <a:t>It isn’t that Americans see doctors more. It’s unit price: U.S. medical prices run about </a:t>
+            </a:r>
+            <a:r>
+              <a:rPr sz="1200" b="0">
+                <a:solidFill>
+                  <a:srgbClr val="C0392B"/>
+                </a:solidFill>
+              </a:rPr>
+              <a:t>43% above the OECD average</a:t>
+            </a:r>
+            <a:r>
+              <a:rPr sz="1200" b="0">
+                <a:solidFill>
+                  <a:srgbClr val="4B5563"/>
+                </a:solidFill>
+              </a:rPr>
+              <a:t> (price level 143 vs. 100), led by drugs and administration.</a:t>
+            </a:r>
+          </a:p>
+          <a:p>
+            <a:pPr algn="l">
+              <a:spcBef>
+                <a:spcPts val="0"/>
+              </a:spcBef>
+              <a:spcAft>
+                <a:spcPts val="0"/>
+              </a:spcAft>
+            </a:pPr>
+          </a:p>
+          <a:p>
+            <a:pPr algn="l">
+              <a:spcBef>
+                <a:spcPts val="0"/>
+              </a:spcBef>
+              <a:spcAft>
+                <a:spcPts val="0"/>
+              </a:spcAft>
+            </a:pPr>
+            <a:r>
+              <a:rPr sz="1200" b="1">
+                <a:solidFill>
+                  <a:srgbClr val="0F1F35"/>
+                </a:solidFill>
+              </a:rPr>
+              <a:t>Same care, higher price tag — dollars that never reach longer life.</a:t>
+            </a:r>
+          </a:p>
+        </p:txBody>
+      </p:sp>
+      <p:sp>
+        <p:nvSpPr>
+          <p:cNvPr id="7" name="TextBox 6"/>
           <p:cNvSpPr txBox="1"/>
           <p:nvPr/>
         </p:nvSpPr>
         <p:spPr>
           <a:xfrm>
-            <a:off x="8595360" y="2377440"/>
-            <a:ext cx="3200400" cy="502920"/>
+            <a:off x="411480" y="6556248"/>
+            <a:ext cx="11338560" cy="256032"/>
           </a:xfrm>
           <a:prstGeom prst="rect">
             <a:avLst/>
@@ -5665,238 +5448,12 @@
           <a:p>
             <a:pPr algn="l"/>
             <a:r>
-              <a:rPr sz="2600" b="1" i="0">
-                <a:solidFill>
-                  <a:srgbClr val="D87000"/>
-                </a:solidFill>
-              </a:rPr>
-              <a:t>3.4×</a:t>
-            </a:r>
-          </a:p>
-        </p:txBody>
-      </p:sp>
-      <p:sp>
-        <p:nvSpPr>
-          <p:cNvPr id="9" name="TextBox 8"/>
-          <p:cNvSpPr txBox="1"/>
-          <p:nvPr/>
-        </p:nvSpPr>
-        <p:spPr>
-          <a:xfrm>
-            <a:off x="8595360" y="2898648"/>
-            <a:ext cx="3200400" cy="457200"/>
-          </a:xfrm>
-          <a:prstGeom prst="rect">
-            <a:avLst/>
-          </a:prstGeom>
-          <a:noFill/>
-        </p:spPr>
-        <p:txBody>
-          <a:bodyPr wrap="square">
-            <a:spAutoFit/>
-          </a:bodyPr>
-          <a:lstStyle/>
-          <a:p>
-            <a:pPr algn="l"/>
-            <a:r>
-              <a:rPr sz="1000" b="0" i="0">
-                <a:solidFill>
-                  <a:srgbClr val="737373"/>
-                </a:solidFill>
-              </a:rPr>
-              <a:t>higher than Japan (10.7%)</a:t>
-            </a:r>
-          </a:p>
-        </p:txBody>
-      </p:sp>
-      <p:sp>
-        <p:nvSpPr>
-          <p:cNvPr id="10" name="TextBox 9"/>
-          <p:cNvSpPr txBox="1"/>
-          <p:nvPr/>
-        </p:nvSpPr>
-        <p:spPr>
-          <a:xfrm>
-            <a:off x="8595360" y="3611880"/>
-            <a:ext cx="3200400" cy="502920"/>
-          </a:xfrm>
-          <a:prstGeom prst="rect">
-            <a:avLst/>
-          </a:prstGeom>
-          <a:noFill/>
-        </p:spPr>
-        <p:txBody>
-          <a:bodyPr wrap="square">
-            <a:spAutoFit/>
-          </a:bodyPr>
-          <a:lstStyle/>
-          <a:p>
-            <a:pPr algn="l"/>
-            <a:r>
-              <a:rPr sz="2600" b="1" i="0">
-                <a:solidFill>
-                  <a:srgbClr val="D87000"/>
-                </a:solidFill>
-              </a:rPr>
-              <a:t>$1,861</a:t>
-            </a:r>
-          </a:p>
-        </p:txBody>
-      </p:sp>
-      <p:sp>
-        <p:nvSpPr>
-          <p:cNvPr id="11" name="TextBox 10"/>
-          <p:cNvSpPr txBox="1"/>
-          <p:nvPr/>
-        </p:nvSpPr>
-        <p:spPr>
-          <a:xfrm>
-            <a:off x="8595360" y="4133088"/>
-            <a:ext cx="3200400" cy="457200"/>
-          </a:xfrm>
-          <a:prstGeom prst="rect">
-            <a:avLst/>
-          </a:prstGeom>
-          <a:noFill/>
-        </p:spPr>
-        <p:txBody>
-          <a:bodyPr wrap="square">
-            <a:spAutoFit/>
-          </a:bodyPr>
-          <a:lstStyle/>
-          <a:p>
-            <a:pPr algn="l"/>
-            <a:r>
-              <a:rPr sz="1000" b="0" i="0">
-                <a:solidFill>
-                  <a:srgbClr val="737373"/>
-                </a:solidFill>
-              </a:rPr>
-              <a:t>annual per-person</a:t>
-            </a:r>
-          </a:p>
-          <a:p>
-            <a:pPr algn="l"/>
-            <a:r>
-              <a:rPr sz="1000" b="0" i="0">
-                <a:solidFill>
-                  <a:srgbClr val="737373"/>
-                </a:solidFill>
-              </a:rPr>
-              <a:t>cost of obesity in the US</a:t>
-            </a:r>
-          </a:p>
-        </p:txBody>
-      </p:sp>
-      <p:sp>
-        <p:nvSpPr>
-          <p:cNvPr id="12" name="TextBox 11"/>
-          <p:cNvSpPr txBox="1"/>
-          <p:nvPr/>
-        </p:nvSpPr>
-        <p:spPr>
-          <a:xfrm>
-            <a:off x="8595360" y="4846320"/>
-            <a:ext cx="3200400" cy="502920"/>
-          </a:xfrm>
-          <a:prstGeom prst="rect">
-            <a:avLst/>
-          </a:prstGeom>
-          <a:noFill/>
-        </p:spPr>
-        <p:txBody>
-          <a:bodyPr wrap="square">
-            <a:spAutoFit/>
-          </a:bodyPr>
-          <a:lstStyle/>
-          <a:p>
-            <a:pPr algn="l"/>
-            <a:r>
-              <a:rPr sz="2600" b="1" i="0">
-                <a:solidFill>
-                  <a:srgbClr val="D87000"/>
-                </a:solidFill>
-              </a:rPr>
-              <a:t>#1 of 38</a:t>
-            </a:r>
-          </a:p>
-        </p:txBody>
-      </p:sp>
-      <p:sp>
-        <p:nvSpPr>
-          <p:cNvPr id="13" name="TextBox 12"/>
-          <p:cNvSpPr txBox="1"/>
-          <p:nvPr/>
-        </p:nvSpPr>
-        <p:spPr>
-          <a:xfrm>
-            <a:off x="8595360" y="5367528"/>
-            <a:ext cx="3200400" cy="457200"/>
-          </a:xfrm>
-          <a:prstGeom prst="rect">
-            <a:avLst/>
-          </a:prstGeom>
-          <a:noFill/>
-        </p:spPr>
-        <p:txBody>
-          <a:bodyPr wrap="square">
-            <a:spAutoFit/>
-          </a:bodyPr>
-          <a:lstStyle/>
-          <a:p>
-            <a:pPr algn="l"/>
-            <a:r>
-              <a:rPr sz="1000" b="0" i="0">
-                <a:solidFill>
-                  <a:srgbClr val="737373"/>
-                </a:solidFill>
-              </a:rPr>
-              <a:t>OECD ranking for</a:t>
-            </a:r>
-          </a:p>
-          <a:p>
-            <a:pPr algn="l"/>
-            <a:r>
-              <a:rPr sz="1000" b="0" i="0">
-                <a:solidFill>
-                  <a:srgbClr val="737373"/>
-                </a:solidFill>
-              </a:rPr>
-              <a:t>obesity prevalence</a:t>
-            </a:r>
-          </a:p>
-        </p:txBody>
-      </p:sp>
-      <p:sp>
-        <p:nvSpPr>
-          <p:cNvPr id="14" name="TextBox 13"/>
-          <p:cNvSpPr txBox="1"/>
-          <p:nvPr/>
-        </p:nvSpPr>
-        <p:spPr>
-          <a:xfrm>
-            <a:off x="365760" y="6583680"/>
-            <a:ext cx="11430000" cy="237744"/>
-          </a:xfrm>
-          <a:prstGeom prst="rect">
-            <a:avLst/>
-          </a:prstGeom>
-          <a:noFill/>
-        </p:spPr>
-        <p:txBody>
-          <a:bodyPr wrap="square">
-            <a:spAutoFit/>
-          </a:bodyPr>
-          <a:lstStyle/>
-          <a:p>
-            <a:pPr algn="l"/>
-            <a:r>
-              <a:rPr sz="800" b="0" i="1">
-                <a:solidFill>
-                  <a:srgbClr val="737373"/>
-                </a:solidFill>
-              </a:rPr>
-              <a:t>Data: WHO Global Health Observatory, OECD Health Statistics.</a:t>
+              <a:rPr sz="750" b="0" i="1">
+                <a:solidFill>
+                  <a:srgbClr val="9CA3AF"/>
+                </a:solidFill>
+              </a:rPr>
+              <a:t>Source: World Bank WDI (spend per person, PPP, 2022). Price level: OECD, Society at a Glance 2024 / Health at a Glance (OECD avg = 100).</a:t>
             </a:r>
           </a:p>
         </p:txBody>
@@ -5935,8 +5492,8 @@
         </p:nvSpPr>
         <p:spPr>
           <a:xfrm>
-            <a:off x="365760" y="109728"/>
-            <a:ext cx="11430000" cy="502920"/>
+            <a:off x="411480" y="246888"/>
+            <a:ext cx="8229600" cy="292608"/>
           </a:xfrm>
           <a:prstGeom prst="rect">
             <a:avLst/>
@@ -5951,12 +5508,12 @@
           <a:p>
             <a:pPr algn="l"/>
             <a:r>
-              <a:rPr sz="2100" b="1" i="0">
-                <a:solidFill>
-                  <a:srgbClr val="252525"/>
-                </a:solidFill>
-              </a:rPr>
-              <a:t>Factor 2: Education shapes health behaviour — and outcomes</a:t>
+              <a:rPr sz="900" b="1" i="0">
+                <a:solidFill>
+                  <a:srgbClr val="2BA88A"/>
+                </a:solidFill>
+              </a:rPr>
+              <a:t>THE PATTERN</a:t>
             </a:r>
           </a:p>
         </p:txBody>
@@ -5969,8 +5526,8 @@
         </p:nvSpPr>
         <p:spPr>
           <a:xfrm>
-            <a:off x="365760" y="621792"/>
-            <a:ext cx="11430000" cy="292608"/>
+            <a:off x="411480" y="475488"/>
+            <a:ext cx="11247120" cy="914400"/>
           </a:xfrm>
           <a:prstGeom prst="rect">
             <a:avLst/>
@@ -5983,58 +5540,125 @@
           </a:bodyPr>
           <a:lstStyle/>
           <a:p>
-            <a:pPr algn="l"/>
-            <a:r>
-              <a:rPr sz="1100" b="0" i="0">
-                <a:solidFill>
-                  <a:srgbClr val="737373"/>
-                </a:solidFill>
-              </a:rPr>
-              <a:t>Countries where populations have more schooling show better preventive care uptake and lower chronic disease burden</a:t>
-            </a:r>
-          </a:p>
-        </p:txBody>
-      </p:sp>
-      <p:pic>
-        <p:nvPicPr>
-          <p:cNvPr id="4" name="Picture 3" descr="image.png"/>
-          <p:cNvPicPr>
-            <a:picLocks noChangeAspect="1"/>
-          </p:cNvPicPr>
-          <p:nvPr/>
-        </p:nvPicPr>
-        <p:blipFill>
-          <a:blip r:embed="rId2"/>
-          <a:stretch>
-            <a:fillRect/>
-          </a:stretch>
-        </p:blipFill>
-        <p:spPr>
-          <a:xfrm>
-            <a:off x="274320" y="960120"/>
-            <a:ext cx="8046720" cy="5394960"/>
-          </a:xfrm>
-          <a:prstGeom prst="rect">
-            <a:avLst/>
-          </a:prstGeom>
-        </p:spPr>
-      </p:pic>
-      <p:sp>
-        <p:nvSpPr>
-          <p:cNvPr id="5" name="Rectangle 4"/>
+            <a:pPr algn="l">
+              <a:spcBef>
+                <a:spcPts val="0"/>
+              </a:spcBef>
+              <a:spcAft>
+                <a:spcPts val="0"/>
+              </a:spcAft>
+            </a:pPr>
+            <a:r>
+              <a:rPr sz="2700" b="1">
+                <a:solidFill>
+                  <a:srgbClr val="0F1F35"/>
+                </a:solidFill>
+              </a:rPr>
+              <a:t>One country, </a:t>
+            </a:r>
+            <a:r>
+              <a:rPr sz="2700" b="1">
+                <a:solidFill>
+                  <a:srgbClr val="C0392B"/>
+                </a:solidFill>
+              </a:rPr>
+              <a:t>four red flags</a:t>
+            </a:r>
+            <a:r>
+              <a:rPr sz="2700" b="1">
+                <a:solidFill>
+                  <a:srgbClr val="0F1F35"/>
+                </a:solidFill>
+              </a:rPr>
+              <a:t> — and a budget that can’t fix them</a:t>
+            </a:r>
+          </a:p>
+        </p:txBody>
+      </p:sp>
+      <p:sp>
+        <p:nvSpPr>
+          <p:cNvPr id="4" name="TextBox 3"/>
+          <p:cNvSpPr txBox="1"/>
+          <p:nvPr/>
+        </p:nvSpPr>
+        <p:spPr>
+          <a:xfrm>
+            <a:off x="4892040" y="1572768"/>
+            <a:ext cx="2926080" cy="347472"/>
+          </a:xfrm>
+          <a:prstGeom prst="rect">
+            <a:avLst/>
+          </a:prstGeom>
+          <a:noFill/>
+        </p:spPr>
+        <p:txBody>
+          <a:bodyPr wrap="square">
+            <a:spAutoFit/>
+          </a:bodyPr>
+          <a:lstStyle/>
+          <a:p>
+            <a:pPr algn="ctr"/>
+            <a:r>
+              <a:rPr sz="1050" b="1" i="0">
+                <a:solidFill>
+                  <a:srgbClr val="C0392B"/>
+                </a:solidFill>
+              </a:rPr>
+              <a:t>UNITED STATES</a:t>
+            </a:r>
+          </a:p>
+        </p:txBody>
+      </p:sp>
+      <p:sp>
+        <p:nvSpPr>
+          <p:cNvPr id="5" name="TextBox 4"/>
+          <p:cNvSpPr txBox="1"/>
+          <p:nvPr/>
+        </p:nvSpPr>
+        <p:spPr>
+          <a:xfrm>
+            <a:off x="8732520" y="1572768"/>
+            <a:ext cx="2377440" cy="347472"/>
+          </a:xfrm>
+          <a:prstGeom prst="rect">
+            <a:avLst/>
+          </a:prstGeom>
+          <a:noFill/>
+        </p:spPr>
+        <p:txBody>
+          <a:bodyPr wrap="square">
+            <a:spAutoFit/>
+          </a:bodyPr>
+          <a:lstStyle/>
+          <a:p>
+            <a:pPr algn="ctr"/>
+            <a:r>
+              <a:rPr sz="1050" b="1" i="0">
+                <a:solidFill>
+                  <a:srgbClr val="2BA88A"/>
+                </a:solidFill>
+              </a:rPr>
+              <a:t>JAPAN</a:t>
+            </a:r>
+          </a:p>
+        </p:txBody>
+      </p:sp>
+      <p:sp>
+        <p:nvSpPr>
+          <p:cNvPr id="6" name="Rectangle 5"/>
           <p:cNvSpPr/>
           <p:nvPr/>
         </p:nvSpPr>
         <p:spPr>
           <a:xfrm>
-            <a:off x="8458200" y="960120"/>
-            <a:ext cx="3520440" cy="5394960"/>
+            <a:off x="411480" y="1975104"/>
+            <a:ext cx="11338560" cy="20116"/>
           </a:xfrm>
           <a:prstGeom prst="rect">
             <a:avLst/>
           </a:prstGeom>
           <a:solidFill>
-            <a:srgbClr val="F2F2F2"/>
+            <a:srgbClr val="E5E7EB"/>
           </a:solidFill>
           <a:ln>
             <a:noFill/>
@@ -6064,14 +5688,57 @@
       </p:sp>
       <p:sp>
         <p:nvSpPr>
-          <p:cNvPr id="6" name="TextBox 5"/>
+          <p:cNvPr id="7" name="Rectangle 6"/>
+          <p:cNvSpPr/>
+          <p:nvPr/>
+        </p:nvSpPr>
+        <p:spPr>
+          <a:xfrm>
+            <a:off x="365760" y="1993392"/>
+            <a:ext cx="11430000" cy="603504"/>
+          </a:xfrm>
+          <a:prstGeom prst="rect">
+            <a:avLst/>
+          </a:prstGeom>
+          <a:solidFill>
+            <a:srgbClr val="F9FAFB"/>
+          </a:solidFill>
+          <a:ln>
+            <a:noFill/>
+          </a:ln>
+        </p:spPr>
+        <p:style>
+          <a:lnRef idx="1">
+            <a:schemeClr val="accent1"/>
+          </a:lnRef>
+          <a:fillRef idx="3">
+            <a:schemeClr val="accent1"/>
+          </a:fillRef>
+          <a:effectRef idx="2">
+            <a:schemeClr val="accent1"/>
+          </a:effectRef>
+          <a:fontRef idx="minor">
+            <a:schemeClr val="lt1"/>
+          </a:fontRef>
+        </p:style>
+        <p:txBody>
+          <a:bodyPr rtlCol="0" anchor="ctr"/>
+          <a:lstStyle/>
+          <a:p>
+            <a:pPr algn="ctr"/>
+          </a:p>
+        </p:txBody>
+      </p:sp>
+      <p:sp>
+        <p:nvSpPr>
+          <p:cNvPr id="8" name="TextBox 7"/>
           <p:cNvSpPr txBox="1"/>
           <p:nvPr/>
         </p:nvSpPr>
         <p:spPr>
           <a:xfrm>
-            <a:off x="8595360" y="1143000"/>
-            <a:ext cx="3246120" cy="5029200"/>
+            <a:off x="502920" y="2139696"/>
+            <a:ext cx="4023360" cy="347472"/>
           </a:xfrm>
           <a:prstGeom prst="rect">
             <a:avLst/>
@@ -6086,169 +5753,26 @@
           <a:p>
             <a:pPr algn="l"/>
             <a:r>
-              <a:rPr sz="1050" b="0" i="0">
-                <a:solidFill>
-                  <a:srgbClr val="252525"/>
-                </a:solidFill>
-              </a:rPr>
-              <a:t>Health literacy — the ability to</a:t>
-            </a:r>
-          </a:p>
-          <a:p>
-            <a:pPr algn="l"/>
-            <a:r>
-              <a:rPr sz="1050" b="0" i="0">
-                <a:solidFill>
-                  <a:srgbClr val="252525"/>
-                </a:solidFill>
-              </a:rPr>
-              <a:t>understand and act on health</a:t>
-            </a:r>
-          </a:p>
-          <a:p>
-            <a:pPr algn="l"/>
-            <a:r>
-              <a:rPr sz="1050" b="0" i="0">
-                <a:solidFill>
-                  <a:srgbClr val="252525"/>
-                </a:solidFill>
-              </a:rPr>
-              <a:t>information — varies significantly</a:t>
-            </a:r>
-          </a:p>
-          <a:p>
-            <a:pPr algn="l"/>
-            <a:r>
-              <a:rPr sz="1050" b="0" i="0">
-                <a:solidFill>
-                  <a:srgbClr val="252525"/>
-                </a:solidFill>
-              </a:rPr>
-              <a:t>across OECD nations.</a:t>
-            </a:r>
-          </a:p>
-          <a:p>
-            <a:pPr algn="l"/>
-            <a:r>
-              <a:rPr sz="1050" b="0" i="0">
-                <a:solidFill>
-                  <a:srgbClr val="252525"/>
-                </a:solidFill>
-              </a:rPr>
-              <a:t/>
-            </a:r>
-          </a:p>
-          <a:p>
-            <a:pPr algn="l"/>
-            <a:r>
-              <a:rPr sz="1050" b="0" i="0">
-                <a:solidFill>
-                  <a:srgbClr val="252525"/>
-                </a:solidFill>
-              </a:rPr>
-              <a:t>Countries investing in public</a:t>
-            </a:r>
-          </a:p>
-          <a:p>
-            <a:pPr algn="l"/>
-            <a:r>
-              <a:rPr sz="1050" b="0" i="0">
-                <a:solidFill>
-                  <a:srgbClr val="252525"/>
-                </a:solidFill>
-              </a:rPr>
-              <a:t>health education achieve</a:t>
-            </a:r>
-          </a:p>
-          <a:p>
-            <a:pPr algn="l"/>
-            <a:r>
-              <a:rPr sz="1050" b="0" i="0">
-                <a:solidFill>
-                  <a:srgbClr val="252525"/>
-                </a:solidFill>
-              </a:rPr>
-              <a:t>15–25% lower preventable</a:t>
-            </a:r>
-          </a:p>
-          <a:p>
-            <a:pPr algn="l"/>
-            <a:r>
-              <a:rPr sz="1050" b="0" i="0">
-                <a:solidFill>
-                  <a:srgbClr val="252525"/>
-                </a:solidFill>
-              </a:rPr>
-              <a:t>mortality rates (OECD, 2023).</a:t>
-            </a:r>
-          </a:p>
-          <a:p>
-            <a:pPr algn="l"/>
-            <a:r>
-              <a:rPr sz="1050" b="0" i="0">
-                <a:solidFill>
-                  <a:srgbClr val="252525"/>
-                </a:solidFill>
-              </a:rPr>
-              <a:t/>
-            </a:r>
-          </a:p>
-          <a:p>
-            <a:pPr algn="l"/>
-            <a:r>
-              <a:rPr sz="1050" b="0" i="0">
-                <a:solidFill>
-                  <a:srgbClr val="252525"/>
-                </a:solidFill>
-              </a:rPr>
-              <a:t>Japan's school health programme</a:t>
-            </a:r>
-          </a:p>
-          <a:p>
-            <a:pPr algn="l"/>
-            <a:r>
-              <a:rPr sz="1050" b="0" i="0">
-                <a:solidFill>
-                  <a:srgbClr val="252525"/>
-                </a:solidFill>
-              </a:rPr>
-              <a:t>reaches children from age 6,</a:t>
-            </a:r>
-          </a:p>
-          <a:p>
-            <a:pPr algn="l"/>
-            <a:r>
-              <a:rPr sz="1050" b="0" i="0">
-                <a:solidFill>
-                  <a:srgbClr val="252525"/>
-                </a:solidFill>
-              </a:rPr>
-              <a:t>embedding nutrition norms</a:t>
-            </a:r>
-          </a:p>
-          <a:p>
-            <a:pPr algn="l"/>
-            <a:r>
-              <a:rPr sz="1050" b="0" i="0">
-                <a:solidFill>
-                  <a:srgbClr val="252525"/>
-                </a:solidFill>
-              </a:rPr>
-              <a:t>decades before disease risk.</a:t>
-            </a:r>
-          </a:p>
-        </p:txBody>
-      </p:sp>
-      <p:sp>
-        <p:nvSpPr>
-          <p:cNvPr id="7" name="TextBox 6"/>
+              <a:rPr sz="1250" b="0" i="0">
+                <a:solidFill>
+                  <a:srgbClr val="374151"/>
+                </a:solidFill>
+              </a:rPr>
+              <a:t>Avg. life expectancy</a:t>
+            </a:r>
+          </a:p>
+        </p:txBody>
+      </p:sp>
+      <p:sp>
+        <p:nvSpPr>
+          <p:cNvPr id="9" name="TextBox 8"/>
           <p:cNvSpPr txBox="1"/>
           <p:nvPr/>
         </p:nvSpPr>
         <p:spPr>
           <a:xfrm>
-            <a:off x="365760" y="6583680"/>
-            <a:ext cx="11430000" cy="237744"/>
+            <a:off x="4892040" y="2084832"/>
+            <a:ext cx="2926080" cy="438912"/>
           </a:xfrm>
           <a:prstGeom prst="rect">
             <a:avLst/>
@@ -6261,14 +5785,755 @@
           </a:bodyPr>
           <a:lstStyle/>
           <a:p>
+            <a:pPr algn="ctr"/>
+            <a:r>
+              <a:rPr sz="2100" b="1" i="0">
+                <a:solidFill>
+                  <a:srgbClr val="0F1F35"/>
+                </a:solidFill>
+              </a:rPr>
+              <a:t>78 yrs</a:t>
+            </a:r>
+          </a:p>
+        </p:txBody>
+      </p:sp>
+      <p:sp>
+        <p:nvSpPr>
+          <p:cNvPr id="10" name="TextBox 9"/>
+          <p:cNvSpPr txBox="1"/>
+          <p:nvPr/>
+        </p:nvSpPr>
+        <p:spPr>
+          <a:xfrm>
+            <a:off x="8732520" y="2084832"/>
+            <a:ext cx="2377440" cy="438912"/>
+          </a:xfrm>
+          <a:prstGeom prst="rect">
+            <a:avLst/>
+          </a:prstGeom>
+          <a:noFill/>
+        </p:spPr>
+        <p:txBody>
+          <a:bodyPr wrap="square">
+            <a:spAutoFit/>
+          </a:bodyPr>
+          <a:lstStyle/>
+          <a:p>
+            <a:pPr algn="ctr"/>
+            <a:r>
+              <a:rPr sz="2100" b="1" i="0">
+                <a:solidFill>
+                  <a:srgbClr val="2BA88A"/>
+                </a:solidFill>
+              </a:rPr>
+              <a:t>83 yrs</a:t>
+            </a:r>
+          </a:p>
+        </p:txBody>
+      </p:sp>
+      <p:sp>
+        <p:nvSpPr>
+          <p:cNvPr id="11" name="TextBox 10"/>
+          <p:cNvSpPr txBox="1"/>
+          <p:nvPr/>
+        </p:nvSpPr>
+        <p:spPr>
+          <a:xfrm>
+            <a:off x="502920" y="2743200"/>
+            <a:ext cx="4023360" cy="347472"/>
+          </a:xfrm>
+          <a:prstGeom prst="rect">
+            <a:avLst/>
+          </a:prstGeom>
+          <a:noFill/>
+        </p:spPr>
+        <p:txBody>
+          <a:bodyPr wrap="square">
+            <a:spAutoFit/>
+          </a:bodyPr>
+          <a:lstStyle/>
+          <a:p>
             <a:pPr algn="l"/>
             <a:r>
-              <a:rPr sz="800" b="0" i="1">
-                <a:solidFill>
-                  <a:srgbClr val="737373"/>
-                </a:solidFill>
-              </a:rPr>
-              <a:t>Data: UNDP Human Development Index, WHO Global Health Observatory.</a:t>
+              <a:rPr sz="1250" b="0" i="0">
+                <a:solidFill>
+                  <a:srgbClr val="374151"/>
+                </a:solidFill>
+              </a:rPr>
+              <a:t>Health spend / person</a:t>
+            </a:r>
+          </a:p>
+        </p:txBody>
+      </p:sp>
+      <p:sp>
+        <p:nvSpPr>
+          <p:cNvPr id="12" name="TextBox 11"/>
+          <p:cNvSpPr txBox="1"/>
+          <p:nvPr/>
+        </p:nvSpPr>
+        <p:spPr>
+          <a:xfrm>
+            <a:off x="4892040" y="2688336"/>
+            <a:ext cx="2926080" cy="438912"/>
+          </a:xfrm>
+          <a:prstGeom prst="rect">
+            <a:avLst/>
+          </a:prstGeom>
+          <a:noFill/>
+        </p:spPr>
+        <p:txBody>
+          <a:bodyPr wrap="square">
+            <a:spAutoFit/>
+          </a:bodyPr>
+          <a:lstStyle/>
+          <a:p>
+            <a:pPr algn="ctr"/>
+            <a:r>
+              <a:rPr sz="2100" b="1" i="0">
+                <a:solidFill>
+                  <a:srgbClr val="C0392B"/>
+                </a:solidFill>
+              </a:rPr>
+              <a:t>$12,600</a:t>
+            </a:r>
+          </a:p>
+        </p:txBody>
+      </p:sp>
+      <p:sp>
+        <p:nvSpPr>
+          <p:cNvPr id="13" name="TextBox 12"/>
+          <p:cNvSpPr txBox="1"/>
+          <p:nvPr/>
+        </p:nvSpPr>
+        <p:spPr>
+          <a:xfrm>
+            <a:off x="8732520" y="2688336"/>
+            <a:ext cx="2377440" cy="438912"/>
+          </a:xfrm>
+          <a:prstGeom prst="rect">
+            <a:avLst/>
+          </a:prstGeom>
+          <a:noFill/>
+        </p:spPr>
+        <p:txBody>
+          <a:bodyPr wrap="square">
+            <a:spAutoFit/>
+          </a:bodyPr>
+          <a:lstStyle/>
+          <a:p>
+            <a:pPr algn="ctr"/>
+            <a:r>
+              <a:rPr sz="2100" b="1" i="0">
+                <a:solidFill>
+                  <a:srgbClr val="0F1F35"/>
+                </a:solidFill>
+              </a:rPr>
+              <a:t>$5,300</a:t>
+            </a:r>
+          </a:p>
+        </p:txBody>
+      </p:sp>
+      <p:sp>
+        <p:nvSpPr>
+          <p:cNvPr id="14" name="Rectangle 13"/>
+          <p:cNvSpPr/>
+          <p:nvPr/>
+        </p:nvSpPr>
+        <p:spPr>
+          <a:xfrm>
+            <a:off x="365760" y="3200400"/>
+            <a:ext cx="11430000" cy="603504"/>
+          </a:xfrm>
+          <a:prstGeom prst="rect">
+            <a:avLst/>
+          </a:prstGeom>
+          <a:solidFill>
+            <a:srgbClr val="F9FAFB"/>
+          </a:solidFill>
+          <a:ln>
+            <a:noFill/>
+          </a:ln>
+        </p:spPr>
+        <p:style>
+          <a:lnRef idx="1">
+            <a:schemeClr val="accent1"/>
+          </a:lnRef>
+          <a:fillRef idx="3">
+            <a:schemeClr val="accent1"/>
+          </a:fillRef>
+          <a:effectRef idx="2">
+            <a:schemeClr val="accent1"/>
+          </a:effectRef>
+          <a:fontRef idx="minor">
+            <a:schemeClr val="lt1"/>
+          </a:fontRef>
+        </p:style>
+        <p:txBody>
+          <a:bodyPr rtlCol="0" anchor="ctr"/>
+          <a:lstStyle/>
+          <a:p>
+            <a:pPr algn="ctr"/>
+          </a:p>
+        </p:txBody>
+      </p:sp>
+      <p:sp>
+        <p:nvSpPr>
+          <p:cNvPr id="15" name="TextBox 14"/>
+          <p:cNvSpPr txBox="1"/>
+          <p:nvPr/>
+        </p:nvSpPr>
+        <p:spPr>
+          <a:xfrm>
+            <a:off x="502920" y="3346704"/>
+            <a:ext cx="4023360" cy="347472"/>
+          </a:xfrm>
+          <a:prstGeom prst="rect">
+            <a:avLst/>
+          </a:prstGeom>
+          <a:noFill/>
+        </p:spPr>
+        <p:txBody>
+          <a:bodyPr wrap="square">
+            <a:spAutoFit/>
+          </a:bodyPr>
+          <a:lstStyle/>
+          <a:p>
+            <a:pPr algn="l"/>
+            <a:r>
+              <a:rPr sz="1250" b="0" i="0">
+                <a:solidFill>
+                  <a:srgbClr val="374151"/>
+                </a:solidFill>
+              </a:rPr>
+              <a:t>Education — PISA 2022</a:t>
+            </a:r>
+          </a:p>
+        </p:txBody>
+      </p:sp>
+      <p:sp>
+        <p:nvSpPr>
+          <p:cNvPr id="16" name="TextBox 15"/>
+          <p:cNvSpPr txBox="1"/>
+          <p:nvPr/>
+        </p:nvSpPr>
+        <p:spPr>
+          <a:xfrm>
+            <a:off x="4892040" y="3291840"/>
+            <a:ext cx="2926080" cy="438912"/>
+          </a:xfrm>
+          <a:prstGeom prst="rect">
+            <a:avLst/>
+          </a:prstGeom>
+          <a:noFill/>
+        </p:spPr>
+        <p:txBody>
+          <a:bodyPr wrap="square">
+            <a:spAutoFit/>
+          </a:bodyPr>
+          <a:lstStyle/>
+          <a:p>
+            <a:pPr algn="ctr"/>
+            <a:r>
+              <a:rPr sz="2100" b="1" i="0">
+                <a:solidFill>
+                  <a:srgbClr val="0F1F35"/>
+                </a:solidFill>
+              </a:rPr>
+              <a:t>489</a:t>
+            </a:r>
+          </a:p>
+        </p:txBody>
+      </p:sp>
+      <p:sp>
+        <p:nvSpPr>
+          <p:cNvPr id="17" name="TextBox 16"/>
+          <p:cNvSpPr txBox="1"/>
+          <p:nvPr/>
+        </p:nvSpPr>
+        <p:spPr>
+          <a:xfrm>
+            <a:off x="8732520" y="3291840"/>
+            <a:ext cx="2377440" cy="438912"/>
+          </a:xfrm>
+          <a:prstGeom prst="rect">
+            <a:avLst/>
+          </a:prstGeom>
+          <a:noFill/>
+        </p:spPr>
+        <p:txBody>
+          <a:bodyPr wrap="square">
+            <a:spAutoFit/>
+          </a:bodyPr>
+          <a:lstStyle/>
+          <a:p>
+            <a:pPr algn="ctr"/>
+            <a:r>
+              <a:rPr sz="2100" b="1" i="0">
+                <a:solidFill>
+                  <a:srgbClr val="2BA88A"/>
+                </a:solidFill>
+              </a:rPr>
+              <a:t>533</a:t>
+            </a:r>
+          </a:p>
+        </p:txBody>
+      </p:sp>
+      <p:sp>
+        <p:nvSpPr>
+          <p:cNvPr id="18" name="TextBox 17"/>
+          <p:cNvSpPr txBox="1"/>
+          <p:nvPr/>
+        </p:nvSpPr>
+        <p:spPr>
+          <a:xfrm>
+            <a:off x="502920" y="3950208"/>
+            <a:ext cx="4023360" cy="347472"/>
+          </a:xfrm>
+          <a:prstGeom prst="rect">
+            <a:avLst/>
+          </a:prstGeom>
+          <a:noFill/>
+        </p:spPr>
+        <p:txBody>
+          <a:bodyPr wrap="square">
+            <a:spAutoFit/>
+          </a:bodyPr>
+          <a:lstStyle/>
+          <a:p>
+            <a:pPr algn="l"/>
+            <a:r>
+              <a:rPr sz="1250" b="0" i="0">
+                <a:solidFill>
+                  <a:srgbClr val="374151"/>
+                </a:solidFill>
+              </a:rPr>
+              <a:t>Adult obesity</a:t>
+            </a:r>
+          </a:p>
+        </p:txBody>
+      </p:sp>
+      <p:sp>
+        <p:nvSpPr>
+          <p:cNvPr id="19" name="TextBox 18"/>
+          <p:cNvSpPr txBox="1"/>
+          <p:nvPr/>
+        </p:nvSpPr>
+        <p:spPr>
+          <a:xfrm>
+            <a:off x="4892040" y="3895344"/>
+            <a:ext cx="2926080" cy="438912"/>
+          </a:xfrm>
+          <a:prstGeom prst="rect">
+            <a:avLst/>
+          </a:prstGeom>
+          <a:noFill/>
+        </p:spPr>
+        <p:txBody>
+          <a:bodyPr wrap="square">
+            <a:spAutoFit/>
+          </a:bodyPr>
+          <a:lstStyle/>
+          <a:p>
+            <a:pPr algn="ctr"/>
+            <a:r>
+              <a:rPr sz="2100" b="1" i="0">
+                <a:solidFill>
+                  <a:srgbClr val="C0392B"/>
+                </a:solidFill>
+              </a:rPr>
+              <a:t>42.9%</a:t>
+            </a:r>
+          </a:p>
+        </p:txBody>
+      </p:sp>
+      <p:sp>
+        <p:nvSpPr>
+          <p:cNvPr id="20" name="TextBox 19"/>
+          <p:cNvSpPr txBox="1"/>
+          <p:nvPr/>
+        </p:nvSpPr>
+        <p:spPr>
+          <a:xfrm>
+            <a:off x="8732520" y="3895344"/>
+            <a:ext cx="2377440" cy="438912"/>
+          </a:xfrm>
+          <a:prstGeom prst="rect">
+            <a:avLst/>
+          </a:prstGeom>
+          <a:noFill/>
+        </p:spPr>
+        <p:txBody>
+          <a:bodyPr wrap="square">
+            <a:spAutoFit/>
+          </a:bodyPr>
+          <a:lstStyle/>
+          <a:p>
+            <a:pPr algn="ctr"/>
+            <a:r>
+              <a:rPr sz="2100" b="1" i="0">
+                <a:solidFill>
+                  <a:srgbClr val="0F1F35"/>
+                </a:solidFill>
+              </a:rPr>
+              <a:t>4.9%</a:t>
+            </a:r>
+          </a:p>
+        </p:txBody>
+      </p:sp>
+      <p:sp>
+        <p:nvSpPr>
+          <p:cNvPr id="21" name="Rectangle 20"/>
+          <p:cNvSpPr/>
+          <p:nvPr/>
+        </p:nvSpPr>
+        <p:spPr>
+          <a:xfrm>
+            <a:off x="365760" y="4407408"/>
+            <a:ext cx="11430000" cy="603504"/>
+          </a:xfrm>
+          <a:prstGeom prst="rect">
+            <a:avLst/>
+          </a:prstGeom>
+          <a:solidFill>
+            <a:srgbClr val="F9FAFB"/>
+          </a:solidFill>
+          <a:ln>
+            <a:noFill/>
+          </a:ln>
+        </p:spPr>
+        <p:style>
+          <a:lnRef idx="1">
+            <a:schemeClr val="accent1"/>
+          </a:lnRef>
+          <a:fillRef idx="3">
+            <a:schemeClr val="accent1"/>
+          </a:fillRef>
+          <a:effectRef idx="2">
+            <a:schemeClr val="accent1"/>
+          </a:effectRef>
+          <a:fontRef idx="minor">
+            <a:schemeClr val="lt1"/>
+          </a:fontRef>
+        </p:style>
+        <p:txBody>
+          <a:bodyPr rtlCol="0" anchor="ctr"/>
+          <a:lstStyle/>
+          <a:p>
+            <a:pPr algn="ctr"/>
+          </a:p>
+        </p:txBody>
+      </p:sp>
+      <p:sp>
+        <p:nvSpPr>
+          <p:cNvPr id="22" name="TextBox 21"/>
+          <p:cNvSpPr txBox="1"/>
+          <p:nvPr/>
+        </p:nvSpPr>
+        <p:spPr>
+          <a:xfrm>
+            <a:off x="502920" y="4553712"/>
+            <a:ext cx="4023360" cy="347472"/>
+          </a:xfrm>
+          <a:prstGeom prst="rect">
+            <a:avLst/>
+          </a:prstGeom>
+          <a:noFill/>
+        </p:spPr>
+        <p:txBody>
+          <a:bodyPr wrap="square">
+            <a:spAutoFit/>
+          </a:bodyPr>
+          <a:lstStyle/>
+          <a:p>
+            <a:pPr algn="l"/>
+            <a:r>
+              <a:rPr sz="1250" b="0" i="0">
+                <a:solidFill>
+                  <a:srgbClr val="374151"/>
+                </a:solidFill>
+              </a:rPr>
+              <a:t>Population aged 65+</a:t>
+            </a:r>
+          </a:p>
+        </p:txBody>
+      </p:sp>
+      <p:sp>
+        <p:nvSpPr>
+          <p:cNvPr id="23" name="TextBox 22"/>
+          <p:cNvSpPr txBox="1"/>
+          <p:nvPr/>
+        </p:nvSpPr>
+        <p:spPr>
+          <a:xfrm>
+            <a:off x="4892040" y="4498848"/>
+            <a:ext cx="2926080" cy="438912"/>
+          </a:xfrm>
+          <a:prstGeom prst="rect">
+            <a:avLst/>
+          </a:prstGeom>
+          <a:noFill/>
+        </p:spPr>
+        <p:txBody>
+          <a:bodyPr wrap="square">
+            <a:spAutoFit/>
+          </a:bodyPr>
+          <a:lstStyle/>
+          <a:p>
+            <a:pPr algn="ctr"/>
+            <a:r>
+              <a:rPr sz="2100" b="1" i="0">
+                <a:solidFill>
+                  <a:srgbClr val="0F1F35"/>
+                </a:solidFill>
+              </a:rPr>
+              <a:t>17.9%</a:t>
+            </a:r>
+          </a:p>
+        </p:txBody>
+      </p:sp>
+      <p:sp>
+        <p:nvSpPr>
+          <p:cNvPr id="24" name="TextBox 23"/>
+          <p:cNvSpPr txBox="1"/>
+          <p:nvPr/>
+        </p:nvSpPr>
+        <p:spPr>
+          <a:xfrm>
+            <a:off x="8732520" y="4498848"/>
+            <a:ext cx="2377440" cy="438912"/>
+          </a:xfrm>
+          <a:prstGeom prst="rect">
+            <a:avLst/>
+          </a:prstGeom>
+          <a:noFill/>
+        </p:spPr>
+        <p:txBody>
+          <a:bodyPr wrap="square">
+            <a:spAutoFit/>
+          </a:bodyPr>
+          <a:lstStyle/>
+          <a:p>
+            <a:pPr algn="ctr"/>
+            <a:r>
+              <a:rPr sz="2100" b="1" i="0">
+                <a:solidFill>
+                  <a:srgbClr val="0F1F35"/>
+                </a:solidFill>
+              </a:rPr>
+              <a:t>29.8%</a:t>
+            </a:r>
+          </a:p>
+        </p:txBody>
+      </p:sp>
+      <p:sp>
+        <p:nvSpPr>
+          <p:cNvPr id="25" name="TextBox 24"/>
+          <p:cNvSpPr txBox="1"/>
+          <p:nvPr/>
+        </p:nvSpPr>
+        <p:spPr>
+          <a:xfrm>
+            <a:off x="502920" y="5157216"/>
+            <a:ext cx="4023360" cy="347472"/>
+          </a:xfrm>
+          <a:prstGeom prst="rect">
+            <a:avLst/>
+          </a:prstGeom>
+          <a:noFill/>
+        </p:spPr>
+        <p:txBody>
+          <a:bodyPr wrap="square">
+            <a:spAutoFit/>
+          </a:bodyPr>
+          <a:lstStyle/>
+          <a:p>
+            <a:pPr algn="l"/>
+            <a:r>
+              <a:rPr sz="1250" b="0" i="0">
+                <a:solidFill>
+                  <a:srgbClr val="374151"/>
+                </a:solidFill>
+              </a:rPr>
+              <a:t>Medical price level</a:t>
+            </a:r>
+          </a:p>
+        </p:txBody>
+      </p:sp>
+      <p:sp>
+        <p:nvSpPr>
+          <p:cNvPr id="26" name="TextBox 25"/>
+          <p:cNvSpPr txBox="1"/>
+          <p:nvPr/>
+        </p:nvSpPr>
+        <p:spPr>
+          <a:xfrm>
+            <a:off x="4892040" y="5102352"/>
+            <a:ext cx="2926080" cy="438912"/>
+          </a:xfrm>
+          <a:prstGeom prst="rect">
+            <a:avLst/>
+          </a:prstGeom>
+          <a:noFill/>
+        </p:spPr>
+        <p:txBody>
+          <a:bodyPr wrap="square">
+            <a:spAutoFit/>
+          </a:bodyPr>
+          <a:lstStyle/>
+          <a:p>
+            <a:pPr algn="ctr"/>
+            <a:r>
+              <a:rPr sz="2100" b="1" i="0">
+                <a:solidFill>
+                  <a:srgbClr val="C0392B"/>
+                </a:solidFill>
+              </a:rPr>
+              <a:t>143</a:t>
+            </a:r>
+          </a:p>
+        </p:txBody>
+      </p:sp>
+      <p:sp>
+        <p:nvSpPr>
+          <p:cNvPr id="27" name="TextBox 26"/>
+          <p:cNvSpPr txBox="1"/>
+          <p:nvPr/>
+        </p:nvSpPr>
+        <p:spPr>
+          <a:xfrm>
+            <a:off x="8732520" y="5102352"/>
+            <a:ext cx="2377440" cy="438912"/>
+          </a:xfrm>
+          <a:prstGeom prst="rect">
+            <a:avLst/>
+          </a:prstGeom>
+          <a:noFill/>
+        </p:spPr>
+        <p:txBody>
+          <a:bodyPr wrap="square">
+            <a:spAutoFit/>
+          </a:bodyPr>
+          <a:lstStyle/>
+          <a:p>
+            <a:pPr algn="ctr"/>
+            <a:r>
+              <a:rPr sz="2100" b="1" i="0">
+                <a:solidFill>
+                  <a:srgbClr val="0F1F35"/>
+                </a:solidFill>
+              </a:rPr>
+              <a:t>≈100</a:t>
+            </a:r>
+          </a:p>
+        </p:txBody>
+      </p:sp>
+      <p:sp>
+        <p:nvSpPr>
+          <p:cNvPr id="28" name="Rectangle 27"/>
+          <p:cNvSpPr/>
+          <p:nvPr/>
+        </p:nvSpPr>
+        <p:spPr>
+          <a:xfrm>
+            <a:off x="411480" y="6035040"/>
+            <a:ext cx="11338560" cy="20116"/>
+          </a:xfrm>
+          <a:prstGeom prst="rect">
+            <a:avLst/>
+          </a:prstGeom>
+          <a:solidFill>
+            <a:srgbClr val="E5E7EB"/>
+          </a:solidFill>
+          <a:ln>
+            <a:noFill/>
+          </a:ln>
+        </p:spPr>
+        <p:style>
+          <a:lnRef idx="1">
+            <a:schemeClr val="accent1"/>
+          </a:lnRef>
+          <a:fillRef idx="3">
+            <a:schemeClr val="accent1"/>
+          </a:fillRef>
+          <a:effectRef idx="2">
+            <a:schemeClr val="accent1"/>
+          </a:effectRef>
+          <a:fontRef idx="minor">
+            <a:schemeClr val="lt1"/>
+          </a:fontRef>
+        </p:style>
+        <p:txBody>
+          <a:bodyPr rtlCol="0" anchor="ctr"/>
+          <a:lstStyle/>
+          <a:p>
+            <a:pPr algn="ctr"/>
+          </a:p>
+        </p:txBody>
+      </p:sp>
+      <p:sp>
+        <p:nvSpPr>
+          <p:cNvPr id="29" name="TextBox 28"/>
+          <p:cNvSpPr txBox="1"/>
+          <p:nvPr/>
+        </p:nvSpPr>
+        <p:spPr>
+          <a:xfrm>
+            <a:off x="502920" y="6108192"/>
+            <a:ext cx="11155680" cy="475488"/>
+          </a:xfrm>
+          <a:prstGeom prst="rect">
+            <a:avLst/>
+          </a:prstGeom>
+          <a:noFill/>
+        </p:spPr>
+        <p:txBody>
+          <a:bodyPr wrap="square">
+            <a:spAutoFit/>
+          </a:bodyPr>
+          <a:lstStyle/>
+          <a:p>
+            <a:pPr algn="l"/>
+            <a:r>
+              <a:rPr sz="1200" b="1" i="0">
+                <a:solidFill>
+                  <a:srgbClr val="0F1F35"/>
+                </a:solidFill>
+              </a:rPr>
+              <a:t>The U.S. leads only where leading hurts — spending and prices — and trails on the upstream factors that actually make lives longer.</a:t>
+            </a:r>
+          </a:p>
+        </p:txBody>
+      </p:sp>
+      <p:sp>
+        <p:nvSpPr>
+          <p:cNvPr id="30" name="TextBox 29"/>
+          <p:cNvSpPr txBox="1"/>
+          <p:nvPr/>
+        </p:nvSpPr>
+        <p:spPr>
+          <a:xfrm>
+            <a:off x="411480" y="6556248"/>
+            <a:ext cx="11338560" cy="256032"/>
+          </a:xfrm>
+          <a:prstGeom prst="rect">
+            <a:avLst/>
+          </a:prstGeom>
+          <a:noFill/>
+        </p:spPr>
+        <p:txBody>
+          <a:bodyPr wrap="square">
+            <a:spAutoFit/>
+          </a:bodyPr>
+          <a:lstStyle/>
+          <a:p>
+            <a:pPr algn="l"/>
+            <a:r>
+              <a:rPr sz="750" b="0" i="1">
+                <a:solidFill>
+                  <a:srgbClr val="9CA3AF"/>
+                </a:solidFill>
+              </a:rPr>
+              <a:t>Sources: World Bank WDI; OECD PISA 2022; WHO GHO 2022; UN/World Bank 2024; OECD price levels. Figures rounded.</a:t>
             </a:r>
           </a:p>
         </p:txBody>
@@ -6287,7 +6552,7 @@
     <p:bg>
       <p:bgPr>
         <a:solidFill>
-          <a:srgbClr val="FFFFFF"/>
+          <a:srgbClr val="1B2A45"/>
         </a:solidFill>
         <a:effectLst/>
       </p:bgPr>
@@ -6307,8 +6572,8 @@
         </p:nvSpPr>
         <p:spPr>
           <a:xfrm>
-            <a:off x="365760" y="109728"/>
-            <a:ext cx="11430000" cy="502920"/>
+            <a:off x="411480" y="292608"/>
+            <a:ext cx="3657600" cy="292608"/>
           </a:xfrm>
           <a:prstGeom prst="rect">
             <a:avLst/>
@@ -6323,12 +6588,12 @@
           <a:p>
             <a:pPr algn="l"/>
             <a:r>
-              <a:rPr sz="2100" b="1" i="0">
-                <a:solidFill>
-                  <a:srgbClr val="252525"/>
-                </a:solidFill>
-              </a:rPr>
-              <a:t>Factor 3: The US gets the fewest life-years per dollar of any peer nation</a:t>
+              <a:rPr sz="900" b="1" i="0">
+                <a:solidFill>
+                  <a:srgbClr val="94A3B8"/>
+                </a:solidFill>
+              </a:rPr>
+              <a:t>THE TAKEAWAY</a:t>
             </a:r>
           </a:p>
         </p:txBody>
@@ -6341,8 +6606,8 @@
         </p:nvSpPr>
         <p:spPr>
           <a:xfrm>
-            <a:off x="365760" y="621792"/>
-            <a:ext cx="11430000" cy="292608"/>
+            <a:off x="411480" y="749808"/>
+            <a:ext cx="11247120" cy="1965960"/>
           </a:xfrm>
           <a:prstGeom prst="rect">
             <a:avLst/>
@@ -6355,186 +6620,83 @@
           </a:bodyPr>
           <a:lstStyle/>
           <a:p>
-            <a:pPr algn="l"/>
-            <a:r>
-              <a:rPr sz="1100" b="0" i="0">
-                <a:solidFill>
-                  <a:srgbClr val="737373"/>
-                </a:solidFill>
-              </a:rPr>
-              <a:t>Life expectancy years per $1,000 spent — a simple metric of what each country buys with its health investment</a:t>
-            </a:r>
-          </a:p>
-        </p:txBody>
-      </p:sp>
-      <p:pic>
-        <p:nvPicPr>
-          <p:cNvPr id="4" name="Picture 3" descr="image.png"/>
-          <p:cNvPicPr>
-            <a:picLocks noChangeAspect="1"/>
-          </p:cNvPicPr>
-          <p:nvPr/>
-        </p:nvPicPr>
-        <p:blipFill>
-          <a:blip r:embed="rId2"/>
-          <a:stretch>
-            <a:fillRect/>
-          </a:stretch>
-        </p:blipFill>
-        <p:spPr>
-          <a:xfrm>
-            <a:off x="274320" y="960120"/>
-            <a:ext cx="11612880" cy="5623560"/>
-          </a:xfrm>
-          <a:prstGeom prst="rect">
-            <a:avLst/>
-          </a:prstGeom>
-        </p:spPr>
-      </p:pic>
-      <p:sp>
-        <p:nvSpPr>
-          <p:cNvPr id="5" name="TextBox 4"/>
-          <p:cNvSpPr txBox="1"/>
-          <p:nvPr/>
-        </p:nvSpPr>
-        <p:spPr>
-          <a:xfrm>
-            <a:off x="365760" y="6583680"/>
-            <a:ext cx="11430000" cy="237744"/>
-          </a:xfrm>
-          <a:prstGeom prst="rect">
-            <a:avLst/>
-          </a:prstGeom>
-          <a:noFill/>
-        </p:spPr>
-        <p:txBody>
-          <a:bodyPr wrap="square">
-            <a:spAutoFit/>
-          </a:bodyPr>
-          <a:lstStyle/>
-          <a:p>
-            <a:pPr algn="l"/>
-            <a:r>
-              <a:rPr sz="800" b="0" i="1">
-                <a:solidFill>
-                  <a:srgbClr val="737373"/>
-                </a:solidFill>
-              </a:rPr>
-              <a:t>Data: World Bank World Development Indicators. Efficiency = Life Expectancy ÷ (Health Expenditure per capita / 1,000).</a:t>
-            </a:r>
-          </a:p>
-        </p:txBody>
-      </p:sp>
-    </p:spTree>
-  </p:cSld>
-  <p:clrMapOvr>
-    <a:masterClrMapping/>
-  </p:clrMapOvr>
-</p:sld>
-</file>
-
-<file path=ppt/slides/slide9.xml><?xml version="1.0" encoding="utf-8"?>
-<p:sld xmlns:a="http://schemas.openxmlformats.org/drawingml/2006/main" xmlns:p="http://schemas.openxmlformats.org/presentationml/2006/main" xmlns:r="http://schemas.openxmlformats.org/officeDocument/2006/relationships">
-  <p:cSld>
-    <p:bg>
-      <p:bgPr>
-        <a:solidFill>
-          <a:srgbClr val="FFFFFF"/>
-        </a:solidFill>
-        <a:effectLst/>
-      </p:bgPr>
-    </p:bg>
-    <p:spTree>
-      <p:nvGrpSpPr>
-        <p:cNvPr id="1" name=""/>
-        <p:cNvGrpSpPr/>
-        <p:nvPr/>
-      </p:nvGrpSpPr>
-      <p:grpSpPr/>
-      <p:sp>
-        <p:nvSpPr>
-          <p:cNvPr id="2" name="TextBox 1"/>
-          <p:cNvSpPr txBox="1"/>
-          <p:nvPr/>
-        </p:nvSpPr>
-        <p:spPr>
-          <a:xfrm>
-            <a:off x="365760" y="109728"/>
-            <a:ext cx="11430000" cy="502920"/>
-          </a:xfrm>
-          <a:prstGeom prst="rect">
-            <a:avLst/>
-          </a:prstGeom>
-          <a:noFill/>
-        </p:spPr>
-        <p:txBody>
-          <a:bodyPr wrap="square">
-            <a:spAutoFit/>
-          </a:bodyPr>
-          <a:lstStyle/>
-          <a:p>
-            <a:pPr algn="l"/>
-            <a:r>
-              <a:rPr sz="2100" b="1" i="0">
-                <a:solidFill>
-                  <a:srgbClr val="252525"/>
-                </a:solidFill>
-              </a:rPr>
-              <a:t>High-performing systems share three upstream investments</a:t>
-            </a:r>
-          </a:p>
-        </p:txBody>
-      </p:sp>
-      <p:sp>
-        <p:nvSpPr>
-          <p:cNvPr id="3" name="TextBox 2"/>
-          <p:cNvSpPr txBox="1"/>
-          <p:nvPr/>
-        </p:nvSpPr>
-        <p:spPr>
-          <a:xfrm>
-            <a:off x="365760" y="621792"/>
-            <a:ext cx="11430000" cy="320040"/>
-          </a:xfrm>
-          <a:prstGeom prst="rect">
-            <a:avLst/>
-          </a:prstGeom>
-          <a:noFill/>
-        </p:spPr>
-        <p:txBody>
-          <a:bodyPr wrap="square">
-            <a:spAutoFit/>
-          </a:bodyPr>
-          <a:lstStyle/>
-          <a:p>
-            <a:pPr algn="l"/>
-            <a:r>
-              <a:rPr sz="1100" b="0" i="0">
-                <a:solidFill>
-                  <a:srgbClr val="737373"/>
-                </a:solidFill>
-              </a:rPr>
-              <a:t>The common thread among Japan, Spain, Italy, and France is not their hospital budgets — it's what happens before the hospital</a:t>
-            </a:r>
-          </a:p>
-        </p:txBody>
-      </p:sp>
-      <p:sp>
-        <p:nvSpPr>
-          <p:cNvPr id="4" name="Rectangle 3"/>
+            <a:pPr algn="l">
+              <a:spcBef>
+                <a:spcPts val="0"/>
+              </a:spcBef>
+              <a:spcAft>
+                <a:spcPts val="0"/>
+              </a:spcAft>
+            </a:pPr>
+            <a:r>
+              <a:rPr sz="4400" b="1">
+                <a:solidFill>
+                  <a:srgbClr val="FFFFFF"/>
+                </a:solidFill>
+              </a:rPr>
+              <a:t>Stop asking </a:t>
+            </a:r>
+            <a:r>
+              <a:rPr sz="4400" b="1">
+                <a:solidFill>
+                  <a:srgbClr val="5D7A8F"/>
+                </a:solidFill>
+              </a:rPr>
+              <a:t>how much</a:t>
+            </a:r>
+            <a:r>
+              <a:rPr sz="4400" b="1">
+                <a:solidFill>
+                  <a:srgbClr val="FFFFFF"/>
+                </a:solidFill>
+              </a:rPr>
+              <a:t> to spend.</a:t>
+            </a:r>
+          </a:p>
+          <a:p>
+            <a:pPr algn="l">
+              <a:spcBef>
+                <a:spcPts val="0"/>
+              </a:spcBef>
+              <a:spcAft>
+                <a:spcPts val="0"/>
+              </a:spcAft>
+            </a:pPr>
+            <a:r>
+              <a:rPr sz="4400" b="1">
+                <a:solidFill>
+                  <a:srgbClr val="FFFFFF"/>
+                </a:solidFill>
+              </a:rPr>
+              <a:t>Fix what the money </a:t>
+            </a:r>
+            <a:r>
+              <a:rPr sz="4400" b="1">
+                <a:solidFill>
+                  <a:srgbClr val="2BA88A"/>
+                </a:solidFill>
+              </a:rPr>
+              <a:t>sits on.</a:t>
+            </a:r>
+          </a:p>
+        </p:txBody>
+      </p:sp>
+      <p:sp>
+        <p:nvSpPr>
+          <p:cNvPr id="4" name="Oval 3"/>
           <p:cNvSpPr/>
           <p:nvPr/>
         </p:nvSpPr>
         <p:spPr>
           <a:xfrm>
-            <a:off x="365760" y="1115568"/>
-            <a:ext cx="3566160" cy="548640"/>
-          </a:xfrm>
-          <a:prstGeom prst="rect">
+            <a:off x="411480" y="2926080"/>
+            <a:ext cx="420624" cy="420624"/>
+          </a:xfrm>
+          <a:prstGeom prst="ellipse">
             <a:avLst/>
           </a:prstGeom>
           <a:solidFill>
-            <a:srgbClr val="004578"/>
+            <a:srgbClr val="C0392B"/>
           </a:solidFill>
           <a:ln>
             <a:noFill/>
@@ -6559,6 +6721,14 @@
           <a:lstStyle/>
           <a:p>
             <a:pPr algn="ctr"/>
+            <a:r>
+              <a:rPr sz="1400" b="1">
+                <a:solidFill>
+                  <a:srgbClr val="FFFFFF"/>
+                </a:solidFill>
+              </a:rPr>
+              <a:t>1</a:t>
+            </a:r>
           </a:p>
         </p:txBody>
       </p:sp>
@@ -6570,8 +6740,8 @@
         </p:nvSpPr>
         <p:spPr>
           <a:xfrm>
-            <a:off x="420624" y="1207008"/>
-            <a:ext cx="3474720" cy="438912"/>
+            <a:off x="1005840" y="2926080"/>
+            <a:ext cx="10789920" cy="402336"/>
           </a:xfrm>
           <a:prstGeom prst="rect">
             <a:avLst/>
@@ -6586,32 +6756,66 @@
           <a:p>
             <a:pPr algn="l"/>
             <a:r>
-              <a:rPr sz="1100" b="1" i="0">
+              <a:rPr sz="1500" b="1" i="0">
                 <a:solidFill>
                   <a:srgbClr val="FFFFFF"/>
                 </a:solidFill>
               </a:rPr>
-              <a:t>Metric</a:t>
-            </a:r>
-          </a:p>
-        </p:txBody>
-      </p:sp>
-      <p:sp>
-        <p:nvSpPr>
-          <p:cNvPr id="6" name="Rectangle 5"/>
+              <a:t>Measure outcomes per dollar, not dollars.</a:t>
+            </a:r>
+          </a:p>
+        </p:txBody>
+      </p:sp>
+      <p:sp>
+        <p:nvSpPr>
+          <p:cNvPr id="6" name="TextBox 5"/>
+          <p:cNvSpPr txBox="1"/>
+          <p:nvPr/>
+        </p:nvSpPr>
+        <p:spPr>
+          <a:xfrm>
+            <a:off x="1005840" y="3346704"/>
+            <a:ext cx="10789920" cy="694944"/>
+          </a:xfrm>
+          <a:prstGeom prst="rect">
+            <a:avLst/>
+          </a:prstGeom>
+          <a:noFill/>
+        </p:spPr>
+        <p:txBody>
+          <a:bodyPr wrap="square">
+            <a:spAutoFit/>
+          </a:bodyPr>
+          <a:lstStyle/>
+          <a:p>
+            <a:pPr algn="l"/>
+            <a:r>
+              <a:rPr sz="1150" b="0" i="0">
+                <a:solidFill>
+                  <a:srgbClr val="94A3B8"/>
+                </a:solidFill>
+              </a:rPr>
+              <a:t>Benchmark health systems on life expectancy gained per dollar — the metric on which the U.S. ranks last among peers.</a:t>
+            </a:r>
+          </a:p>
+        </p:txBody>
+      </p:sp>
+      <p:sp>
+        <p:nvSpPr>
+          <p:cNvPr id="7" name="Oval 6"/>
           <p:cNvSpPr/>
           <p:nvPr/>
         </p:nvSpPr>
         <p:spPr>
           <a:xfrm>
-            <a:off x="4023360" y="1115568"/>
-            <a:ext cx="1828800" cy="548640"/>
-          </a:xfrm>
-          <a:prstGeom prst="rect">
+            <a:off x="411480" y="4114800"/>
+            <a:ext cx="420624" cy="420624"/>
+          </a:xfrm>
+          <a:prstGeom prst="ellipse">
             <a:avLst/>
           </a:prstGeom>
           <a:solidFill>
-            <a:srgbClr val="004578"/>
+            <a:srgbClr val="C0392B"/>
           </a:solidFill>
           <a:ln>
             <a:noFill/>
@@ -6636,19 +6840,27 @@
           <a:lstStyle/>
           <a:p>
             <a:pPr algn="ctr"/>
-          </a:p>
-        </p:txBody>
-      </p:sp>
-      <p:sp>
-        <p:nvSpPr>
-          <p:cNvPr id="7" name="TextBox 6"/>
+            <a:r>
+              <a:rPr sz="1400" b="1">
+                <a:solidFill>
+                  <a:srgbClr val="FFFFFF"/>
+                </a:solidFill>
+              </a:rPr>
+              <a:t>2</a:t>
+            </a:r>
+          </a:p>
+        </p:txBody>
+      </p:sp>
+      <p:sp>
+        <p:nvSpPr>
+          <p:cNvPr id="8" name="TextBox 7"/>
           <p:cNvSpPr txBox="1"/>
           <p:nvPr/>
         </p:nvSpPr>
         <p:spPr>
           <a:xfrm>
-            <a:off x="4078224" y="1207008"/>
-            <a:ext cx="1737360" cy="438912"/>
+            <a:off x="1005840" y="4114800"/>
+            <a:ext cx="10789920" cy="402336"/>
           </a:xfrm>
           <a:prstGeom prst="rect">
             <a:avLst/>
@@ -6663,32 +6875,66 @@
           <a:p>
             <a:pPr algn="l"/>
             <a:r>
-              <a:rPr sz="1100" b="1" i="0">
+              <a:rPr sz="1500" b="1" i="0">
                 <a:solidFill>
                   <a:srgbClr val="FFFFFF"/>
                 </a:solidFill>
               </a:rPr>
-              <a:t>United States</a:t>
-            </a:r>
-          </a:p>
-        </p:txBody>
-      </p:sp>
-      <p:sp>
-        <p:nvSpPr>
-          <p:cNvPr id="8" name="Rectangle 7"/>
+              <a:t>Move marginal dollars upstream.</a:t>
+            </a:r>
+          </a:p>
+        </p:txBody>
+      </p:sp>
+      <p:sp>
+        <p:nvSpPr>
+          <p:cNvPr id="9" name="TextBox 8"/>
+          <p:cNvSpPr txBox="1"/>
+          <p:nvPr/>
+        </p:nvSpPr>
+        <p:spPr>
+          <a:xfrm>
+            <a:off x="1005840" y="4535424"/>
+            <a:ext cx="10789920" cy="694944"/>
+          </a:xfrm>
+          <a:prstGeom prst="rect">
+            <a:avLst/>
+          </a:prstGeom>
+          <a:noFill/>
+        </p:spPr>
+        <p:txBody>
+          <a:bodyPr wrap="square">
+            <a:spAutoFit/>
+          </a:bodyPr>
+          <a:lstStyle/>
+          <a:p>
+            <a:pPr algn="l"/>
+            <a:r>
+              <a:rPr sz="1150" b="0" i="0">
+                <a:solidFill>
+                  <a:srgbClr val="94A3B8"/>
+                </a:solidFill>
+              </a:rPr>
+              <a:t>Shift spending toward obesity prevention and education equity — the levers where Japan and Spain win on far smaller budgets.</a:t>
+            </a:r>
+          </a:p>
+        </p:txBody>
+      </p:sp>
+      <p:sp>
+        <p:nvSpPr>
+          <p:cNvPr id="10" name="Oval 9"/>
           <p:cNvSpPr/>
           <p:nvPr/>
         </p:nvSpPr>
         <p:spPr>
           <a:xfrm>
-            <a:off x="5943600" y="1115568"/>
-            <a:ext cx="2560320" cy="548640"/>
-          </a:xfrm>
-          <a:prstGeom prst="rect">
+            <a:off x="411480" y="5303520"/>
+            <a:ext cx="420624" cy="420624"/>
+          </a:xfrm>
+          <a:prstGeom prst="ellipse">
             <a:avLst/>
           </a:prstGeom>
           <a:solidFill>
-            <a:srgbClr val="004578"/>
+            <a:srgbClr val="C0392B"/>
           </a:solidFill>
           <a:ln>
             <a:noFill/>
@@ -6713,19 +6959,27 @@
           <a:lstStyle/>
           <a:p>
             <a:pPr algn="ctr"/>
-          </a:p>
-        </p:txBody>
-      </p:sp>
-      <p:sp>
-        <p:nvSpPr>
-          <p:cNvPr id="9" name="TextBox 8"/>
+            <a:r>
+              <a:rPr sz="1400" b="1">
+                <a:solidFill>
+                  <a:srgbClr val="FFFFFF"/>
+                </a:solidFill>
+              </a:rPr>
+              <a:t>3</a:t>
+            </a:r>
+          </a:p>
+        </p:txBody>
+      </p:sp>
+      <p:sp>
+        <p:nvSpPr>
+          <p:cNvPr id="11" name="TextBox 10"/>
           <p:cNvSpPr txBox="1"/>
           <p:nvPr/>
         </p:nvSpPr>
         <p:spPr>
           <a:xfrm>
-            <a:off x="5998464" y="1207008"/>
-            <a:ext cx="2468880" cy="438912"/>
+            <a:off x="1005840" y="5303520"/>
+            <a:ext cx="10789920" cy="402336"/>
           </a:xfrm>
           <a:prstGeom prst="rect">
             <a:avLst/>
@@ -6740,69 +6994,26 @@
           <a:p>
             <a:pPr algn="l"/>
             <a:r>
-              <a:rPr sz="1100" b="1" i="0">
+              <a:rPr sz="1500" b="1" i="0">
                 <a:solidFill>
                   <a:srgbClr val="FFFFFF"/>
                 </a:solidFill>
               </a:rPr>
-              <a:t>Japan / Spain</a:t>
-            </a:r>
-          </a:p>
-        </p:txBody>
-      </p:sp>
-      <p:sp>
-        <p:nvSpPr>
-          <p:cNvPr id="10" name="Rectangle 9"/>
-          <p:cNvSpPr/>
-          <p:nvPr/>
-        </p:nvSpPr>
-        <p:spPr>
-          <a:xfrm>
-            <a:off x="8595360" y="1115568"/>
-            <a:ext cx="2743200" cy="548640"/>
-          </a:xfrm>
-          <a:prstGeom prst="rect">
-            <a:avLst/>
-          </a:prstGeom>
-          <a:solidFill>
-            <a:srgbClr val="004578"/>
-          </a:solidFill>
-          <a:ln>
-            <a:noFill/>
-          </a:ln>
-        </p:spPr>
-        <p:style>
-          <a:lnRef idx="1">
-            <a:schemeClr val="accent1"/>
-          </a:lnRef>
-          <a:fillRef idx="3">
-            <a:schemeClr val="accent1"/>
-          </a:fillRef>
-          <a:effectRef idx="2">
-            <a:schemeClr val="accent1"/>
-          </a:effectRef>
-          <a:fontRef idx="minor">
-            <a:schemeClr val="lt1"/>
-          </a:fontRef>
-        </p:style>
-        <p:txBody>
-          <a:bodyPr rtlCol="0" anchor="ctr"/>
-          <a:lstStyle/>
-          <a:p>
-            <a:pPr algn="ctr"/>
-          </a:p>
-        </p:txBody>
-      </p:sp>
-      <p:sp>
-        <p:nvSpPr>
-          <p:cNvPr id="11" name="TextBox 10"/>
+              <a:t>Attack price, not just volume.</a:t>
+            </a:r>
+          </a:p>
+        </p:txBody>
+      </p:sp>
+      <p:sp>
+        <p:nvSpPr>
+          <p:cNvPr id="12" name="TextBox 11"/>
           <p:cNvSpPr txBox="1"/>
           <p:nvPr/>
         </p:nvSpPr>
         <p:spPr>
           <a:xfrm>
-            <a:off x="8650224" y="1207008"/>
-            <a:ext cx="2651760" cy="438912"/>
+            <a:off x="1005840" y="5724144"/>
+            <a:ext cx="10789920" cy="694944"/>
           </a:xfrm>
           <a:prstGeom prst="rect">
             <a:avLst/>
@@ -6817,56 +7028,13 @@
           <a:p>
             <a:pPr algn="l"/>
             <a:r>
-              <a:rPr sz="1100" b="1" i="0">
-                <a:solidFill>
-                  <a:srgbClr val="FFFFFF"/>
-                </a:solidFill>
-              </a:rPr>
-              <a:t>Gap</a:t>
-            </a:r>
-          </a:p>
-        </p:txBody>
-      </p:sp>
-      <p:sp>
-        <p:nvSpPr>
-          <p:cNvPr id="12" name="Rectangle 11"/>
-          <p:cNvSpPr/>
-          <p:nvPr/>
-        </p:nvSpPr>
-        <p:spPr>
-          <a:xfrm>
-            <a:off x="365760" y="1664208"/>
-            <a:ext cx="3566160" cy="548640"/>
-          </a:xfrm>
-          <a:prstGeom prst="rect">
-            <a:avLst/>
-          </a:prstGeom>
-          <a:solidFill>
-            <a:srgbClr val="F2F2F2"/>
-          </a:solidFill>
-          <a:ln>
-            <a:noFill/>
-          </a:ln>
-        </p:spPr>
-        <p:style>
-          <a:lnRef idx="1">
-            <a:schemeClr val="accent1"/>
-          </a:lnRef>
-          <a:fillRef idx="3">
-            <a:schemeClr val="accent1"/>
-          </a:fillRef>
-          <a:effectRef idx="2">
-            <a:schemeClr val="accent1"/>
-          </a:effectRef>
-          <a:fontRef idx="minor">
-            <a:schemeClr val="lt1"/>
-          </a:fontRef>
-        </p:style>
-        <p:txBody>
-          <a:bodyPr rtlCol="0" anchor="ctr"/>
-          <a:lstStyle/>
-          <a:p>
-            <a:pPr algn="ctr"/>
+              <a:rPr sz="1150" b="0" i="0">
+                <a:solidFill>
+                  <a:srgbClr val="94A3B8"/>
+                </a:solidFill>
+              </a:rPr>
+              <a:t>Target the ~43% price premium — drug costs and administration — before adding another dollar of treatment spend.</a:t>
+            </a:r>
           </a:p>
         </p:txBody>
       </p:sp>
@@ -6878,8 +7046,8 @@
         </p:nvSpPr>
         <p:spPr>
           <a:xfrm>
-            <a:off x="420624" y="1737360"/>
-            <a:ext cx="3474720" cy="457200"/>
+            <a:off x="411480" y="6556248"/>
+            <a:ext cx="11338560" cy="256032"/>
           </a:xfrm>
           <a:prstGeom prst="rect">
             <a:avLst/>
@@ -6894,1586 +7062,12 @@
           <a:p>
             <a:pPr algn="l"/>
             <a:r>
-              <a:rPr sz="1050" b="0" i="0">
-                <a:solidFill>
-                  <a:srgbClr val="252525"/>
-                </a:solidFill>
-              </a:rPr>
-              <a:t>Adult obesity rate</a:t>
-            </a:r>
-          </a:p>
-        </p:txBody>
-      </p:sp>
-      <p:sp>
-        <p:nvSpPr>
-          <p:cNvPr id="14" name="Rectangle 13"/>
-          <p:cNvSpPr/>
-          <p:nvPr/>
-        </p:nvSpPr>
-        <p:spPr>
-          <a:xfrm>
-            <a:off x="4023360" y="1664208"/>
-            <a:ext cx="1828800" cy="548640"/>
-          </a:xfrm>
-          <a:prstGeom prst="rect">
-            <a:avLst/>
-          </a:prstGeom>
-          <a:solidFill>
-            <a:srgbClr val="F2F2F2"/>
-          </a:solidFill>
-          <a:ln>
-            <a:noFill/>
-          </a:ln>
-        </p:spPr>
-        <p:style>
-          <a:lnRef idx="1">
-            <a:schemeClr val="accent1"/>
-          </a:lnRef>
-          <a:fillRef idx="3">
-            <a:schemeClr val="accent1"/>
-          </a:fillRef>
-          <a:effectRef idx="2">
-            <a:schemeClr val="accent1"/>
-          </a:effectRef>
-          <a:fontRef idx="minor">
-            <a:schemeClr val="lt1"/>
-          </a:fontRef>
-        </p:style>
-        <p:txBody>
-          <a:bodyPr rtlCol="0" anchor="ctr"/>
-          <a:lstStyle/>
-          <a:p>
-            <a:pPr algn="ctr"/>
-          </a:p>
-        </p:txBody>
-      </p:sp>
-      <p:sp>
-        <p:nvSpPr>
-          <p:cNvPr id="15" name="TextBox 14"/>
-          <p:cNvSpPr txBox="1"/>
-          <p:nvPr/>
-        </p:nvSpPr>
-        <p:spPr>
-          <a:xfrm>
-            <a:off x="4078224" y="1737360"/>
-            <a:ext cx="1737360" cy="457200"/>
-          </a:xfrm>
-          <a:prstGeom prst="rect">
-            <a:avLst/>
-          </a:prstGeom>
-          <a:noFill/>
-        </p:spPr>
-        <p:txBody>
-          <a:bodyPr wrap="square">
-            <a:spAutoFit/>
-          </a:bodyPr>
-          <a:lstStyle/>
-          <a:p>
-            <a:pPr algn="l"/>
-            <a:r>
-              <a:rPr sz="1050" b="1" i="0">
-                <a:solidFill>
-                  <a:srgbClr val="D87000"/>
-                </a:solidFill>
-              </a:rPr>
-              <a:t>36.2%</a:t>
-            </a:r>
-          </a:p>
-        </p:txBody>
-      </p:sp>
-      <p:sp>
-        <p:nvSpPr>
-          <p:cNvPr id="16" name="Rectangle 15"/>
-          <p:cNvSpPr/>
-          <p:nvPr/>
-        </p:nvSpPr>
-        <p:spPr>
-          <a:xfrm>
-            <a:off x="5943600" y="1664208"/>
-            <a:ext cx="2560320" cy="548640"/>
-          </a:xfrm>
-          <a:prstGeom prst="rect">
-            <a:avLst/>
-          </a:prstGeom>
-          <a:solidFill>
-            <a:srgbClr val="F2F2F2"/>
-          </a:solidFill>
-          <a:ln>
-            <a:noFill/>
-          </a:ln>
-        </p:spPr>
-        <p:style>
-          <a:lnRef idx="1">
-            <a:schemeClr val="accent1"/>
-          </a:lnRef>
-          <a:fillRef idx="3">
-            <a:schemeClr val="accent1"/>
-          </a:fillRef>
-          <a:effectRef idx="2">
-            <a:schemeClr val="accent1"/>
-          </a:effectRef>
-          <a:fontRef idx="minor">
-            <a:schemeClr val="lt1"/>
-          </a:fontRef>
-        </p:style>
-        <p:txBody>
-          <a:bodyPr rtlCol="0" anchor="ctr"/>
-          <a:lstStyle/>
-          <a:p>
-            <a:pPr algn="ctr"/>
-          </a:p>
-        </p:txBody>
-      </p:sp>
-      <p:sp>
-        <p:nvSpPr>
-          <p:cNvPr id="17" name="TextBox 16"/>
-          <p:cNvSpPr txBox="1"/>
-          <p:nvPr/>
-        </p:nvSpPr>
-        <p:spPr>
-          <a:xfrm>
-            <a:off x="5998464" y="1737360"/>
-            <a:ext cx="2468880" cy="457200"/>
-          </a:xfrm>
-          <a:prstGeom prst="rect">
-            <a:avLst/>
-          </a:prstGeom>
-          <a:noFill/>
-        </p:spPr>
-        <p:txBody>
-          <a:bodyPr wrap="square">
-            <a:spAutoFit/>
-          </a:bodyPr>
-          <a:lstStyle/>
-          <a:p>
-            <a:pPr algn="l"/>
-            <a:r>
-              <a:rPr sz="1050" b="0" i="0">
-                <a:solidFill>
-                  <a:srgbClr val="107C10"/>
-                </a:solidFill>
-              </a:rPr>
-              <a:t>4–24%</a:t>
-            </a:r>
-          </a:p>
-        </p:txBody>
-      </p:sp>
-      <p:sp>
-        <p:nvSpPr>
-          <p:cNvPr id="18" name="Rectangle 17"/>
-          <p:cNvSpPr/>
-          <p:nvPr/>
-        </p:nvSpPr>
-        <p:spPr>
-          <a:xfrm>
-            <a:off x="8595360" y="1664208"/>
-            <a:ext cx="2743200" cy="548640"/>
-          </a:xfrm>
-          <a:prstGeom prst="rect">
-            <a:avLst/>
-          </a:prstGeom>
-          <a:solidFill>
-            <a:srgbClr val="F2F2F2"/>
-          </a:solidFill>
-          <a:ln>
-            <a:noFill/>
-          </a:ln>
-        </p:spPr>
-        <p:style>
-          <a:lnRef idx="1">
-            <a:schemeClr val="accent1"/>
-          </a:lnRef>
-          <a:fillRef idx="3">
-            <a:schemeClr val="accent1"/>
-          </a:fillRef>
-          <a:effectRef idx="2">
-            <a:schemeClr val="accent1"/>
-          </a:effectRef>
-          <a:fontRef idx="minor">
-            <a:schemeClr val="lt1"/>
-          </a:fontRef>
-        </p:style>
-        <p:txBody>
-          <a:bodyPr rtlCol="0" anchor="ctr"/>
-          <a:lstStyle/>
-          <a:p>
-            <a:pPr algn="ctr"/>
-          </a:p>
-        </p:txBody>
-      </p:sp>
-      <p:sp>
-        <p:nvSpPr>
-          <p:cNvPr id="19" name="TextBox 18"/>
-          <p:cNvSpPr txBox="1"/>
-          <p:nvPr/>
-        </p:nvSpPr>
-        <p:spPr>
-          <a:xfrm>
-            <a:off x="8650224" y="1737360"/>
-            <a:ext cx="2651760" cy="457200"/>
-          </a:xfrm>
-          <a:prstGeom prst="rect">
-            <a:avLst/>
-          </a:prstGeom>
-          <a:noFill/>
-        </p:spPr>
-        <p:txBody>
-          <a:bodyPr wrap="square">
-            <a:spAutoFit/>
-          </a:bodyPr>
-          <a:lstStyle/>
-          <a:p>
-            <a:pPr algn="l"/>
-            <a:r>
-              <a:rPr sz="1050" b="0" i="0">
-                <a:solidFill>
-                  <a:srgbClr val="252525"/>
-                </a:solidFill>
-              </a:rPr>
-              <a:t>US +12–32 pp</a:t>
-            </a:r>
-          </a:p>
-        </p:txBody>
-      </p:sp>
-      <p:sp>
-        <p:nvSpPr>
-          <p:cNvPr id="20" name="Rectangle 19"/>
-          <p:cNvSpPr/>
-          <p:nvPr/>
-        </p:nvSpPr>
-        <p:spPr>
-          <a:xfrm>
-            <a:off x="365760" y="2212848"/>
-            <a:ext cx="3566160" cy="548640"/>
-          </a:xfrm>
-          <a:prstGeom prst="rect">
-            <a:avLst/>
-          </a:prstGeom>
-          <a:solidFill>
-            <a:srgbClr val="FFFFFF"/>
-          </a:solidFill>
-          <a:ln>
-            <a:noFill/>
-          </a:ln>
-        </p:spPr>
-        <p:style>
-          <a:lnRef idx="1">
-            <a:schemeClr val="accent1"/>
-          </a:lnRef>
-          <a:fillRef idx="3">
-            <a:schemeClr val="accent1"/>
-          </a:fillRef>
-          <a:effectRef idx="2">
-            <a:schemeClr val="accent1"/>
-          </a:effectRef>
-          <a:fontRef idx="minor">
-            <a:schemeClr val="lt1"/>
-          </a:fontRef>
-        </p:style>
-        <p:txBody>
-          <a:bodyPr rtlCol="0" anchor="ctr"/>
-          <a:lstStyle/>
-          <a:p>
-            <a:pPr algn="ctr"/>
-          </a:p>
-        </p:txBody>
-      </p:sp>
-      <p:sp>
-        <p:nvSpPr>
-          <p:cNvPr id="21" name="TextBox 20"/>
-          <p:cNvSpPr txBox="1"/>
-          <p:nvPr/>
-        </p:nvSpPr>
-        <p:spPr>
-          <a:xfrm>
-            <a:off x="420624" y="2286000"/>
-            <a:ext cx="3474720" cy="457200"/>
-          </a:xfrm>
-          <a:prstGeom prst="rect">
-            <a:avLst/>
-          </a:prstGeom>
-          <a:noFill/>
-        </p:spPr>
-        <p:txBody>
-          <a:bodyPr wrap="square">
-            <a:spAutoFit/>
-          </a:bodyPr>
-          <a:lstStyle/>
-          <a:p>
-            <a:pPr algn="l"/>
-            <a:r>
-              <a:rPr sz="1050" b="0" i="0">
-                <a:solidFill>
-                  <a:srgbClr val="252525"/>
-                </a:solidFill>
-              </a:rPr>
-              <a:t>Preventable mortality /100K</a:t>
-            </a:r>
-          </a:p>
-        </p:txBody>
-      </p:sp>
-      <p:sp>
-        <p:nvSpPr>
-          <p:cNvPr id="22" name="Rectangle 21"/>
-          <p:cNvSpPr/>
-          <p:nvPr/>
-        </p:nvSpPr>
-        <p:spPr>
-          <a:xfrm>
-            <a:off x="4023360" y="2212848"/>
-            <a:ext cx="1828800" cy="548640"/>
-          </a:xfrm>
-          <a:prstGeom prst="rect">
-            <a:avLst/>
-          </a:prstGeom>
-          <a:solidFill>
-            <a:srgbClr val="FFFFFF"/>
-          </a:solidFill>
-          <a:ln>
-            <a:noFill/>
-          </a:ln>
-        </p:spPr>
-        <p:style>
-          <a:lnRef idx="1">
-            <a:schemeClr val="accent1"/>
-          </a:lnRef>
-          <a:fillRef idx="3">
-            <a:schemeClr val="accent1"/>
-          </a:fillRef>
-          <a:effectRef idx="2">
-            <a:schemeClr val="accent1"/>
-          </a:effectRef>
-          <a:fontRef idx="minor">
-            <a:schemeClr val="lt1"/>
-          </a:fontRef>
-        </p:style>
-        <p:txBody>
-          <a:bodyPr rtlCol="0" anchor="ctr"/>
-          <a:lstStyle/>
-          <a:p>
-            <a:pPr algn="ctr"/>
-          </a:p>
-        </p:txBody>
-      </p:sp>
-      <p:sp>
-        <p:nvSpPr>
-          <p:cNvPr id="23" name="TextBox 22"/>
-          <p:cNvSpPr txBox="1"/>
-          <p:nvPr/>
-        </p:nvSpPr>
-        <p:spPr>
-          <a:xfrm>
-            <a:off x="4078224" y="2286000"/>
-            <a:ext cx="1737360" cy="457200"/>
-          </a:xfrm>
-          <a:prstGeom prst="rect">
-            <a:avLst/>
-          </a:prstGeom>
-          <a:noFill/>
-        </p:spPr>
-        <p:txBody>
-          <a:bodyPr wrap="square">
-            <a:spAutoFit/>
-          </a:bodyPr>
-          <a:lstStyle/>
-          <a:p>
-            <a:pPr algn="l"/>
-            <a:r>
-              <a:rPr sz="1050" b="1" i="0">
-                <a:solidFill>
-                  <a:srgbClr val="D87000"/>
-                </a:solidFill>
-              </a:rPr>
-              <a:t>247</a:t>
-            </a:r>
-          </a:p>
-        </p:txBody>
-      </p:sp>
-      <p:sp>
-        <p:nvSpPr>
-          <p:cNvPr id="24" name="Rectangle 23"/>
-          <p:cNvSpPr/>
-          <p:nvPr/>
-        </p:nvSpPr>
-        <p:spPr>
-          <a:xfrm>
-            <a:off x="5943600" y="2212848"/>
-            <a:ext cx="2560320" cy="548640"/>
-          </a:xfrm>
-          <a:prstGeom prst="rect">
-            <a:avLst/>
-          </a:prstGeom>
-          <a:solidFill>
-            <a:srgbClr val="FFFFFF"/>
-          </a:solidFill>
-          <a:ln>
-            <a:noFill/>
-          </a:ln>
-        </p:spPr>
-        <p:style>
-          <a:lnRef idx="1">
-            <a:schemeClr val="accent1"/>
-          </a:lnRef>
-          <a:fillRef idx="3">
-            <a:schemeClr val="accent1"/>
-          </a:fillRef>
-          <a:effectRef idx="2">
-            <a:schemeClr val="accent1"/>
-          </a:effectRef>
-          <a:fontRef idx="minor">
-            <a:schemeClr val="lt1"/>
-          </a:fontRef>
-        </p:style>
-        <p:txBody>
-          <a:bodyPr rtlCol="0" anchor="ctr"/>
-          <a:lstStyle/>
-          <a:p>
-            <a:pPr algn="ctr"/>
-          </a:p>
-        </p:txBody>
-      </p:sp>
-      <p:sp>
-        <p:nvSpPr>
-          <p:cNvPr id="25" name="TextBox 24"/>
-          <p:cNvSpPr txBox="1"/>
-          <p:nvPr/>
-        </p:nvSpPr>
-        <p:spPr>
-          <a:xfrm>
-            <a:off x="5998464" y="2286000"/>
-            <a:ext cx="2468880" cy="457200"/>
-          </a:xfrm>
-          <a:prstGeom prst="rect">
-            <a:avLst/>
-          </a:prstGeom>
-          <a:noFill/>
-        </p:spPr>
-        <p:txBody>
-          <a:bodyPr wrap="square">
-            <a:spAutoFit/>
-          </a:bodyPr>
-          <a:lstStyle/>
-          <a:p>
-            <a:pPr algn="l"/>
-            <a:r>
-              <a:rPr sz="1050" b="0" i="0">
-                <a:solidFill>
-                  <a:srgbClr val="107C10"/>
-                </a:solidFill>
-              </a:rPr>
-              <a:t>110–130</a:t>
-            </a:r>
-          </a:p>
-        </p:txBody>
-      </p:sp>
-      <p:sp>
-        <p:nvSpPr>
-          <p:cNvPr id="26" name="Rectangle 25"/>
-          <p:cNvSpPr/>
-          <p:nvPr/>
-        </p:nvSpPr>
-        <p:spPr>
-          <a:xfrm>
-            <a:off x="8595360" y="2212848"/>
-            <a:ext cx="2743200" cy="548640"/>
-          </a:xfrm>
-          <a:prstGeom prst="rect">
-            <a:avLst/>
-          </a:prstGeom>
-          <a:solidFill>
-            <a:srgbClr val="FFFFFF"/>
-          </a:solidFill>
-          <a:ln>
-            <a:noFill/>
-          </a:ln>
-        </p:spPr>
-        <p:style>
-          <a:lnRef idx="1">
-            <a:schemeClr val="accent1"/>
-          </a:lnRef>
-          <a:fillRef idx="3">
-            <a:schemeClr val="accent1"/>
-          </a:fillRef>
-          <a:effectRef idx="2">
-            <a:schemeClr val="accent1"/>
-          </a:effectRef>
-          <a:fontRef idx="minor">
-            <a:schemeClr val="lt1"/>
-          </a:fontRef>
-        </p:style>
-        <p:txBody>
-          <a:bodyPr rtlCol="0" anchor="ctr"/>
-          <a:lstStyle/>
-          <a:p>
-            <a:pPr algn="ctr"/>
-          </a:p>
-        </p:txBody>
-      </p:sp>
-      <p:sp>
-        <p:nvSpPr>
-          <p:cNvPr id="27" name="TextBox 26"/>
-          <p:cNvSpPr txBox="1"/>
-          <p:nvPr/>
-        </p:nvSpPr>
-        <p:spPr>
-          <a:xfrm>
-            <a:off x="8650224" y="2286000"/>
-            <a:ext cx="2651760" cy="457200"/>
-          </a:xfrm>
-          <a:prstGeom prst="rect">
-            <a:avLst/>
-          </a:prstGeom>
-          <a:noFill/>
-        </p:spPr>
-        <p:txBody>
-          <a:bodyPr wrap="square">
-            <a:spAutoFit/>
-          </a:bodyPr>
-          <a:lstStyle/>
-          <a:p>
-            <a:pPr algn="l"/>
-            <a:r>
-              <a:rPr sz="1050" b="0" i="0">
-                <a:solidFill>
-                  <a:srgbClr val="252525"/>
-                </a:solidFill>
-              </a:rPr>
-              <a:t>US −50%</a:t>
-            </a:r>
-          </a:p>
-        </p:txBody>
-      </p:sp>
-      <p:sp>
-        <p:nvSpPr>
-          <p:cNvPr id="28" name="Rectangle 27"/>
-          <p:cNvSpPr/>
-          <p:nvPr/>
-        </p:nvSpPr>
-        <p:spPr>
-          <a:xfrm>
-            <a:off x="365760" y="2761488"/>
-            <a:ext cx="3566160" cy="548640"/>
-          </a:xfrm>
-          <a:prstGeom prst="rect">
-            <a:avLst/>
-          </a:prstGeom>
-          <a:solidFill>
-            <a:srgbClr val="F2F2F2"/>
-          </a:solidFill>
-          <a:ln>
-            <a:noFill/>
-          </a:ln>
-        </p:spPr>
-        <p:style>
-          <a:lnRef idx="1">
-            <a:schemeClr val="accent1"/>
-          </a:lnRef>
-          <a:fillRef idx="3">
-            <a:schemeClr val="accent1"/>
-          </a:fillRef>
-          <a:effectRef idx="2">
-            <a:schemeClr val="accent1"/>
-          </a:effectRef>
-          <a:fontRef idx="minor">
-            <a:schemeClr val="lt1"/>
-          </a:fontRef>
-        </p:style>
-        <p:txBody>
-          <a:bodyPr rtlCol="0" anchor="ctr"/>
-          <a:lstStyle/>
-          <a:p>
-            <a:pPr algn="ctr"/>
-          </a:p>
-        </p:txBody>
-      </p:sp>
-      <p:sp>
-        <p:nvSpPr>
-          <p:cNvPr id="29" name="TextBox 28"/>
-          <p:cNvSpPr txBox="1"/>
-          <p:nvPr/>
-        </p:nvSpPr>
-        <p:spPr>
-          <a:xfrm>
-            <a:off x="420624" y="2834640"/>
-            <a:ext cx="3474720" cy="457200"/>
-          </a:xfrm>
-          <a:prstGeom prst="rect">
-            <a:avLst/>
-          </a:prstGeom>
-          <a:noFill/>
-        </p:spPr>
-        <p:txBody>
-          <a:bodyPr wrap="square">
-            <a:spAutoFit/>
-          </a:bodyPr>
-          <a:lstStyle/>
-          <a:p>
-            <a:pPr algn="l"/>
-            <a:r>
-              <a:rPr sz="1050" b="0" i="0">
-                <a:solidFill>
-                  <a:srgbClr val="252525"/>
-                </a:solidFill>
-              </a:rPr>
-              <a:t>Primary care visits / capita</a:t>
-            </a:r>
-          </a:p>
-        </p:txBody>
-      </p:sp>
-      <p:sp>
-        <p:nvSpPr>
-          <p:cNvPr id="30" name="Rectangle 29"/>
-          <p:cNvSpPr/>
-          <p:nvPr/>
-        </p:nvSpPr>
-        <p:spPr>
-          <a:xfrm>
-            <a:off x="4023360" y="2761488"/>
-            <a:ext cx="1828800" cy="548640"/>
-          </a:xfrm>
-          <a:prstGeom prst="rect">
-            <a:avLst/>
-          </a:prstGeom>
-          <a:solidFill>
-            <a:srgbClr val="F2F2F2"/>
-          </a:solidFill>
-          <a:ln>
-            <a:noFill/>
-          </a:ln>
-        </p:spPr>
-        <p:style>
-          <a:lnRef idx="1">
-            <a:schemeClr val="accent1"/>
-          </a:lnRef>
-          <a:fillRef idx="3">
-            <a:schemeClr val="accent1"/>
-          </a:fillRef>
-          <a:effectRef idx="2">
-            <a:schemeClr val="accent1"/>
-          </a:effectRef>
-          <a:fontRef idx="minor">
-            <a:schemeClr val="lt1"/>
-          </a:fontRef>
-        </p:style>
-        <p:txBody>
-          <a:bodyPr rtlCol="0" anchor="ctr"/>
-          <a:lstStyle/>
-          <a:p>
-            <a:pPr algn="ctr"/>
-          </a:p>
-        </p:txBody>
-      </p:sp>
-      <p:sp>
-        <p:nvSpPr>
-          <p:cNvPr id="31" name="TextBox 30"/>
-          <p:cNvSpPr txBox="1"/>
-          <p:nvPr/>
-        </p:nvSpPr>
-        <p:spPr>
-          <a:xfrm>
-            <a:off x="4078224" y="2834640"/>
-            <a:ext cx="1737360" cy="457200"/>
-          </a:xfrm>
-          <a:prstGeom prst="rect">
-            <a:avLst/>
-          </a:prstGeom>
-          <a:noFill/>
-        </p:spPr>
-        <p:txBody>
-          <a:bodyPr wrap="square">
-            <a:spAutoFit/>
-          </a:bodyPr>
-          <a:lstStyle/>
-          <a:p>
-            <a:pPr algn="l"/>
-            <a:r>
-              <a:rPr sz="1050" b="1" i="0">
-                <a:solidFill>
-                  <a:srgbClr val="D87000"/>
-                </a:solidFill>
-              </a:rPr>
-              <a:t>3.9 / yr</a:t>
-            </a:r>
-          </a:p>
-        </p:txBody>
-      </p:sp>
-      <p:sp>
-        <p:nvSpPr>
-          <p:cNvPr id="32" name="Rectangle 31"/>
-          <p:cNvSpPr/>
-          <p:nvPr/>
-        </p:nvSpPr>
-        <p:spPr>
-          <a:xfrm>
-            <a:off x="5943600" y="2761488"/>
-            <a:ext cx="2560320" cy="548640"/>
-          </a:xfrm>
-          <a:prstGeom prst="rect">
-            <a:avLst/>
-          </a:prstGeom>
-          <a:solidFill>
-            <a:srgbClr val="F2F2F2"/>
-          </a:solidFill>
-          <a:ln>
-            <a:noFill/>
-          </a:ln>
-        </p:spPr>
-        <p:style>
-          <a:lnRef idx="1">
-            <a:schemeClr val="accent1"/>
-          </a:lnRef>
-          <a:fillRef idx="3">
-            <a:schemeClr val="accent1"/>
-          </a:fillRef>
-          <a:effectRef idx="2">
-            <a:schemeClr val="accent1"/>
-          </a:effectRef>
-          <a:fontRef idx="minor">
-            <a:schemeClr val="lt1"/>
-          </a:fontRef>
-        </p:style>
-        <p:txBody>
-          <a:bodyPr rtlCol="0" anchor="ctr"/>
-          <a:lstStyle/>
-          <a:p>
-            <a:pPr algn="ctr"/>
-          </a:p>
-        </p:txBody>
-      </p:sp>
-      <p:sp>
-        <p:nvSpPr>
-          <p:cNvPr id="33" name="TextBox 32"/>
-          <p:cNvSpPr txBox="1"/>
-          <p:nvPr/>
-        </p:nvSpPr>
-        <p:spPr>
-          <a:xfrm>
-            <a:off x="5998464" y="2834640"/>
-            <a:ext cx="2468880" cy="457200"/>
-          </a:xfrm>
-          <a:prstGeom prst="rect">
-            <a:avLst/>
-          </a:prstGeom>
-          <a:noFill/>
-        </p:spPr>
-        <p:txBody>
-          <a:bodyPr wrap="square">
-            <a:spAutoFit/>
-          </a:bodyPr>
-          <a:lstStyle/>
-          <a:p>
-            <a:pPr algn="l"/>
-            <a:r>
-              <a:rPr sz="1050" b="0" i="0">
-                <a:solidFill>
-                  <a:srgbClr val="107C10"/>
-                </a:solidFill>
-              </a:rPr>
-              <a:t>12–13 / yr</a:t>
-            </a:r>
-          </a:p>
-        </p:txBody>
-      </p:sp>
-      <p:sp>
-        <p:nvSpPr>
-          <p:cNvPr id="34" name="Rectangle 33"/>
-          <p:cNvSpPr/>
-          <p:nvPr/>
-        </p:nvSpPr>
-        <p:spPr>
-          <a:xfrm>
-            <a:off x="8595360" y="2761488"/>
-            <a:ext cx="2743200" cy="548640"/>
-          </a:xfrm>
-          <a:prstGeom prst="rect">
-            <a:avLst/>
-          </a:prstGeom>
-          <a:solidFill>
-            <a:srgbClr val="F2F2F2"/>
-          </a:solidFill>
-          <a:ln>
-            <a:noFill/>
-          </a:ln>
-        </p:spPr>
-        <p:style>
-          <a:lnRef idx="1">
-            <a:schemeClr val="accent1"/>
-          </a:lnRef>
-          <a:fillRef idx="3">
-            <a:schemeClr val="accent1"/>
-          </a:fillRef>
-          <a:effectRef idx="2">
-            <a:schemeClr val="accent1"/>
-          </a:effectRef>
-          <a:fontRef idx="minor">
-            <a:schemeClr val="lt1"/>
-          </a:fontRef>
-        </p:style>
-        <p:txBody>
-          <a:bodyPr rtlCol="0" anchor="ctr"/>
-          <a:lstStyle/>
-          <a:p>
-            <a:pPr algn="ctr"/>
-          </a:p>
-        </p:txBody>
-      </p:sp>
-      <p:sp>
-        <p:nvSpPr>
-          <p:cNvPr id="35" name="TextBox 34"/>
-          <p:cNvSpPr txBox="1"/>
-          <p:nvPr/>
-        </p:nvSpPr>
-        <p:spPr>
-          <a:xfrm>
-            <a:off x="8650224" y="2834640"/>
-            <a:ext cx="2651760" cy="457200"/>
-          </a:xfrm>
-          <a:prstGeom prst="rect">
-            <a:avLst/>
-          </a:prstGeom>
-          <a:noFill/>
-        </p:spPr>
-        <p:txBody>
-          <a:bodyPr wrap="square">
-            <a:spAutoFit/>
-          </a:bodyPr>
-          <a:lstStyle/>
-          <a:p>
-            <a:pPr algn="l"/>
-            <a:r>
-              <a:rPr sz="1050" b="0" i="0">
-                <a:solidFill>
-                  <a:srgbClr val="252525"/>
-                </a:solidFill>
-              </a:rPr>
-              <a:t>US 3× lower</a:t>
-            </a:r>
-          </a:p>
-        </p:txBody>
-      </p:sp>
-      <p:sp>
-        <p:nvSpPr>
-          <p:cNvPr id="36" name="Rectangle 35"/>
-          <p:cNvSpPr/>
-          <p:nvPr/>
-        </p:nvSpPr>
-        <p:spPr>
-          <a:xfrm>
-            <a:off x="365760" y="3310128"/>
-            <a:ext cx="3566160" cy="548640"/>
-          </a:xfrm>
-          <a:prstGeom prst="rect">
-            <a:avLst/>
-          </a:prstGeom>
-          <a:solidFill>
-            <a:srgbClr val="FFFFFF"/>
-          </a:solidFill>
-          <a:ln>
-            <a:noFill/>
-          </a:ln>
-        </p:spPr>
-        <p:style>
-          <a:lnRef idx="1">
-            <a:schemeClr val="accent1"/>
-          </a:lnRef>
-          <a:fillRef idx="3">
-            <a:schemeClr val="accent1"/>
-          </a:fillRef>
-          <a:effectRef idx="2">
-            <a:schemeClr val="accent1"/>
-          </a:effectRef>
-          <a:fontRef idx="minor">
-            <a:schemeClr val="lt1"/>
-          </a:fontRef>
-        </p:style>
-        <p:txBody>
-          <a:bodyPr rtlCol="0" anchor="ctr"/>
-          <a:lstStyle/>
-          <a:p>
-            <a:pPr algn="ctr"/>
-          </a:p>
-        </p:txBody>
-      </p:sp>
-      <p:sp>
-        <p:nvSpPr>
-          <p:cNvPr id="37" name="TextBox 36"/>
-          <p:cNvSpPr txBox="1"/>
-          <p:nvPr/>
-        </p:nvSpPr>
-        <p:spPr>
-          <a:xfrm>
-            <a:off x="420624" y="3383280"/>
-            <a:ext cx="3474720" cy="457200"/>
-          </a:xfrm>
-          <a:prstGeom prst="rect">
-            <a:avLst/>
-          </a:prstGeom>
-          <a:noFill/>
-        </p:spPr>
-        <p:txBody>
-          <a:bodyPr wrap="square">
-            <a:spAutoFit/>
-          </a:bodyPr>
-          <a:lstStyle/>
-          <a:p>
-            <a:pPr algn="l"/>
-            <a:r>
-              <a:rPr sz="1050" b="0" i="0">
-                <a:solidFill>
-                  <a:srgbClr val="252525"/>
-                </a:solidFill>
-              </a:rPr>
-              <a:t>Prevention % of health spend</a:t>
-            </a:r>
-          </a:p>
-        </p:txBody>
-      </p:sp>
-      <p:sp>
-        <p:nvSpPr>
-          <p:cNvPr id="38" name="Rectangle 37"/>
-          <p:cNvSpPr/>
-          <p:nvPr/>
-        </p:nvSpPr>
-        <p:spPr>
-          <a:xfrm>
-            <a:off x="4023360" y="3310128"/>
-            <a:ext cx="1828800" cy="548640"/>
-          </a:xfrm>
-          <a:prstGeom prst="rect">
-            <a:avLst/>
-          </a:prstGeom>
-          <a:solidFill>
-            <a:srgbClr val="FFFFFF"/>
-          </a:solidFill>
-          <a:ln>
-            <a:noFill/>
-          </a:ln>
-        </p:spPr>
-        <p:style>
-          <a:lnRef idx="1">
-            <a:schemeClr val="accent1"/>
-          </a:lnRef>
-          <a:fillRef idx="3">
-            <a:schemeClr val="accent1"/>
-          </a:fillRef>
-          <a:effectRef idx="2">
-            <a:schemeClr val="accent1"/>
-          </a:effectRef>
-          <a:fontRef idx="minor">
-            <a:schemeClr val="lt1"/>
-          </a:fontRef>
-        </p:style>
-        <p:txBody>
-          <a:bodyPr rtlCol="0" anchor="ctr"/>
-          <a:lstStyle/>
-          <a:p>
-            <a:pPr algn="ctr"/>
-          </a:p>
-        </p:txBody>
-      </p:sp>
-      <p:sp>
-        <p:nvSpPr>
-          <p:cNvPr id="39" name="TextBox 38"/>
-          <p:cNvSpPr txBox="1"/>
-          <p:nvPr/>
-        </p:nvSpPr>
-        <p:spPr>
-          <a:xfrm>
-            <a:off x="4078224" y="3383280"/>
-            <a:ext cx="1737360" cy="457200"/>
-          </a:xfrm>
-          <a:prstGeom prst="rect">
-            <a:avLst/>
-          </a:prstGeom>
-          <a:noFill/>
-        </p:spPr>
-        <p:txBody>
-          <a:bodyPr wrap="square">
-            <a:spAutoFit/>
-          </a:bodyPr>
-          <a:lstStyle/>
-          <a:p>
-            <a:pPr algn="l"/>
-            <a:r>
-              <a:rPr sz="1050" b="1" i="0">
-                <a:solidFill>
-                  <a:srgbClr val="D87000"/>
-                </a:solidFill>
-              </a:rPr>
-              <a:t>2.9%</a:t>
-            </a:r>
-          </a:p>
-        </p:txBody>
-      </p:sp>
-      <p:sp>
-        <p:nvSpPr>
-          <p:cNvPr id="40" name="Rectangle 39"/>
-          <p:cNvSpPr/>
-          <p:nvPr/>
-        </p:nvSpPr>
-        <p:spPr>
-          <a:xfrm>
-            <a:off x="5943600" y="3310128"/>
-            <a:ext cx="2560320" cy="548640"/>
-          </a:xfrm>
-          <a:prstGeom prst="rect">
-            <a:avLst/>
-          </a:prstGeom>
-          <a:solidFill>
-            <a:srgbClr val="FFFFFF"/>
-          </a:solidFill>
-          <a:ln>
-            <a:noFill/>
-          </a:ln>
-        </p:spPr>
-        <p:style>
-          <a:lnRef idx="1">
-            <a:schemeClr val="accent1"/>
-          </a:lnRef>
-          <a:fillRef idx="3">
-            <a:schemeClr val="accent1"/>
-          </a:fillRef>
-          <a:effectRef idx="2">
-            <a:schemeClr val="accent1"/>
-          </a:effectRef>
-          <a:fontRef idx="minor">
-            <a:schemeClr val="lt1"/>
-          </a:fontRef>
-        </p:style>
-        <p:txBody>
-          <a:bodyPr rtlCol="0" anchor="ctr"/>
-          <a:lstStyle/>
-          <a:p>
-            <a:pPr algn="ctr"/>
-          </a:p>
-        </p:txBody>
-      </p:sp>
-      <p:sp>
-        <p:nvSpPr>
-          <p:cNvPr id="41" name="TextBox 40"/>
-          <p:cNvSpPr txBox="1"/>
-          <p:nvPr/>
-        </p:nvSpPr>
-        <p:spPr>
-          <a:xfrm>
-            <a:off x="5998464" y="3383280"/>
-            <a:ext cx="2468880" cy="457200"/>
-          </a:xfrm>
-          <a:prstGeom prst="rect">
-            <a:avLst/>
-          </a:prstGeom>
-          <a:noFill/>
-        </p:spPr>
-        <p:txBody>
-          <a:bodyPr wrap="square">
-            <a:spAutoFit/>
-          </a:bodyPr>
-          <a:lstStyle/>
-          <a:p>
-            <a:pPr algn="l"/>
-            <a:r>
-              <a:rPr sz="1050" b="0" i="0">
-                <a:solidFill>
-                  <a:srgbClr val="107C10"/>
-                </a:solidFill>
-              </a:rPr>
-              <a:t>5–7%</a:t>
-            </a:r>
-          </a:p>
-        </p:txBody>
-      </p:sp>
-      <p:sp>
-        <p:nvSpPr>
-          <p:cNvPr id="42" name="Rectangle 41"/>
-          <p:cNvSpPr/>
-          <p:nvPr/>
-        </p:nvSpPr>
-        <p:spPr>
-          <a:xfrm>
-            <a:off x="8595360" y="3310128"/>
-            <a:ext cx="2743200" cy="548640"/>
-          </a:xfrm>
-          <a:prstGeom prst="rect">
-            <a:avLst/>
-          </a:prstGeom>
-          <a:solidFill>
-            <a:srgbClr val="FFFFFF"/>
-          </a:solidFill>
-          <a:ln>
-            <a:noFill/>
-          </a:ln>
-        </p:spPr>
-        <p:style>
-          <a:lnRef idx="1">
-            <a:schemeClr val="accent1"/>
-          </a:lnRef>
-          <a:fillRef idx="3">
-            <a:schemeClr val="accent1"/>
-          </a:fillRef>
-          <a:effectRef idx="2">
-            <a:schemeClr val="accent1"/>
-          </a:effectRef>
-          <a:fontRef idx="minor">
-            <a:schemeClr val="lt1"/>
-          </a:fontRef>
-        </p:style>
-        <p:txBody>
-          <a:bodyPr rtlCol="0" anchor="ctr"/>
-          <a:lstStyle/>
-          <a:p>
-            <a:pPr algn="ctr"/>
-          </a:p>
-        </p:txBody>
-      </p:sp>
-      <p:sp>
-        <p:nvSpPr>
-          <p:cNvPr id="43" name="TextBox 42"/>
-          <p:cNvSpPr txBox="1"/>
-          <p:nvPr/>
-        </p:nvSpPr>
-        <p:spPr>
-          <a:xfrm>
-            <a:off x="8650224" y="3383280"/>
-            <a:ext cx="2651760" cy="457200"/>
-          </a:xfrm>
-          <a:prstGeom prst="rect">
-            <a:avLst/>
-          </a:prstGeom>
-          <a:noFill/>
-        </p:spPr>
-        <p:txBody>
-          <a:bodyPr wrap="square">
-            <a:spAutoFit/>
-          </a:bodyPr>
-          <a:lstStyle/>
-          <a:p>
-            <a:pPr algn="l"/>
-            <a:r>
-              <a:rPr sz="1050" b="0" i="0">
-                <a:solidFill>
-                  <a:srgbClr val="252525"/>
-                </a:solidFill>
-              </a:rPr>
-              <a:t>US −2 to −4 pp</a:t>
-            </a:r>
-          </a:p>
-        </p:txBody>
-      </p:sp>
-      <p:sp>
-        <p:nvSpPr>
-          <p:cNvPr id="44" name="Rectangle 43"/>
-          <p:cNvSpPr/>
-          <p:nvPr/>
-        </p:nvSpPr>
-        <p:spPr>
-          <a:xfrm>
-            <a:off x="365760" y="3858768"/>
-            <a:ext cx="3566160" cy="548640"/>
-          </a:xfrm>
-          <a:prstGeom prst="rect">
-            <a:avLst/>
-          </a:prstGeom>
-          <a:solidFill>
-            <a:srgbClr val="F2F2F2"/>
-          </a:solidFill>
-          <a:ln>
-            <a:noFill/>
-          </a:ln>
-        </p:spPr>
-        <p:style>
-          <a:lnRef idx="1">
-            <a:schemeClr val="accent1"/>
-          </a:lnRef>
-          <a:fillRef idx="3">
-            <a:schemeClr val="accent1"/>
-          </a:fillRef>
-          <a:effectRef idx="2">
-            <a:schemeClr val="accent1"/>
-          </a:effectRef>
-          <a:fontRef idx="minor">
-            <a:schemeClr val="lt1"/>
-          </a:fontRef>
-        </p:style>
-        <p:txBody>
-          <a:bodyPr rtlCol="0" anchor="ctr"/>
-          <a:lstStyle/>
-          <a:p>
-            <a:pPr algn="ctr"/>
-          </a:p>
-        </p:txBody>
-      </p:sp>
-      <p:sp>
-        <p:nvSpPr>
-          <p:cNvPr id="45" name="TextBox 44"/>
-          <p:cNvSpPr txBox="1"/>
-          <p:nvPr/>
-        </p:nvSpPr>
-        <p:spPr>
-          <a:xfrm>
-            <a:off x="420624" y="3931920"/>
-            <a:ext cx="3474720" cy="457200"/>
-          </a:xfrm>
-          <a:prstGeom prst="rect">
-            <a:avLst/>
-          </a:prstGeom>
-          <a:noFill/>
-        </p:spPr>
-        <p:txBody>
-          <a:bodyPr wrap="square">
-            <a:spAutoFit/>
-          </a:bodyPr>
-          <a:lstStyle/>
-          <a:p>
-            <a:pPr algn="l"/>
-            <a:r>
-              <a:rPr sz="1050" b="0" i="0">
-                <a:solidFill>
-                  <a:srgbClr val="252525"/>
-                </a:solidFill>
-              </a:rPr>
-              <a:t>Life expectancy</a:t>
-            </a:r>
-          </a:p>
-        </p:txBody>
-      </p:sp>
-      <p:sp>
-        <p:nvSpPr>
-          <p:cNvPr id="46" name="Rectangle 45"/>
-          <p:cNvSpPr/>
-          <p:nvPr/>
-        </p:nvSpPr>
-        <p:spPr>
-          <a:xfrm>
-            <a:off x="4023360" y="3858768"/>
-            <a:ext cx="1828800" cy="548640"/>
-          </a:xfrm>
-          <a:prstGeom prst="rect">
-            <a:avLst/>
-          </a:prstGeom>
-          <a:solidFill>
-            <a:srgbClr val="F2F2F2"/>
-          </a:solidFill>
-          <a:ln>
-            <a:noFill/>
-          </a:ln>
-        </p:spPr>
-        <p:style>
-          <a:lnRef idx="1">
-            <a:schemeClr val="accent1"/>
-          </a:lnRef>
-          <a:fillRef idx="3">
-            <a:schemeClr val="accent1"/>
-          </a:fillRef>
-          <a:effectRef idx="2">
-            <a:schemeClr val="accent1"/>
-          </a:effectRef>
-          <a:fontRef idx="minor">
-            <a:schemeClr val="lt1"/>
-          </a:fontRef>
-        </p:style>
-        <p:txBody>
-          <a:bodyPr rtlCol="0" anchor="ctr"/>
-          <a:lstStyle/>
-          <a:p>
-            <a:pPr algn="ctr"/>
-          </a:p>
-        </p:txBody>
-      </p:sp>
-      <p:sp>
-        <p:nvSpPr>
-          <p:cNvPr id="47" name="TextBox 46"/>
-          <p:cNvSpPr txBox="1"/>
-          <p:nvPr/>
-        </p:nvSpPr>
-        <p:spPr>
-          <a:xfrm>
-            <a:off x="4078224" y="3931920"/>
-            <a:ext cx="1737360" cy="457200"/>
-          </a:xfrm>
-          <a:prstGeom prst="rect">
-            <a:avLst/>
-          </a:prstGeom>
-          <a:noFill/>
-        </p:spPr>
-        <p:txBody>
-          <a:bodyPr wrap="square">
-            <a:spAutoFit/>
-          </a:bodyPr>
-          <a:lstStyle/>
-          <a:p>
-            <a:pPr algn="l"/>
-            <a:r>
-              <a:rPr sz="1050" b="1" i="0">
-                <a:solidFill>
-                  <a:srgbClr val="D87000"/>
-                </a:solidFill>
-              </a:rPr>
-              <a:t>78.5 yrs</a:t>
-            </a:r>
-          </a:p>
-        </p:txBody>
-      </p:sp>
-      <p:sp>
-        <p:nvSpPr>
-          <p:cNvPr id="48" name="Rectangle 47"/>
-          <p:cNvSpPr/>
-          <p:nvPr/>
-        </p:nvSpPr>
-        <p:spPr>
-          <a:xfrm>
-            <a:off x="5943600" y="3858768"/>
-            <a:ext cx="2560320" cy="548640"/>
-          </a:xfrm>
-          <a:prstGeom prst="rect">
-            <a:avLst/>
-          </a:prstGeom>
-          <a:solidFill>
-            <a:srgbClr val="F2F2F2"/>
-          </a:solidFill>
-          <a:ln>
-            <a:noFill/>
-          </a:ln>
-        </p:spPr>
-        <p:style>
-          <a:lnRef idx="1">
-            <a:schemeClr val="accent1"/>
-          </a:lnRef>
-          <a:fillRef idx="3">
-            <a:schemeClr val="accent1"/>
-          </a:fillRef>
-          <a:effectRef idx="2">
-            <a:schemeClr val="accent1"/>
-          </a:effectRef>
-          <a:fontRef idx="minor">
-            <a:schemeClr val="lt1"/>
-          </a:fontRef>
-        </p:style>
-        <p:txBody>
-          <a:bodyPr rtlCol="0" anchor="ctr"/>
-          <a:lstStyle/>
-          <a:p>
-            <a:pPr algn="ctr"/>
-          </a:p>
-        </p:txBody>
-      </p:sp>
-      <p:sp>
-        <p:nvSpPr>
-          <p:cNvPr id="49" name="TextBox 48"/>
-          <p:cNvSpPr txBox="1"/>
-          <p:nvPr/>
-        </p:nvSpPr>
-        <p:spPr>
-          <a:xfrm>
-            <a:off x="5998464" y="3931920"/>
-            <a:ext cx="2468880" cy="457200"/>
-          </a:xfrm>
-          <a:prstGeom prst="rect">
-            <a:avLst/>
-          </a:prstGeom>
-          <a:noFill/>
-        </p:spPr>
-        <p:txBody>
-          <a:bodyPr wrap="square">
-            <a:spAutoFit/>
-          </a:bodyPr>
-          <a:lstStyle/>
-          <a:p>
-            <a:pPr algn="l"/>
-            <a:r>
-              <a:rPr sz="1050" b="0" i="0">
-                <a:solidFill>
-                  <a:srgbClr val="107C10"/>
-                </a:solidFill>
-              </a:rPr>
-              <a:t>83–84 yrs</a:t>
-            </a:r>
-          </a:p>
-        </p:txBody>
-      </p:sp>
-      <p:sp>
-        <p:nvSpPr>
-          <p:cNvPr id="50" name="Rectangle 49"/>
-          <p:cNvSpPr/>
-          <p:nvPr/>
-        </p:nvSpPr>
-        <p:spPr>
-          <a:xfrm>
-            <a:off x="8595360" y="3858768"/>
-            <a:ext cx="2743200" cy="548640"/>
-          </a:xfrm>
-          <a:prstGeom prst="rect">
-            <a:avLst/>
-          </a:prstGeom>
-          <a:solidFill>
-            <a:srgbClr val="F2F2F2"/>
-          </a:solidFill>
-          <a:ln>
-            <a:noFill/>
-          </a:ln>
-        </p:spPr>
-        <p:style>
-          <a:lnRef idx="1">
-            <a:schemeClr val="accent1"/>
-          </a:lnRef>
-          <a:fillRef idx="3">
-            <a:schemeClr val="accent1"/>
-          </a:fillRef>
-          <a:effectRef idx="2">
-            <a:schemeClr val="accent1"/>
-          </a:effectRef>
-          <a:fontRef idx="minor">
-            <a:schemeClr val="lt1"/>
-          </a:fontRef>
-        </p:style>
-        <p:txBody>
-          <a:bodyPr rtlCol="0" anchor="ctr"/>
-          <a:lstStyle/>
-          <a:p>
-            <a:pPr algn="ctr"/>
-          </a:p>
-        </p:txBody>
-      </p:sp>
-      <p:sp>
-        <p:nvSpPr>
-          <p:cNvPr id="51" name="TextBox 50"/>
-          <p:cNvSpPr txBox="1"/>
-          <p:nvPr/>
-        </p:nvSpPr>
-        <p:spPr>
-          <a:xfrm>
-            <a:off x="8650224" y="3931920"/>
-            <a:ext cx="2651760" cy="457200"/>
-          </a:xfrm>
-          <a:prstGeom prst="rect">
-            <a:avLst/>
-          </a:prstGeom>
-          <a:noFill/>
-        </p:spPr>
-        <p:txBody>
-          <a:bodyPr wrap="square">
-            <a:spAutoFit/>
-          </a:bodyPr>
-          <a:lstStyle/>
-          <a:p>
-            <a:pPr algn="l"/>
-            <a:r>
-              <a:rPr sz="1050" b="0" i="0">
-                <a:solidFill>
-                  <a:srgbClr val="252525"/>
-                </a:solidFill>
-              </a:rPr>
-              <a:t>US −5 yrs</a:t>
-            </a:r>
-          </a:p>
-        </p:txBody>
-      </p:sp>
-      <p:sp>
-        <p:nvSpPr>
-          <p:cNvPr id="52" name="Rectangle 51"/>
-          <p:cNvSpPr/>
-          <p:nvPr/>
-        </p:nvSpPr>
-        <p:spPr>
-          <a:xfrm>
-            <a:off x="365760" y="5102352"/>
-            <a:ext cx="11430000" cy="868680"/>
-          </a:xfrm>
-          <a:prstGeom prst="rect">
-            <a:avLst/>
-          </a:prstGeom>
-          <a:solidFill>
-            <a:srgbClr val="004578"/>
-          </a:solidFill>
-          <a:ln>
-            <a:noFill/>
-          </a:ln>
-        </p:spPr>
-        <p:style>
-          <a:lnRef idx="1">
-            <a:schemeClr val="accent1"/>
-          </a:lnRef>
-          <a:fillRef idx="3">
-            <a:schemeClr val="accent1"/>
-          </a:fillRef>
-          <a:effectRef idx="2">
-            <a:schemeClr val="accent1"/>
-          </a:effectRef>
-          <a:fontRef idx="minor">
-            <a:schemeClr val="lt1"/>
-          </a:fontRef>
-        </p:style>
-        <p:txBody>
-          <a:bodyPr rtlCol="0" anchor="ctr"/>
-          <a:lstStyle/>
-          <a:p>
-            <a:pPr algn="ctr"/>
-          </a:p>
-        </p:txBody>
-      </p:sp>
-      <p:sp>
-        <p:nvSpPr>
-          <p:cNvPr id="53" name="TextBox 52"/>
-          <p:cNvSpPr txBox="1"/>
-          <p:nvPr/>
-        </p:nvSpPr>
-        <p:spPr>
-          <a:xfrm>
-            <a:off x="502920" y="5212080"/>
-            <a:ext cx="11155680" cy="685800"/>
-          </a:xfrm>
-          <a:prstGeom prst="rect">
-            <a:avLst/>
-          </a:prstGeom>
-          <a:noFill/>
-        </p:spPr>
-        <p:txBody>
-          <a:bodyPr wrap="square">
-            <a:spAutoFit/>
-          </a:bodyPr>
-          <a:lstStyle/>
-          <a:p>
-            <a:pPr algn="ctr"/>
-            <a:r>
-              <a:rPr sz="1400" b="1" i="0">
-                <a:solidFill>
-                  <a:srgbClr val="FFFFFF"/>
-                </a:solidFill>
-              </a:rPr>
-              <a:t>The gap is not in hospital equipment — it's in what happens before people need a hospital.</a:t>
-            </a:r>
-          </a:p>
-        </p:txBody>
-      </p:sp>
-      <p:sp>
-        <p:nvSpPr>
-          <p:cNvPr id="54" name="TextBox 53"/>
-          <p:cNvSpPr txBox="1"/>
-          <p:nvPr/>
-        </p:nvSpPr>
-        <p:spPr>
-          <a:xfrm>
-            <a:off x="365760" y="6583680"/>
-            <a:ext cx="11430000" cy="237744"/>
-          </a:xfrm>
-          <a:prstGeom prst="rect">
-            <a:avLst/>
-          </a:prstGeom>
-          <a:noFill/>
-        </p:spPr>
-        <p:txBody>
-          <a:bodyPr wrap="square">
-            <a:spAutoFit/>
-          </a:bodyPr>
-          <a:lstStyle/>
-          <a:p>
-            <a:pPr algn="l"/>
-            <a:r>
-              <a:rPr sz="800" b="0" i="1">
-                <a:solidFill>
-                  <a:srgbClr val="737373"/>
-                </a:solidFill>
-              </a:rPr>
-              <a:t>Source: OECD Health at a Glance 2023, WHO Global Health Observatory, World Bank WDI.</a:t>
+              <a:rPr sz="750" b="0" i="1">
+                <a:solidFill>
+                  <a:srgbClr val="9CA3AF"/>
+                </a:solidFill>
+              </a:rPr>
+              <a:t>Built on the attached Power BI analysis (World Bank WDI) · added factors: OECD, WHO, World Bank.</a:t>
             </a:r>
           </a:p>
         </p:txBody>

--- a/health_expenditure_analysis.pptx
+++ b/health_expenditure_analysis.pptx
@@ -3794,7 +3794,7 @@
                   <a:srgbClr val="9CA3AF"/>
                 </a:solidFill>
               </a:rPr>
-              <a:t>Source: World Bank, World Development Indicators (health expenditure &amp; life expectancy, 2000–2023 averages). Focus: among the world’s highest spenders.</a:t>
+              <a:t>Source: World Bank, World Development Indicators (health expenditure &amp; life expectancy, 2000–2023 averages). Peer comparison restricted to the world’s highest-spending countries.</a:t>
             </a:r>
           </a:p>
         </p:txBody>
@@ -3919,7 +3919,7 @@
                   <a:srgbClr val="2BA88A"/>
                 </a:solidFill>
               </a:rPr>
-              <a:t>out-live</a:t>
+              <a:t>outlive</a:t>
             </a:r>
             <a:r>
               <a:rPr sz="2700" b="1">
@@ -4181,7 +4181,7 @@
                   <a:srgbClr val="4B5563"/>
                 </a:solidFill>
               </a:rPr>
-              <a:t>Skills predict the behaviours — diet,</a:t>
+              <a:t>Skills predict the behaviors — diet,</a:t>
             </a:r>
           </a:p>
           <a:p>
@@ -4928,18 +4928,7 @@
                   <a:srgbClr val="4B5563"/>
                 </a:solidFill>
               </a:rPr>
-              <a:t>A common defence: “Americans die younger</a:t>
-            </a:r>
-          </a:p>
-          <a:p>
-            <a:pPr algn="l"/>
-            <a:r>
-              <a:rPr sz="1200" b="0" i="0">
-                <a:solidFill>
-                  <a:srgbClr val="4B5563"/>
-                </a:solidFill>
-              </a:rPr>
-              <a:t>because the U.S. is different.”</a:t>
+              <a:t>Some argue demographics explain the gap — that the U.S. is simply younger.</a:t>
             </a:r>
           </a:p>
           <a:p>
@@ -6354,7 +6343,7 @@
                   <a:srgbClr val="374151"/>
                 </a:solidFill>
               </a:rPr>
-              <a:t>Medical price level</a:t>
+              <a:t>Medical price level (OECD = 100)</a:t>
             </a:r>
           </a:p>
         </p:txBody>
